--- a/docs/presentations/office-agent-tech-interaction-20260829_ppt169_20260829/exports/Office-Agent-技术差异与交互影响-20260829.pptx
+++ b/docs/presentations/office-agent-tech-interaction-20260829_ppt169_20260829/exports/Office-Agent-技术差异与交互影响-20260829.pptx
@@ -5,7 +5,7 @@
     <p:sldMasterId id="2147483648" r:id="rId1"/>
   </p:sldMasterIdLst>
   <p:notesMasterIdLst>
-    <p:notesMasterId r:id="rId24"/>
+    <p:notesMasterId r:id="rId28"/>
   </p:notesMasterIdLst>
   <p:sldIdLst>
     <p:sldId id="256" r:id="rId7"/>
@@ -25,6 +25,10 @@
     <p:sldId id="270" r:id="rId21"/>
     <p:sldId id="271" r:id="rId22"/>
     <p:sldId id="272" r:id="rId23"/>
+    <p:sldId id="273" r:id="rId24"/>
+    <p:sldId id="274" r:id="rId25"/>
+    <p:sldId id="275" r:id="rId26"/>
+    <p:sldId id="276" r:id="rId27"/>
   </p:sldIdLst>
   <p:sldSz cx="12192000" cy="6858000" type="screen4x3"/>
   <p:notesSz cx="6858000" cy="9144000"/>
@@ -919,7 +923,7 @@
           <a:p>
             <a:r>
               <a:rPr lang="zh-CN" dirty="0"/>
-              <a:t>转场：最后一页把工程门和研究门放在同一条路线中。</a:t>
+              <a:t>转场：接下来用四页真实界面，把前面讲的系统纵切完整走一遍。</a:t>
             </a:r>
           </a:p>
           <a:p>
@@ -996,7 +1000,7 @@
           <a:p>
             <a:r>
               <a:rPr lang="zh-CN" dirty="0"/>
-              <a:t>下一阶段仍然延续 07-16 的目标：让工作在约束下持续收敛，但结论必须经过五道证据门。先做 PDF、XLSX、DOCX 的格式原生 Locator；再让 Artifact、EffectReceipt、provenance 和未执行边界一起导出；随后把固定适配器扩展成可配置业务 Verifier；再引入 Worker、Tool、Connector、Permit 和幂等回执；最后冻结同一任务、模型和来源做竞品同场挑战，并开展目标用户研究。只有这些门通过，“差异候选”才可以升级为“已验证优势”。</a:t>
+              <a:t>这页回答最直接的问题：我们到底做了什么。不是又做了一张 Agent 对话页面，而是把一条办公任务纵切跑通了。</a:t>
             </a:r>
           </a:p>
           <a:p>
@@ -1005,7 +1009,7 @@
           <a:p>
             <a:r>
               <a:rPr lang="zh-CN" dirty="0"/>
-              <a:t>转场：请评审决定的不是一句“看起来不错”，而是是否同意按这五道门继续生产证据。</a:t>
+              <a:t>第一层是 Workspace。系统面对的是 15 个顶层目录、96 份输入文件，文件都通过服务端 allowlist、大小、哈希、格式和非链接校验后再进入安全预览。第二层是 Task Contract。用户只写任务目标，服务端冻结可读范围、预算、禁止动作和当前版本。第三层是 Planner 与 Analyst。模型调用、服务端校验和模型输出采用分别记录，不再把“模型返回了”写成“当前结论已经采用”。第四层是 Branch Evidence Gate。某条证据不能唯一定位时，只让受影响分支等待，其他已完成成果继续保留。第五层是真实 Artifact 与回执。当前固定场景可以生成可下载文件，执行具名确定性检查，并把 Snapshot 和有序 Trace 留下来。</a:t>
             </a:r>
           </a:p>
           <a:p>
@@ -1014,7 +1018,7 @@
           <a:p>
             <a:r>
               <a:rPr lang="zh-CN" dirty="0"/>
-              <a:t>证据/边界：https://modelcontextprotocol.io/specification/draft/client/elicitation ；https://a2a-protocol.org/dev/specification/ ；https://www.w3.org/TR/prov-o/ ；https://www.microsoft.com/en-us/research/publication/guidelines-for-human-ai-interaction/ ；https://research.google/pubs/measuring-the-user-experience-on-a-large-scale-user-centered-metrics-for-web-applications/</a:t>
+              <a:t>右侧不是概念图，而是当前系统完成 TC-01 后的完整运行界面：左侧是资料库，中间是任务、Agent 路径和成果，右侧是有序 Control Loop 记录。</a:t>
             </a:r>
           </a:p>
           <a:p>
@@ -1023,7 +1027,260 @@
           <a:p>
             <a:r>
               <a:rPr lang="zh-CN" dirty="0"/>
-              <a:t>预期问题：当前可以对外承诺什么？只能承诺固定公开数据上的系统实测与明确边界，不承诺全面领先、生产 SLA 或用户价值。</a:t>
+              <a:t>这条链已经证明的是固定公开数据上的受限纵切；尚未证明的是通用语义正确、任意办公文件写入、生产级 Connector 和生产 SLA。</a:t>
+            </a:r>
+          </a:p>
+          <a:p>
+            <a:endParaRPr lang="en-US" dirty="0"/>
+          </a:p>
+          <a:p>
+            <a:r>
+              <a:rPr lang="zh-CN" dirty="0"/>
+              <a:t>转场：下一页从用户输入开始，看“自主选择资料”具体怎样发生。</a:t>
+            </a:r>
+          </a:p>
+          <a:p>
+            <a:endParaRPr lang="en-US" dirty="0"/>
+          </a:p>
+          <a:p>
+            <a:r>
+              <a:rPr lang="zh-CN" dirty="0"/>
+              <a:t>证据/边界：当前系统实测；截图来自固定公开数据运行，不是竞品对照或生产环境。</a:t>
+            </a:r>
+          </a:p>
+          <a:p>
+            <a:endParaRPr lang="en-US" dirty="0"/>
+          </a:p>
+          <a:p>
+            <a:r>
+              <a:rPr lang="zh-CN" dirty="0"/>
+              <a:t>预期问题：这是不是一个为固定 Demo 写死的流程？当前确有固定成果适配器，但 Workspace、合同、分支、证据门、Snapshot 和 Trace 是通用运行时结构。</a:t>
+            </a:r>
+          </a:p>
+        </p:txBody>
+      </p:sp>
+    </p:spTree>
+  </p:cSld>
+  <p:clrMapOvr>
+    <a:masterClrMapping/>
+  </p:clrMapOvr>
+</p:notes>
+</file>
+
+<file path=ppt/notesSlides/notesSlide18.xml><?xml version="1.0" encoding="utf-8"?>
+<p:notes xmlns:a="http://schemas.openxmlformats.org/drawingml/2006/main" xmlns:r="http://schemas.openxmlformats.org/officeDocument/2006/relationships" xmlns:p="http://schemas.openxmlformats.org/presentationml/2006/main">
+  <p:cSld>
+    <p:spTree>
+      <p:nvGrpSpPr>
+        <p:cNvPr id="1" name=""/>
+        <p:cNvGrpSpPr/>
+        <p:nvPr/>
+      </p:nvGrpSpPr>
+      <p:grpSpPr>
+        <a:xfrm>
+          <a:off x="0" y="0"/>
+          <a:ext cx="0" cy="0"/>
+          <a:chOff x="0" y="0"/>
+          <a:chExt cx="0" cy="0"/>
+        </a:xfrm>
+      </p:grpSpPr>
+      <p:sp>
+        <p:nvSpPr>
+          <p:cNvPr id="2" name="Slide Image Placeholder 1"/>
+          <p:cNvSpPr>
+            <a:spLocks noGrp="1" noRot="1" noChangeAspect="1"/>
+          </p:cNvSpPr>
+          <p:nvPr>
+            <p:ph type="sldImg"/>
+          </p:nvPr>
+        </p:nvSpPr>
+        <p:spPr/>
+      </p:sp>
+      <p:sp>
+        <p:nvSpPr>
+          <p:cNvPr id="3" name="Notes Placeholder 2"/>
+          <p:cNvSpPr>
+            <a:spLocks noGrp="1"/>
+          </p:cNvSpPr>
+          <p:nvPr>
+            <p:ph type="body" idx="1"/>
+          </p:nvPr>
+        </p:nvSpPr>
+        <p:spPr/>
+        <p:txBody>
+          <a:bodyPr/>
+          <a:lstStyle/>
+          <a:p>
+            <a:r>
+              <a:rPr lang="zh-CN" dirty="0"/>
+              <a:t>用户做的第一件事只有一个：写清业务目标。浏览器不会再要求用户先勾选文件，也不会提交客户端的 selected_file_refs。这样减少了一个“用户必须先知道答案在哪里”的前置负担。</a:t>
+            </a:r>
+          </a:p>
+          <a:p>
+            <a:endParaRPr lang="en-US" dirty="0"/>
+          </a:p>
+          <a:p>
+            <a:r>
+              <a:rPr lang="zh-CN" dirty="0"/>
+              <a:t>服务端创建 Run 时冻结完整 allowlisted 输入索引，scope_mode 是 whole_workspace。Planner 看到的是安全元数据，而不是绝对路径、隐藏任务、答案或内部哈希；它提出本轮需要的资料和分支，服务端再校验预算、来源、依赖、工具和禁止动作。</a:t>
+            </a:r>
+          </a:p>
+          <a:p>
+            <a:endParaRPr lang="en-US" dirty="0"/>
+          </a:p>
+          <a:p>
+            <a:r>
+              <a:rPr lang="zh-CN" dirty="0"/>
+              <a:t>前台因此必须补上三类反馈。第一，解释本轮为什么选择这些资料；第二，区分规划模型和分析模型是否调用、输出是否被采用；第三，持续显示当前轮次、剩余调用预算、阶段和有序 Trace。用户少做了文件选择，但系统多承担了范围解释责任。</a:t>
+            </a:r>
+          </a:p>
+          <a:p>
+            <a:endParaRPr lang="en-US" dirty="0"/>
+          </a:p>
+          <a:p>
+            <a:r>
+              <a:rPr lang="zh-CN" dirty="0"/>
+              <a:t>这里不能把“自主选择资料”说成“已经穷举所有相关资料”。当前最多三轮，选择仍可能不完整，所以完成结果仍需证据核对、成果检查和人工复核。</a:t>
+            </a:r>
+          </a:p>
+          <a:p>
+            <a:endParaRPr lang="en-US" dirty="0"/>
+          </a:p>
+          <a:p>
+            <a:r>
+              <a:rPr lang="zh-CN" dirty="0"/>
+              <a:t>转场：如果选择到的来源文字不能唯一定位，系统不会把整项任务推倒重来。</a:t>
+            </a:r>
+          </a:p>
+          <a:p>
+            <a:endParaRPr lang="en-US" dirty="0"/>
+          </a:p>
+          <a:p>
+            <a:r>
+              <a:rPr lang="zh-CN" dirty="0"/>
+              <a:t>证据/边界：当前系统实测；全库范围、服务端 Planner 和前台 Trace 的显示均以本次 Snapshot 为准。</a:t>
+            </a:r>
+          </a:p>
+          <a:p>
+            <a:endParaRPr lang="en-US" dirty="0"/>
+          </a:p>
+          <a:p>
+            <a:r>
+              <a:rPr lang="zh-CN" dirty="0"/>
+              <a:t>预期问题：为什么不把全部 96 份文件都交给模型？因为服务端需要控制上下文、成本和来源范围，并保留每轮选择依据。</a:t>
+            </a:r>
+          </a:p>
+        </p:txBody>
+      </p:sp>
+    </p:spTree>
+  </p:cSld>
+  <p:clrMapOvr>
+    <a:masterClrMapping/>
+  </p:clrMapOvr>
+</p:notes>
+</file>
+
+<file path=ppt/notesSlides/notesSlide19.xml><?xml version="1.0" encoding="utf-8"?>
+<p:notes xmlns:a="http://schemas.openxmlformats.org/drawingml/2006/main" xmlns:r="http://schemas.openxmlformats.org/officeDocument/2006/relationships" xmlns:p="http://schemas.openxmlformats.org/presentationml/2006/main">
+  <p:cSld>
+    <p:spTree>
+      <p:nvGrpSpPr>
+        <p:cNvPr id="1" name=""/>
+        <p:cNvGrpSpPr/>
+        <p:nvPr/>
+      </p:nvGrpSpPr>
+      <p:grpSpPr>
+        <a:xfrm>
+          <a:off x="0" y="0"/>
+          <a:ext cx="0" cy="0"/>
+          <a:chOff x="0" y="0"/>
+          <a:chExt cx="0" cy="0"/>
+        </a:xfrm>
+      </p:grpSpPr>
+      <p:sp>
+        <p:nvSpPr>
+          <p:cNvPr id="2" name="Slide Image Placeholder 1"/>
+          <p:cNvSpPr>
+            <a:spLocks noGrp="1" noRot="1" noChangeAspect="1"/>
+          </p:cNvSpPr>
+          <p:nvPr>
+            <p:ph type="sldImg"/>
+          </p:nvPr>
+        </p:nvSpPr>
+        <p:spPr/>
+      </p:sp>
+      <p:sp>
+        <p:nvSpPr>
+          <p:cNvPr id="3" name="Notes Placeholder 2"/>
+          <p:cNvSpPr>
+            <a:spLocks noGrp="1"/>
+          </p:cNvSpPr>
+          <p:nvPr>
+            <p:ph type="body" idx="1"/>
+          </p:nvPr>
+        </p:nvSpPr>
+        <p:spPr/>
+        <p:txBody>
+          <a:bodyPr/>
+          <a:lstStyle/>
+          <a:p>
+            <a:r>
+              <a:rPr lang="zh-CN" dirty="0"/>
+              <a:t>这页展示证据出现歧义时的真实处理。典型情况不是“没有源文件”，而是模型给出的逐字片段在安全预览里出现多次，服务端无法唯一决定应该回开哪一处。</a:t>
+            </a:r>
+          </a:p>
+          <a:p>
+            <a:endParaRPr lang="en-US" dirty="0"/>
+          </a:p>
+          <a:p>
+            <a:r>
+              <a:rPr lang="zh-CN" dirty="0"/>
+              <a:t>界面先用业务语言回答三件事：发生了什么、这会影响什么、用户现在需要做什么。然后给出候选原文位置和安全预览高亮。用户选择的是来源位置，不是在替 Agent 判断结论一定正确。</a:t>
+            </a:r>
+          </a:p>
+          <a:p>
+            <a:endParaRPr lang="en-US" dirty="0"/>
+          </a:p>
+          <a:p>
+            <a:r>
+              <a:rPr lang="zh-CN" dirty="0"/>
+              <a:t>右下角的小图展示同一轮里不同 Branch 可以有不同动作：一条需要用户确认原文位置，另一条可能只需要继续本分支。DecisionRequest 绑定 expected_version、source_revision、候选和受影响 Branch；来源版本变化时进入 stale，不能把旧选择直接套到新文件。</a:t>
+            </a:r>
+          </a:p>
+          <a:p>
+            <a:endParaRPr lang="en-US" dirty="0"/>
+          </a:p>
+          <a:p>
+            <a:r>
+              <a:rPr lang="zh-CN" dirty="0"/>
+              <a:t>用户确认后，只恢复目标 Branch。已完成 ArtifactVersion、其他 Branch 和已有核对记录不被覆盖。这是局部恢复和整轮重跑在用户体验上的关键差别。</a:t>
+            </a:r>
+          </a:p>
+          <a:p>
+            <a:endParaRPr lang="en-US" dirty="0"/>
+          </a:p>
+          <a:p>
+            <a:r>
+              <a:rPr lang="zh-CN" dirty="0"/>
+              <a:t>转场：最后看成果已经生成后，系统如何区分文件事实、业务效果和模型说明。</a:t>
+            </a:r>
+          </a:p>
+          <a:p>
+            <a:endParaRPr lang="en-US" dirty="0"/>
+          </a:p>
+          <a:p>
+            <a:r>
+              <a:rPr lang="zh-CN" dirty="0"/>
+              <a:t>证据/边界：当前系统实测；位置确认只证明 locator 与来源成员关系，不证明自然语言蕴含、穷举或算术全面正确。</a:t>
+            </a:r>
+          </a:p>
+          <a:p>
+            <a:endParaRPr lang="en-US" dirty="0"/>
+          </a:p>
+          <a:p>
+            <a:r>
+              <a:rPr lang="zh-CN" dirty="0"/>
+              <a:t>预期问题：为什么还要人选位置？格式原生 Locator 尚未完全覆盖，当前保留可审计的人工决定比服务端猜一个位置更稳妥。</a:t>
             </a:r>
           </a:p>
         </p:txBody>
@@ -1110,6 +1367,205 @@
             <a:r>
               <a:rPr lang="zh-CN" dirty="0"/>
               <a:t>预期问题：为什么一定要拆成三个 Demo，而不是做一个大而全的 Agent？</a:t>
+            </a:r>
+          </a:p>
+        </p:txBody>
+      </p:sp>
+    </p:spTree>
+  </p:cSld>
+  <p:clrMapOvr>
+    <a:masterClrMapping/>
+  </p:clrMapOvr>
+</p:notes>
+</file>
+
+<file path=ppt/notesSlides/notesSlide20.xml><?xml version="1.0" encoding="utf-8"?>
+<p:notes xmlns:a="http://schemas.openxmlformats.org/drawingml/2006/main" xmlns:r="http://schemas.openxmlformats.org/officeDocument/2006/relationships" xmlns:p="http://schemas.openxmlformats.org/presentationml/2006/main">
+  <p:cSld>
+    <p:spTree>
+      <p:nvGrpSpPr>
+        <p:cNvPr id="1" name=""/>
+        <p:cNvGrpSpPr/>
+        <p:nvPr/>
+      </p:nvGrpSpPr>
+      <p:grpSpPr>
+        <a:xfrm>
+          <a:off x="0" y="0"/>
+          <a:ext cx="0" cy="0"/>
+          <a:chOff x="0" y="0"/>
+          <a:chExt cx="0" cy="0"/>
+        </a:xfrm>
+      </p:grpSpPr>
+      <p:sp>
+        <p:nvSpPr>
+          <p:cNvPr id="2" name="Slide Image Placeholder 1"/>
+          <p:cNvSpPr>
+            <a:spLocks noGrp="1" noRot="1" noChangeAspect="1"/>
+          </p:cNvSpPr>
+          <p:nvPr>
+            <p:ph type="sldImg"/>
+          </p:nvPr>
+        </p:nvSpPr>
+        <p:spPr/>
+      </p:sp>
+      <p:sp>
+        <p:nvSpPr>
+          <p:cNvPr id="3" name="Notes Placeholder 2"/>
+          <p:cNvSpPr>
+            <a:spLocks noGrp="1"/>
+          </p:cNvSpPr>
+          <p:nvPr>
+            <p:ph type="body" idx="1"/>
+          </p:nvPr>
+        </p:nvSpPr>
+        <p:spPr/>
+        <p:txBody>
+          <a:bodyPr/>
+          <a:lstStyle/>
+          <a:p>
+            <a:r>
+              <a:rPr lang="zh-CN" dirty="0"/>
+              <a:t>左侧展示成果与业务效果分层。当前固定场景能够在隔离 Run 工作区生成真实文件，用户可以下载；系统还会执行具名确定性检查，并记录 EffectReceipt。与此同时，付款、核销、发送、写 CRM 等未发生动作会继续明确显示为未发生。</a:t>
+            </a:r>
+          </a:p>
+          <a:p>
+            <a:endParaRPr lang="en-US" dirty="0"/>
+          </a:p>
+          <a:p>
+            <a:r>
+              <a:rPr lang="zh-CN" dirty="0"/>
+              <a:t>右侧展示模型说明与确定性成果冲突时的处理。模型确实被调用，因此 called=true；但它给出的行数或分组与确定性成果不一致时，output_used=false。前台只保留一套当前结论，冲突说明进入审计轨迹，而不是与通过检查的成果并排争夺用户注意力。</a:t>
+            </a:r>
+          </a:p>
+          <a:p>
+            <a:endParaRPr lang="en-US" dirty="0"/>
+          </a:p>
+          <a:p>
+            <a:r>
+              <a:rPr lang="zh-CN" dirty="0"/>
+              <a:t>这一步把“模型说了什么”和“系统已经采用什么”分开，也把“文件存在”和“业务动作发生”分开。对用户的直接影响，是成果可以先用、依据可以继续审、错误说明不会覆盖事实。</a:t>
+            </a:r>
+          </a:p>
+          <a:p>
+            <a:endParaRPr lang="en-US" dirty="0"/>
+          </a:p>
+          <a:p>
+            <a:r>
+              <a:rPr lang="zh-CN" dirty="0"/>
+              <a:t>当前边界仍然清楚：固定检查只证明特定字段、结构和效果，不是通用语义真值证明器；成果通过也不代表业务价值或最终判断自动成立。</a:t>
+            </a:r>
+          </a:p>
+          <a:p>
+            <a:endParaRPr lang="en-US" dirty="0"/>
+          </a:p>
+          <a:p>
+            <a:r>
+              <a:rPr lang="zh-CN" dirty="0"/>
+              <a:t>转场：有了这条实操纵切，最后再看下一阶段怎样把差异候选升级为证据。</a:t>
+            </a:r>
+          </a:p>
+          <a:p>
+            <a:endParaRPr lang="en-US" dirty="0"/>
+          </a:p>
+          <a:p>
+            <a:r>
+              <a:rPr lang="zh-CN" dirty="0"/>
+              <a:t>证据/边界：当前系统实测；固定成果适配器与叙事对账覆盖既定场景，不外推到任意办公任务。</a:t>
+            </a:r>
+          </a:p>
+          <a:p>
+            <a:endParaRPr lang="en-US" dirty="0"/>
+          </a:p>
+          <a:p>
+            <a:r>
+              <a:rPr lang="zh-CN" dirty="0"/>
+              <a:t>预期问题：固定检查会不会把模型变得多余？不会，模型仍负责规划、跨资料归纳和提出候选；确定性检查负责约束可复算事实。</a:t>
+            </a:r>
+          </a:p>
+        </p:txBody>
+      </p:sp>
+    </p:spTree>
+  </p:cSld>
+  <p:clrMapOvr>
+    <a:masterClrMapping/>
+  </p:clrMapOvr>
+</p:notes>
+</file>
+
+<file path=ppt/notesSlides/notesSlide21.xml><?xml version="1.0" encoding="utf-8"?>
+<p:notes xmlns:a="http://schemas.openxmlformats.org/drawingml/2006/main" xmlns:r="http://schemas.openxmlformats.org/officeDocument/2006/relationships" xmlns:p="http://schemas.openxmlformats.org/presentationml/2006/main">
+  <p:cSld>
+    <p:spTree>
+      <p:nvGrpSpPr>
+        <p:cNvPr id="1" name=""/>
+        <p:cNvGrpSpPr/>
+        <p:nvPr/>
+      </p:nvGrpSpPr>
+      <p:grpSpPr>
+        <a:xfrm>
+          <a:off x="0" y="0"/>
+          <a:ext cx="0" cy="0"/>
+          <a:chOff x="0" y="0"/>
+          <a:chExt cx="0" cy="0"/>
+        </a:xfrm>
+      </p:grpSpPr>
+      <p:sp>
+        <p:nvSpPr>
+          <p:cNvPr id="2" name="Slide Image Placeholder 1"/>
+          <p:cNvSpPr>
+            <a:spLocks noGrp="1" noRot="1" noChangeAspect="1"/>
+          </p:cNvSpPr>
+          <p:nvPr>
+            <p:ph type="sldImg"/>
+          </p:nvPr>
+        </p:nvSpPr>
+        <p:spPr/>
+      </p:sp>
+      <p:sp>
+        <p:nvSpPr>
+          <p:cNvPr id="3" name="Notes Placeholder 2"/>
+          <p:cNvSpPr>
+            <a:spLocks noGrp="1"/>
+          </p:cNvSpPr>
+          <p:nvPr>
+            <p:ph type="body" idx="1"/>
+          </p:nvPr>
+        </p:nvSpPr>
+        <p:spPr/>
+        <p:txBody>
+          <a:bodyPr/>
+          <a:lstStyle/>
+          <a:p>
+            <a:r>
+              <a:rPr lang="zh-CN" dirty="0"/>
+              <a:t>下一阶段仍然延续 07-16 的目标：让工作在约束下持续收敛，但结论必须经过五道证据门。先做 PDF、XLSX、DOCX 的格式原生 Locator；再让 Artifact、EffectReceipt、provenance 和未执行边界一起导出；随后把固定适配器扩展成可配置业务 Verifier；再引入 Worker、Tool、Connector、Permit 和幂等回执；最后冻结同一任务、模型和来源做竞品同场挑战，并开展目标用户研究。只有这些门通过，“差异候选”才可以升级为“已验证优势”。</a:t>
+            </a:r>
+          </a:p>
+          <a:p>
+            <a:endParaRPr lang="en-US" dirty="0"/>
+          </a:p>
+          <a:p>
+            <a:r>
+              <a:rPr lang="zh-CN" dirty="0"/>
+              <a:t>转场：请评审决定的不是一句“看起来不错”，而是是否同意按这五道门继续生产证据。</a:t>
+            </a:r>
+          </a:p>
+          <a:p>
+            <a:endParaRPr lang="en-US" dirty="0"/>
+          </a:p>
+          <a:p>
+            <a:r>
+              <a:rPr lang="zh-CN" dirty="0"/>
+              <a:t>证据/边界：https://modelcontextprotocol.io/specification/draft/client/elicitation ；https://a2a-protocol.org/dev/specification/ ；https://www.w3.org/TR/prov-o/ ；https://www.microsoft.com/en-us/research/publication/guidelines-for-human-ai-interaction/ ；https://research.google/pubs/measuring-the-user-experience-on-a-large-scale-user-centered-metrics-for-web-applications/</a:t>
+            </a:r>
+          </a:p>
+          <a:p>
+            <a:endParaRPr lang="en-US" dirty="0"/>
+          </a:p>
+          <a:p>
+            <a:r>
+              <a:rPr lang="zh-CN" dirty="0"/>
+              <a:t>预期问题：当前可以对外承诺什么？只能承诺固定公开数据上的系统实测与明确边界，不承诺全面领先、生产 SLA 或用户价值。</a:t>
             </a:r>
           </a:p>
         </p:txBody>
@@ -5409,8 +5865,8 @@
           </p:blipFill>
           <p:spPr>
             <a:xfrm>
-              <a:off x="6019800" y="1428750"/>
-              <a:ext cx="5562600" cy="3476625"/>
+              <a:off x="6023610" y="1333500"/>
+              <a:ext cx="5554980" cy="3857625"/>
             </a:xfrm>
             <a:prstGeom prst="rect">
               <a:avLst/>
@@ -5635,8 +6091,8 @@
           </p:nvSpPr>
           <p:spPr>
             <a:xfrm>
-              <a:off x="6014466" y="5163502"/>
-              <a:ext cx="3550310" cy="205359"/>
+              <a:off x="6014466" y="5277802"/>
+              <a:ext cx="3512972" cy="205359"/>
             </a:xfrm>
             <a:prstGeom prst="rect">
               <a:avLst/>
@@ -5662,7 +6118,7 @@
                   <a:ea typeface="Microsoft YaHei"/>
                   <a:cs typeface="Segoe UI"/>
                 </a:rPr>
-                <a:t>当前系统实测 · 公开 FORTE 数据，不是企业生产网盘</a:t>
+                <a:t>当前系统实测 · 自主检索、真实成果与有序 Trace 同屏</a:t>
               </a:r>
             </a:p>
           </p:txBody>
@@ -5757,7 +6213,7 @@
                   <a:ea typeface="Consolas"/>
                   <a:cs typeface="Consolas"/>
                 </a:rPr>
-                <a:t>01 / 17</a:t>
+                <a:t>01 / 21</a:t>
               </a:r>
             </a:p>
           </p:txBody>
@@ -7418,7 +7874,7 @@
                   <a:ea typeface="Consolas"/>
                   <a:cs typeface="Consolas"/>
                 </a:rPr>
-                <a:t>10 / 17</a:t>
+                <a:t>10 / 21</a:t>
               </a:r>
             </a:p>
           </p:txBody>
@@ -8770,7 +9226,7 @@
                   <a:ea typeface="Consolas"/>
                   <a:cs typeface="Consolas"/>
                 </a:rPr>
-                <a:t>11 / 17</a:t>
+                <a:t>11 / 21</a:t>
               </a:r>
             </a:p>
           </p:txBody>
@@ -11695,7 +12151,7 @@
                   <a:ea typeface="Consolas"/>
                   <a:cs typeface="Consolas"/>
                 </a:rPr>
-                <a:t>12 / 17</a:t>
+                <a:t>12 / 21</a:t>
               </a:r>
             </a:p>
           </p:txBody>
@@ -13611,7 +14067,7 @@
                   <a:ea typeface="Consolas"/>
                   <a:cs typeface="Consolas"/>
                 </a:rPr>
-                <a:t>13 / 17</a:t>
+                <a:t>13 / 21</a:t>
               </a:r>
             </a:p>
           </p:txBody>
@@ -15276,7 +15732,7 @@
                   <a:ea typeface="Consolas"/>
                   <a:cs typeface="Consolas"/>
                 </a:rPr>
-                <a:t>14 / 17</a:t>
+                <a:t>14 / 21</a:t>
               </a:r>
             </a:p>
           </p:txBody>
@@ -16523,7 +16979,7 @@
                   <a:ea typeface="Consolas"/>
                   <a:cs typeface="Consolas"/>
                 </a:rPr>
-                <a:t>15 / 17</a:t>
+                <a:t>15 / 21</a:t>
               </a:r>
             </a:p>
           </p:txBody>
@@ -18227,7 +18683,7 @@
                   <a:ea typeface="Consolas"/>
                   <a:cs typeface="Consolas"/>
                 </a:rPr>
-                <a:t>16 / 17</a:t>
+                <a:t>16 / 21</a:t>
               </a:r>
             </a:p>
           </p:txBody>
@@ -18299,39 +18755,55 @@
         </p:sp>
         <p:sp>
           <p:nvSpPr>
-            <p:cNvPr id="3" name="Rectangle 3"/>
+            <p:cNvPr id="3" name="Freeform 3"/>
             <p:cNvSpPr/>
             <p:nvPr/>
           </p:nvSpPr>
           <p:spPr>
             <a:xfrm>
-              <a:off x="0" y="0"/>
-              <a:ext cx="171450" cy="6858000"/>
-            </a:xfrm>
-            <a:prstGeom prst="rect">
-              <a:avLst/>
-            </a:prstGeom>
+              <a:off x="495300" y="1066800"/>
+              <a:ext cx="11201400" cy="9525"/>
+            </a:xfrm>
+            <a:custGeom>
+              <a:avLst/>
+              <a:gdLst/>
+              <a:ahLst/>
+              <a:cxnLst/>
+              <a:rect l="l" t="t" r="r" b="b"/>
+              <a:pathLst>
+                <a:path w="11201400" h="9525">
+                  <a:moveTo>
+                    <a:pt x="0" y="0"/>
+                  </a:moveTo>
+                  <a:lnTo>
+                    <a:pt x="11201400" y="0"/>
+                  </a:lnTo>
+                </a:path>
+              </a:pathLst>
+            </a:custGeom>
             <a:solidFill>
-              <a:srgbClr val="1769E0"/>
+              <a:srgbClr val="000000"/>
             </a:solidFill>
-            <a:ln>
-              <a:noFill/>
+            <a:ln w="19050">
+              <a:solidFill>
+                <a:srgbClr val="CBD5DF"/>
+              </a:solidFill>
             </a:ln>
           </p:spPr>
         </p:sp>
       </p:grpSp>
       <p:grpSp>
         <p:nvGrpSpPr>
-          <p:cNvPr id="7" name="Group 7"/>
+          <p:cNvPr id="8" name="Group 8"/>
           <p:cNvGrpSpPr/>
           <p:nvPr/>
         </p:nvGrpSpPr>
         <p:grpSpPr>
           <a:xfrm>
-            <a:off x="477774" y="408622"/>
-            <a:ext cx="8983630" cy="949262"/>
-            <a:chOff x="477774" y="408622"/>
-            <a:chExt cx="8983630" cy="949262"/>
+            <a:off x="477774" y="370522"/>
+            <a:ext cx="11218926" cy="674751"/>
+            <a:chOff x="477774" y="370522"/>
+            <a:chExt cx="11218926" cy="674751"/>
           </a:xfrm>
         </p:grpSpPr>
         <p:sp>
@@ -18342,8 +18814,8 @@
           </p:nvSpPr>
           <p:spPr>
             <a:xfrm>
-              <a:off x="477774" y="408622"/>
-              <a:ext cx="8983630" cy="674751"/>
+              <a:off x="477774" y="370522"/>
+              <a:ext cx="8325288" cy="674751"/>
             </a:xfrm>
             <a:prstGeom prst="rect">
               <a:avLst/>
@@ -18369,47 +18841,71 @@
                   <a:ea typeface="Microsoft YaHei"/>
                   <a:cs typeface="Segoe UI Semibold"/>
                 </a:rPr>
-                <a:t>下一阶段：把 07-16 方向变成可证伪证据</a:t>
-              </a:r>
-            </a:p>
-          </p:txBody>
-        </p:sp>
-        <p:sp>
-          <p:nvSpPr>
-            <p:cNvPr id="6" name="TextBox 6"/>
-            <p:cNvSpPr txBox="1"/>
-            <p:nvPr/>
-          </p:nvSpPr>
-          <p:spPr>
-            <a:xfrm>
-              <a:off x="486156" y="1005840"/>
-              <a:ext cx="5833872" cy="352044"/>
-            </a:xfrm>
-            <a:prstGeom prst="rect">
-              <a:avLst/>
-            </a:prstGeom>
-            <a:noFill/>
-            <a:ln>
-              <a:noFill/>
-            </a:ln>
-          </p:spPr>
-          <p:txBody>
-            <a:bodyPr wrap="none" lIns="0" tIns="0" rIns="0" bIns="0" anchor="t" anchorCtr="0">
-              <a:spAutoFit/>
-            </a:bodyPr>
-            <a:lstStyle/>
-            <a:p>
-              <a:pPr algn="l"/>
-              <a:r>
-                <a:rPr lang="zh-CN" sz="1800" dirty="0">
-                  <a:solidFill>
-                    <a:srgbClr val="5A6B7C"/>
+                <a:t>我们到底做了什么：跑通办公任务纵切</a:t>
+              </a:r>
+            </a:p>
+          </p:txBody>
+        </p:sp>
+        <p:sp>
+          <p:nvSpPr>
+            <p:cNvPr id="6" name="Rectangle 6"/>
+            <p:cNvSpPr/>
+            <p:nvPr/>
+          </p:nvSpPr>
+          <p:spPr>
+            <a:xfrm>
+              <a:off x="10172700" y="438150"/>
+              <a:ext cx="1524000" cy="323850"/>
+            </a:xfrm>
+            <a:prstGeom prst="roundRect">
+              <a:avLst>
+                <a:gd name="adj" fmla="val 17647"/>
+              </a:avLst>
+            </a:prstGeom>
+            <a:solidFill>
+              <a:srgbClr val="EDF1F4"/>
+            </a:solidFill>
+            <a:ln>
+              <a:noFill/>
+            </a:ln>
+          </p:spPr>
+        </p:sp>
+        <p:sp>
+          <p:nvSpPr>
+            <p:cNvPr id="7" name="TextBox 7"/>
+            <p:cNvSpPr txBox="1"/>
+            <p:nvPr/>
+          </p:nvSpPr>
+          <p:spPr>
+            <a:xfrm>
+              <a:off x="10413302" y="519589"/>
+              <a:ext cx="1042797" cy="249364"/>
+            </a:xfrm>
+            <a:prstGeom prst="rect">
+              <a:avLst/>
+            </a:prstGeom>
+            <a:noFill/>
+            <a:ln>
+              <a:noFill/>
+            </a:ln>
+          </p:spPr>
+          <p:txBody>
+            <a:bodyPr wrap="none" lIns="0" tIns="0" rIns="0" bIns="0" anchor="t" anchorCtr="0">
+              <a:spAutoFit/>
+            </a:bodyPr>
+            <a:lstStyle/>
+            <a:p>
+              <a:pPr algn="ctr"/>
+              <a:r>
+                <a:rPr lang="zh-CN" sz="1280" dirty="0">
+                  <a:solidFill>
+                    <a:srgbClr val="1769E0"/>
                   </a:solidFill>
                   <a:latin typeface="Segoe UI"/>
                   <a:ea typeface="Microsoft YaHei"/>
                   <a:cs typeface="Segoe UI"/>
                 </a:rPr>
-                <a:t>先闭合可信失败与恢复，再扩大业务效果和外部动作。</a:t>
+                <a:t>当前系统实测</a:t>
               </a:r>
             </a:p>
           </p:txBody>
@@ -18417,28 +18913,68 @@
       </p:grpSp>
       <p:grpSp>
         <p:nvGrpSpPr>
-          <p:cNvPr id="43" name="Group 43"/>
+          <p:cNvPr id="34" name="Group 34"/>
           <p:cNvGrpSpPr/>
           <p:nvPr/>
         </p:nvGrpSpPr>
         <p:grpSpPr>
           <a:xfrm>
-            <a:off x="495300" y="1962150"/>
-            <a:ext cx="11201400" cy="2286000"/>
-            <a:chOff x="495300" y="1962150"/>
-            <a:chExt cx="11201400" cy="2286000"/>
+            <a:off x="484632" y="1221105"/>
+            <a:ext cx="4473892" cy="4836795"/>
+            <a:chOff x="484632" y="1221105"/>
+            <a:chExt cx="4473892" cy="4836795"/>
           </a:xfrm>
         </p:grpSpPr>
         <p:sp>
           <p:nvSpPr>
-            <p:cNvPr id="8" name="Freeform 8"/>
+            <p:cNvPr id="9" name="TextBox 9"/>
+            <p:cNvSpPr txBox="1"/>
+            <p:nvPr/>
+          </p:nvSpPr>
+          <p:spPr>
+            <a:xfrm>
+              <a:off x="484632" y="1221105"/>
+              <a:ext cx="4473892" cy="410718"/>
+            </a:xfrm>
+            <a:prstGeom prst="rect">
+              <a:avLst/>
+            </a:prstGeom>
+            <a:noFill/>
+            <a:ln>
+              <a:noFill/>
+            </a:ln>
+          </p:spPr>
+          <p:txBody>
+            <a:bodyPr wrap="none" lIns="0" tIns="0" rIns="0" bIns="0" anchor="t" anchorCtr="0">
+              <a:spAutoFit/>
+            </a:bodyPr>
+            <a:lstStyle/>
+            <a:p>
+              <a:pPr algn="l"/>
+              <a:r>
+                <a:rPr lang="zh-CN" sz="2100" b="1" dirty="0">
+                  <a:solidFill>
+                    <a:srgbClr val="132A3A"/>
+                  </a:solidFill>
+                  <a:latin typeface="Segoe UI Semibold"/>
+                  <a:ea typeface="Microsoft YaHei"/>
+                  <a:cs typeface="Segoe UI Semibold"/>
+                </a:rPr>
+                <a:t>不是回答页，而是一条可复核链路</a:t>
+              </a:r>
+            </a:p>
+          </p:txBody>
+        </p:sp>
+        <p:sp>
+          <p:nvSpPr>
+            <p:cNvPr id="10" name="Freeform 10"/>
             <p:cNvSpPr/>
             <p:nvPr/>
           </p:nvSpPr>
           <p:spPr>
             <a:xfrm>
-              <a:off x="495300" y="1962150"/>
-              <a:ext cx="2114550" cy="2286000"/>
+              <a:off x="742950" y="1943100"/>
+              <a:ext cx="9525" cy="2876550"/>
             </a:xfrm>
             <a:custGeom>
               <a:avLst/>
@@ -18447,86 +18983,98 @@
               <a:cxnLst/>
               <a:rect l="l" t="t" r="r" b="b"/>
               <a:pathLst>
-                <a:path w="2114550" h="2286000">
+                <a:path w="9525" h="2876550">
                   <a:moveTo>
                     <a:pt x="0" y="0"/>
                   </a:moveTo>
                   <a:lnTo>
-                    <a:pt x="1828800" y="0"/>
+                    <a:pt x="0" y="2876550"/>
                   </a:lnTo>
-                  <a:lnTo>
-                    <a:pt x="2114550" y="1143000"/>
-                  </a:lnTo>
-                  <a:lnTo>
-                    <a:pt x="1828800" y="2286000"/>
-                  </a:lnTo>
-                  <a:lnTo>
-                    <a:pt x="0" y="2286000"/>
-                  </a:lnTo>
-                  <a:close/>
                 </a:path>
               </a:pathLst>
             </a:custGeom>
             <a:solidFill>
-              <a:srgbClr val="EDF1F4"/>
+              <a:srgbClr val="000000"/>
             </a:solidFill>
-            <a:ln w="19050">
+            <a:ln w="38100">
               <a:solidFill>
-                <a:srgbClr val="1769E0"/>
+                <a:srgbClr val="CBD5DF"/>
               </a:solidFill>
             </a:ln>
           </p:spPr>
         </p:sp>
         <p:sp>
           <p:nvSpPr>
-            <p:cNvPr id="9" name="TextBox 9"/>
-            <p:cNvSpPr txBox="1"/>
-            <p:nvPr/>
-          </p:nvSpPr>
-          <p:spPr>
-            <a:xfrm>
-              <a:off x="736473" y="2262664"/>
-              <a:ext cx="211199" cy="249364"/>
-            </a:xfrm>
-            <a:prstGeom prst="rect">
-              <a:avLst/>
-            </a:prstGeom>
-            <a:noFill/>
-            <a:ln>
-              <a:noFill/>
-            </a:ln>
-          </p:spPr>
-          <p:txBody>
-            <a:bodyPr wrap="none" lIns="0" tIns="0" rIns="0" bIns="0" anchor="t" anchorCtr="0">
-              <a:spAutoFit/>
-            </a:bodyPr>
-            <a:lstStyle/>
-            <a:p>
-              <a:pPr algn="l"/>
+            <p:cNvPr id="11" name="Ellipse 11"/>
+            <p:cNvSpPr/>
+            <p:nvPr/>
+          </p:nvSpPr>
+          <p:spPr>
+            <a:xfrm>
+              <a:off x="552450" y="1847850"/>
+              <a:ext cx="381000" cy="381000"/>
+            </a:xfrm>
+            <a:prstGeom prst="ellipse">
+              <a:avLst/>
+            </a:prstGeom>
+            <a:solidFill>
+              <a:srgbClr val="1769E0"/>
+            </a:solidFill>
+            <a:ln>
+              <a:noFill/>
+            </a:ln>
+          </p:spPr>
+        </p:sp>
+        <p:sp>
+          <p:nvSpPr>
+            <p:cNvPr id="12" name="TextBox 12"/>
+            <p:cNvSpPr txBox="1"/>
+            <p:nvPr/>
+          </p:nvSpPr>
+          <p:spPr>
+            <a:xfrm>
+              <a:off x="686912" y="1967389"/>
+              <a:ext cx="112076" cy="249364"/>
+            </a:xfrm>
+            <a:prstGeom prst="rect">
+              <a:avLst/>
+            </a:prstGeom>
+            <a:noFill/>
+            <a:ln>
+              <a:noFill/>
+            </a:ln>
+          </p:spPr>
+          <p:txBody>
+            <a:bodyPr wrap="none" lIns="0" tIns="0" rIns="0" bIns="0" anchor="t" anchorCtr="0">
+              <a:spAutoFit/>
+            </a:bodyPr>
+            <a:lstStyle/>
+            <a:p>
+              <a:pPr algn="ctr"/>
               <a:r>
                 <a:rPr lang="en-US" sz="1280" b="1" dirty="0">
                   <a:solidFill>
-                    <a:srgbClr val="1769E0"/>
+                    <a:srgbClr val="FFFFFF"/>
                   </a:solidFill>
                   <a:latin typeface="Consolas"/>
                   <a:ea typeface="Consolas"/>
                   <a:cs typeface="Consolas"/>
                 </a:rPr>
-                <a:t>01</a:t>
-              </a:r>
-            </a:p>
-          </p:txBody>
-        </p:sp>
-        <p:sp>
-          <p:nvSpPr>
-            <p:cNvPr id="10" name="TextBox 10"/>
-            <p:cNvSpPr txBox="1"/>
-            <p:nvPr/>
-          </p:nvSpPr>
-          <p:spPr>
-            <a:xfrm>
-              <a:off x="733806" y="2586990"/>
-              <a:ext cx="1595697" cy="352044"/>
+                <a:t>1</a:t>
+              </a:r>
+            </a:p>
+          </p:txBody>
+        </p:sp>
+        <p:sp>
+          <p:nvSpPr>
+            <p:cNvPr id="13" name="TextBox 13"/>
+            <p:cNvSpPr txBox="1"/>
+            <p:nvPr/>
+          </p:nvSpPr>
+          <p:spPr>
+            <a:xfrm>
+              <a:off x="1095756" y="1786890"/>
+              <a:ext cx="1336853" cy="352044"/>
             </a:xfrm>
             <a:prstGeom prst="rect">
               <a:avLst/>
@@ -18544,29 +19092,701 @@
             <a:p>
               <a:pPr algn="l"/>
               <a:r>
+                <a:rPr lang="en-US" sz="1800" b="1" dirty="0">
+                  <a:solidFill>
+                    <a:srgbClr val="132A3A"/>
+                  </a:solidFill>
+                  <a:latin typeface="Segoe UI Semibold"/>
+                  <a:ea typeface="Segoe UI Semibold"/>
+                  <a:cs typeface="Segoe UI Semibold"/>
+                </a:rPr>
+                <a:t>Workspace</a:t>
+              </a:r>
+            </a:p>
+          </p:txBody>
+        </p:sp>
+        <p:sp>
+          <p:nvSpPr>
+            <p:cNvPr id="14" name="TextBox 14"/>
+            <p:cNvSpPr txBox="1"/>
+            <p:nvPr/>
+          </p:nvSpPr>
+          <p:spPr>
+            <a:xfrm>
+              <a:off x="1098423" y="2110264"/>
+              <a:ext cx="2064058" cy="249364"/>
+            </a:xfrm>
+            <a:prstGeom prst="rect">
+              <a:avLst/>
+            </a:prstGeom>
+            <a:noFill/>
+            <a:ln>
+              <a:noFill/>
+            </a:ln>
+          </p:spPr>
+          <p:txBody>
+            <a:bodyPr wrap="none" lIns="0" tIns="0" rIns="0" bIns="0" anchor="t" anchorCtr="0">
+              <a:spAutoFit/>
+            </a:bodyPr>
+            <a:lstStyle/>
+            <a:p>
+              <a:pPr algn="l"/>
+              <a:r>
+                <a:rPr lang="zh-CN" sz="1280" dirty="0">
+                  <a:solidFill>
+                    <a:srgbClr val="5A6B7C"/>
+                  </a:solidFill>
+                  <a:latin typeface="Segoe UI"/>
+                  <a:ea typeface="Microsoft YaHei"/>
+                  <a:cs typeface="Segoe UI"/>
+                </a:rPr>
+                <a:t>15 个目录 · 96 份安全预览</a:t>
+              </a:r>
+            </a:p>
+          </p:txBody>
+        </p:sp>
+        <p:sp>
+          <p:nvSpPr>
+            <p:cNvPr id="15" name="Ellipse 15"/>
+            <p:cNvSpPr/>
+            <p:nvPr/>
+          </p:nvSpPr>
+          <p:spPr>
+            <a:xfrm>
+              <a:off x="552450" y="2533650"/>
+              <a:ext cx="381000" cy="381000"/>
+            </a:xfrm>
+            <a:prstGeom prst="ellipse">
+              <a:avLst/>
+            </a:prstGeom>
+            <a:solidFill>
+              <a:srgbClr val="1769E0"/>
+            </a:solidFill>
+            <a:ln>
+              <a:noFill/>
+            </a:ln>
+          </p:spPr>
+        </p:sp>
+        <p:sp>
+          <p:nvSpPr>
+            <p:cNvPr id="16" name="TextBox 16"/>
+            <p:cNvSpPr txBox="1"/>
+            <p:nvPr/>
+          </p:nvSpPr>
+          <p:spPr>
+            <a:xfrm>
+              <a:off x="686912" y="2653189"/>
+              <a:ext cx="112076" cy="249364"/>
+            </a:xfrm>
+            <a:prstGeom prst="rect">
+              <a:avLst/>
+            </a:prstGeom>
+            <a:noFill/>
+            <a:ln>
+              <a:noFill/>
+            </a:ln>
+          </p:spPr>
+          <p:txBody>
+            <a:bodyPr wrap="none" lIns="0" tIns="0" rIns="0" bIns="0" anchor="t" anchorCtr="0">
+              <a:spAutoFit/>
+            </a:bodyPr>
+            <a:lstStyle/>
+            <a:p>
+              <a:pPr algn="ctr"/>
+              <a:r>
+                <a:rPr lang="en-US" sz="1280" b="1" dirty="0">
+                  <a:solidFill>
+                    <a:srgbClr val="FFFFFF"/>
+                  </a:solidFill>
+                  <a:latin typeface="Consolas"/>
+                  <a:ea typeface="Consolas"/>
+                  <a:cs typeface="Consolas"/>
+                </a:rPr>
+                <a:t>2</a:t>
+              </a:r>
+            </a:p>
+          </p:txBody>
+        </p:sp>
+        <p:sp>
+          <p:nvSpPr>
+            <p:cNvPr id="17" name="TextBox 17"/>
+            <p:cNvSpPr txBox="1"/>
+            <p:nvPr/>
+          </p:nvSpPr>
+          <p:spPr>
+            <a:xfrm>
+              <a:off x="1095756" y="2472690"/>
+              <a:ext cx="1790429" cy="352044"/>
+            </a:xfrm>
+            <a:prstGeom prst="rect">
+              <a:avLst/>
+            </a:prstGeom>
+            <a:noFill/>
+            <a:ln>
+              <a:noFill/>
+            </a:ln>
+          </p:spPr>
+          <p:txBody>
+            <a:bodyPr wrap="none" lIns="0" tIns="0" rIns="0" bIns="0" anchor="t" anchorCtr="0">
+              <a:spAutoFit/>
+            </a:bodyPr>
+            <a:lstStyle/>
+            <a:p>
+              <a:pPr algn="l"/>
+              <a:r>
+                <a:rPr lang="en-US" sz="1800" b="1" dirty="0">
+                  <a:solidFill>
+                    <a:srgbClr val="132A3A"/>
+                  </a:solidFill>
+                  <a:latin typeface="Segoe UI Semibold"/>
+                  <a:ea typeface="Segoe UI Semibold"/>
+                  <a:cs typeface="Segoe UI Semibold"/>
+                </a:rPr>
+                <a:t>Task Contract</a:t>
+              </a:r>
+            </a:p>
+          </p:txBody>
+        </p:sp>
+        <p:sp>
+          <p:nvSpPr>
+            <p:cNvPr id="18" name="TextBox 18"/>
+            <p:cNvSpPr txBox="1"/>
+            <p:nvPr/>
+          </p:nvSpPr>
+          <p:spPr>
+            <a:xfrm>
+              <a:off x="1098423" y="2796064"/>
+              <a:ext cx="2415921" cy="249364"/>
+            </a:xfrm>
+            <a:prstGeom prst="rect">
+              <a:avLst/>
+            </a:prstGeom>
+            <a:noFill/>
+            <a:ln>
+              <a:noFill/>
+            </a:ln>
+          </p:spPr>
+          <p:txBody>
+            <a:bodyPr wrap="none" lIns="0" tIns="0" rIns="0" bIns="0" anchor="t" anchorCtr="0">
+              <a:spAutoFit/>
+            </a:bodyPr>
+            <a:lstStyle/>
+            <a:p>
+              <a:pPr algn="l"/>
+              <a:r>
+                <a:rPr lang="zh-CN" sz="1280" dirty="0">
+                  <a:solidFill>
+                    <a:srgbClr val="5A6B7C"/>
+                  </a:solidFill>
+                  <a:latin typeface="Segoe UI"/>
+                  <a:ea typeface="Microsoft YaHei"/>
+                  <a:cs typeface="Segoe UI"/>
+                </a:rPr>
+                <a:t>目标、范围、预算由服务端冻结</a:t>
+              </a:r>
+            </a:p>
+          </p:txBody>
+        </p:sp>
+        <p:sp>
+          <p:nvSpPr>
+            <p:cNvPr id="19" name="Ellipse 19"/>
+            <p:cNvSpPr/>
+            <p:nvPr/>
+          </p:nvSpPr>
+          <p:spPr>
+            <a:xfrm>
+              <a:off x="552450" y="3219450"/>
+              <a:ext cx="381000" cy="381000"/>
+            </a:xfrm>
+            <a:prstGeom prst="ellipse">
+              <a:avLst/>
+            </a:prstGeom>
+            <a:solidFill>
+              <a:srgbClr val="1769E0"/>
+            </a:solidFill>
+            <a:ln>
+              <a:noFill/>
+            </a:ln>
+          </p:spPr>
+        </p:sp>
+        <p:sp>
+          <p:nvSpPr>
+            <p:cNvPr id="20" name="TextBox 20"/>
+            <p:cNvSpPr txBox="1"/>
+            <p:nvPr/>
+          </p:nvSpPr>
+          <p:spPr>
+            <a:xfrm>
+              <a:off x="686912" y="3338989"/>
+              <a:ext cx="112076" cy="249364"/>
+            </a:xfrm>
+            <a:prstGeom prst="rect">
+              <a:avLst/>
+            </a:prstGeom>
+            <a:noFill/>
+            <a:ln>
+              <a:noFill/>
+            </a:ln>
+          </p:spPr>
+          <p:txBody>
+            <a:bodyPr wrap="none" lIns="0" tIns="0" rIns="0" bIns="0" anchor="t" anchorCtr="0">
+              <a:spAutoFit/>
+            </a:bodyPr>
+            <a:lstStyle/>
+            <a:p>
+              <a:pPr algn="ctr"/>
+              <a:r>
+                <a:rPr lang="en-US" sz="1280" b="1" dirty="0">
+                  <a:solidFill>
+                    <a:srgbClr val="FFFFFF"/>
+                  </a:solidFill>
+                  <a:latin typeface="Consolas"/>
+                  <a:ea typeface="Consolas"/>
+                  <a:cs typeface="Consolas"/>
+                </a:rPr>
+                <a:t>3</a:t>
+              </a:r>
+            </a:p>
+          </p:txBody>
+        </p:sp>
+        <p:sp>
+          <p:nvSpPr>
+            <p:cNvPr id="21" name="TextBox 21"/>
+            <p:cNvSpPr txBox="1"/>
+            <p:nvPr/>
+          </p:nvSpPr>
+          <p:spPr>
+            <a:xfrm>
+              <a:off x="1095756" y="3158490"/>
+              <a:ext cx="2159973" cy="352044"/>
+            </a:xfrm>
+            <a:prstGeom prst="rect">
+              <a:avLst/>
+            </a:prstGeom>
+            <a:noFill/>
+            <a:ln>
+              <a:noFill/>
+            </a:ln>
+          </p:spPr>
+          <p:txBody>
+            <a:bodyPr wrap="none" lIns="0" tIns="0" rIns="0" bIns="0" anchor="t" anchorCtr="0">
+              <a:spAutoFit/>
+            </a:bodyPr>
+            <a:lstStyle/>
+            <a:p>
+              <a:pPr algn="l"/>
+              <a:r>
+                <a:rPr lang="en-US" sz="1800" b="1" dirty="0">
+                  <a:solidFill>
+                    <a:srgbClr val="132A3A"/>
+                  </a:solidFill>
+                  <a:latin typeface="Segoe UI Semibold"/>
+                  <a:ea typeface="Segoe UI Semibold"/>
+                  <a:cs typeface="Segoe UI Semibold"/>
+                </a:rPr>
+                <a:t>Planner + Analyst</a:t>
+              </a:r>
+            </a:p>
+          </p:txBody>
+        </p:sp>
+        <p:sp>
+          <p:nvSpPr>
+            <p:cNvPr id="22" name="TextBox 22"/>
+            <p:cNvSpPr txBox="1"/>
+            <p:nvPr/>
+          </p:nvSpPr>
+          <p:spPr>
+            <a:xfrm>
+              <a:off x="1098423" y="3481864"/>
+              <a:ext cx="2244281" cy="249364"/>
+            </a:xfrm>
+            <a:prstGeom prst="rect">
+              <a:avLst/>
+            </a:prstGeom>
+            <a:noFill/>
+            <a:ln>
+              <a:noFill/>
+            </a:ln>
+          </p:spPr>
+          <p:txBody>
+            <a:bodyPr wrap="none" lIns="0" tIns="0" rIns="0" bIns="0" anchor="t" anchorCtr="0">
+              <a:spAutoFit/>
+            </a:bodyPr>
+            <a:lstStyle/>
+            <a:p>
+              <a:pPr algn="l"/>
+              <a:r>
+                <a:rPr lang="zh-CN" sz="1280" dirty="0">
+                  <a:solidFill>
+                    <a:srgbClr val="5A6B7C"/>
+                  </a:solidFill>
+                  <a:latin typeface="Segoe UI"/>
+                  <a:ea typeface="Microsoft YaHei"/>
+                  <a:cs typeface="Segoe UI"/>
+                </a:rPr>
+                <a:t>调用、校验、采用分别留回执</a:t>
+              </a:r>
+            </a:p>
+          </p:txBody>
+        </p:sp>
+        <p:sp>
+          <p:nvSpPr>
+            <p:cNvPr id="23" name="Ellipse 23"/>
+            <p:cNvSpPr/>
+            <p:nvPr/>
+          </p:nvSpPr>
+          <p:spPr>
+            <a:xfrm>
+              <a:off x="552450" y="3905250"/>
+              <a:ext cx="381000" cy="381000"/>
+            </a:xfrm>
+            <a:prstGeom prst="ellipse">
+              <a:avLst/>
+            </a:prstGeom>
+            <a:solidFill>
+              <a:srgbClr val="D97706"/>
+            </a:solidFill>
+            <a:ln>
+              <a:noFill/>
+            </a:ln>
+          </p:spPr>
+        </p:sp>
+        <p:sp>
+          <p:nvSpPr>
+            <p:cNvPr id="24" name="TextBox 24"/>
+            <p:cNvSpPr txBox="1"/>
+            <p:nvPr/>
+          </p:nvSpPr>
+          <p:spPr>
+            <a:xfrm>
+              <a:off x="686912" y="4024789"/>
+              <a:ext cx="112076" cy="249364"/>
+            </a:xfrm>
+            <a:prstGeom prst="rect">
+              <a:avLst/>
+            </a:prstGeom>
+            <a:noFill/>
+            <a:ln>
+              <a:noFill/>
+            </a:ln>
+          </p:spPr>
+          <p:txBody>
+            <a:bodyPr wrap="none" lIns="0" tIns="0" rIns="0" bIns="0" anchor="t" anchorCtr="0">
+              <a:spAutoFit/>
+            </a:bodyPr>
+            <a:lstStyle/>
+            <a:p>
+              <a:pPr algn="ctr"/>
+              <a:r>
+                <a:rPr lang="en-US" sz="1280" b="1" dirty="0">
+                  <a:solidFill>
+                    <a:srgbClr val="FFFFFF"/>
+                  </a:solidFill>
+                  <a:latin typeface="Consolas"/>
+                  <a:ea typeface="Consolas"/>
+                  <a:cs typeface="Consolas"/>
+                </a:rPr>
+                <a:t>4</a:t>
+              </a:r>
+            </a:p>
+          </p:txBody>
+        </p:sp>
+        <p:sp>
+          <p:nvSpPr>
+            <p:cNvPr id="25" name="TextBox 25"/>
+            <p:cNvSpPr txBox="1"/>
+            <p:nvPr/>
+          </p:nvSpPr>
+          <p:spPr>
+            <a:xfrm>
+              <a:off x="1095756" y="3844290"/>
+              <a:ext cx="2650817" cy="352044"/>
+            </a:xfrm>
+            <a:prstGeom prst="rect">
+              <a:avLst/>
+            </a:prstGeom>
+            <a:noFill/>
+            <a:ln>
+              <a:noFill/>
+            </a:ln>
+          </p:spPr>
+          <p:txBody>
+            <a:bodyPr wrap="none" lIns="0" tIns="0" rIns="0" bIns="0" anchor="t" anchorCtr="0">
+              <a:spAutoFit/>
+            </a:bodyPr>
+            <a:lstStyle/>
+            <a:p>
+              <a:pPr algn="l"/>
+              <a:r>
+                <a:rPr lang="en-US" sz="1800" b="1" dirty="0">
+                  <a:solidFill>
+                    <a:srgbClr val="132A3A"/>
+                  </a:solidFill>
+                  <a:latin typeface="Segoe UI Semibold"/>
+                  <a:ea typeface="Segoe UI Semibold"/>
+                  <a:cs typeface="Segoe UI Semibold"/>
+                </a:rPr>
+                <a:t>Branch Evidence Gate</a:t>
+              </a:r>
+            </a:p>
+          </p:txBody>
+        </p:sp>
+        <p:sp>
+          <p:nvSpPr>
+            <p:cNvPr id="26" name="TextBox 26"/>
+            <p:cNvSpPr txBox="1"/>
+            <p:nvPr/>
+          </p:nvSpPr>
+          <p:spPr>
+            <a:xfrm>
+              <a:off x="1098423" y="4167664"/>
+              <a:ext cx="2759202" cy="249364"/>
+            </a:xfrm>
+            <a:prstGeom prst="rect">
+              <a:avLst/>
+            </a:prstGeom>
+            <a:noFill/>
+            <a:ln>
+              <a:noFill/>
+            </a:ln>
+          </p:spPr>
+          <p:txBody>
+            <a:bodyPr wrap="none" lIns="0" tIns="0" rIns="0" bIns="0" anchor="t" anchorCtr="0">
+              <a:spAutoFit/>
+            </a:bodyPr>
+            <a:lstStyle/>
+            <a:p>
+              <a:pPr algn="l"/>
+              <a:r>
+                <a:rPr lang="zh-CN" sz="1280" dirty="0">
+                  <a:solidFill>
+                    <a:srgbClr val="5A6B7C"/>
+                  </a:solidFill>
+                  <a:latin typeface="Segoe UI"/>
+                  <a:ea typeface="Microsoft YaHei"/>
+                  <a:cs typeface="Segoe UI"/>
+                </a:rPr>
+                <a:t>局部停、局部补证、保留已完成成果</a:t>
+              </a:r>
+            </a:p>
+          </p:txBody>
+        </p:sp>
+        <p:sp>
+          <p:nvSpPr>
+            <p:cNvPr id="27" name="Ellipse 27"/>
+            <p:cNvSpPr/>
+            <p:nvPr/>
+          </p:nvSpPr>
+          <p:spPr>
+            <a:xfrm>
+              <a:off x="552450" y="4591050"/>
+              <a:ext cx="381000" cy="381000"/>
+            </a:xfrm>
+            <a:prstGeom prst="ellipse">
+              <a:avLst/>
+            </a:prstGeom>
+            <a:solidFill>
+              <a:srgbClr val="2E7D32"/>
+            </a:solidFill>
+            <a:ln>
+              <a:noFill/>
+            </a:ln>
+          </p:spPr>
+        </p:sp>
+        <p:sp>
+          <p:nvSpPr>
+            <p:cNvPr id="28" name="TextBox 28"/>
+            <p:cNvSpPr txBox="1"/>
+            <p:nvPr/>
+          </p:nvSpPr>
+          <p:spPr>
+            <a:xfrm>
+              <a:off x="686912" y="4710589"/>
+              <a:ext cx="112076" cy="249364"/>
+            </a:xfrm>
+            <a:prstGeom prst="rect">
+              <a:avLst/>
+            </a:prstGeom>
+            <a:noFill/>
+            <a:ln>
+              <a:noFill/>
+            </a:ln>
+          </p:spPr>
+          <p:txBody>
+            <a:bodyPr wrap="none" lIns="0" tIns="0" rIns="0" bIns="0" anchor="t" anchorCtr="0">
+              <a:spAutoFit/>
+            </a:bodyPr>
+            <a:lstStyle/>
+            <a:p>
+              <a:pPr algn="ctr"/>
+              <a:r>
+                <a:rPr lang="en-US" sz="1280" b="1" dirty="0">
+                  <a:solidFill>
+                    <a:srgbClr val="FFFFFF"/>
+                  </a:solidFill>
+                  <a:latin typeface="Consolas"/>
+                  <a:ea typeface="Consolas"/>
+                  <a:cs typeface="Consolas"/>
+                </a:rPr>
+                <a:t>5</a:t>
+              </a:r>
+            </a:p>
+          </p:txBody>
+        </p:sp>
+        <p:sp>
+          <p:nvSpPr>
+            <p:cNvPr id="29" name="TextBox 29"/>
+            <p:cNvSpPr txBox="1"/>
+            <p:nvPr/>
+          </p:nvSpPr>
+          <p:spPr>
+            <a:xfrm>
+              <a:off x="1095756" y="4530090"/>
+              <a:ext cx="2299821" cy="352044"/>
+            </a:xfrm>
+            <a:prstGeom prst="rect">
+              <a:avLst/>
+            </a:prstGeom>
+            <a:noFill/>
+            <a:ln>
+              <a:noFill/>
+            </a:ln>
+          </p:spPr>
+          <p:txBody>
+            <a:bodyPr wrap="none" lIns="0" tIns="0" rIns="0" bIns="0" anchor="t" anchorCtr="0">
+              <a:spAutoFit/>
+            </a:bodyPr>
+            <a:lstStyle/>
+            <a:p>
+              <a:pPr algn="l"/>
+              <a:r>
+                <a:rPr lang="en-US" sz="1800" b="1" dirty="0">
+                  <a:solidFill>
+                    <a:srgbClr val="132A3A"/>
+                  </a:solidFill>
+                  <a:latin typeface="Segoe UI Semibold"/>
+                  <a:ea typeface="Segoe UI Semibold"/>
+                  <a:cs typeface="Segoe UI Semibold"/>
+                </a:rPr>
+                <a:t>Artifact + Receipt</a:t>
+              </a:r>
+            </a:p>
+          </p:txBody>
+        </p:sp>
+        <p:sp>
+          <p:nvSpPr>
+            <p:cNvPr id="30" name="TextBox 30"/>
+            <p:cNvSpPr txBox="1"/>
+            <p:nvPr/>
+          </p:nvSpPr>
+          <p:spPr>
+            <a:xfrm>
+              <a:off x="1098423" y="4853464"/>
+              <a:ext cx="3432374" cy="249364"/>
+            </a:xfrm>
+            <a:prstGeom prst="rect">
+              <a:avLst/>
+            </a:prstGeom>
+            <a:noFill/>
+            <a:ln>
+              <a:noFill/>
+            </a:ln>
+          </p:spPr>
+          <p:txBody>
+            <a:bodyPr wrap="none" lIns="0" tIns="0" rIns="0" bIns="0" anchor="t" anchorCtr="0">
+              <a:spAutoFit/>
+            </a:bodyPr>
+            <a:lstStyle/>
+            <a:p>
+              <a:pPr algn="l"/>
+              <a:r>
+                <a:rPr lang="zh-CN" sz="1280" dirty="0">
+                  <a:solidFill>
+                    <a:srgbClr val="5A6B7C"/>
+                  </a:solidFill>
+                  <a:latin typeface="Segoe UI"/>
+                  <a:ea typeface="Microsoft YaHei"/>
+                  <a:cs typeface="Segoe UI"/>
+                </a:rPr>
+                <a:t>真实文件、确定性检查、Snapshot 与 Trace</a:t>
+              </a:r>
+            </a:p>
+          </p:txBody>
+        </p:sp>
+        <p:sp>
+          <p:nvSpPr>
+            <p:cNvPr id="31" name="Rectangle 31"/>
+            <p:cNvSpPr/>
+            <p:nvPr/>
+          </p:nvSpPr>
+          <p:spPr>
+            <a:xfrm>
+              <a:off x="495300" y="5257800"/>
+              <a:ext cx="3733800" cy="800100"/>
+            </a:xfrm>
+            <a:prstGeom prst="roundRect">
+              <a:avLst>
+                <a:gd name="adj" fmla="val 7143"/>
+              </a:avLst>
+            </a:prstGeom>
+            <a:solidFill>
+              <a:srgbClr val="132A3A"/>
+            </a:solidFill>
+            <a:ln>
+              <a:noFill/>
+            </a:ln>
+          </p:spPr>
+        </p:sp>
+        <p:sp>
+          <p:nvSpPr>
+            <p:cNvPr id="32" name="TextBox 32"/>
+            <p:cNvSpPr txBox="1"/>
+            <p:nvPr/>
+          </p:nvSpPr>
+          <p:spPr>
+            <a:xfrm>
+              <a:off x="714756" y="5387340"/>
+              <a:ext cx="3096913" cy="352044"/>
+            </a:xfrm>
+            <a:prstGeom prst="rect">
+              <a:avLst/>
+            </a:prstGeom>
+            <a:noFill/>
+            <a:ln>
+              <a:noFill/>
+            </a:ln>
+          </p:spPr>
+          <p:txBody>
+            <a:bodyPr wrap="none" lIns="0" tIns="0" rIns="0" bIns="0" anchor="t" anchorCtr="0">
+              <a:spAutoFit/>
+            </a:bodyPr>
+            <a:lstStyle/>
+            <a:p>
+              <a:pPr algn="l"/>
+              <a:r>
                 <a:rPr lang="zh-CN" sz="1800" b="1" dirty="0">
                   <a:solidFill>
-                    <a:srgbClr val="132A3A"/>
+                    <a:srgbClr val="FFFFFF"/>
                   </a:solidFill>
                   <a:latin typeface="Segoe UI Semibold"/>
                   <a:ea typeface="Microsoft YaHei"/>
                   <a:cs typeface="Segoe UI Semibold"/>
                 </a:rPr>
-                <a:t>原生 Locator</a:t>
-              </a:r>
-            </a:p>
-          </p:txBody>
-        </p:sp>
-        <p:sp>
-          <p:nvSpPr>
-            <p:cNvPr id="11" name="TextBox 11"/>
-            <p:cNvSpPr txBox="1"/>
-            <p:nvPr/>
-          </p:nvSpPr>
-          <p:spPr>
-            <a:xfrm>
-              <a:off x="736473" y="3005614"/>
-              <a:ext cx="547954" cy="249364"/>
+                <a:t>用户得到的不是一句“完成”</a:t>
+              </a:r>
+            </a:p>
+          </p:txBody>
+        </p:sp>
+        <p:sp>
+          <p:nvSpPr>
+            <p:cNvPr id="33" name="TextBox 33"/>
+            <p:cNvSpPr txBox="1"/>
+            <p:nvPr/>
+          </p:nvSpPr>
+          <p:spPr>
+            <a:xfrm>
+              <a:off x="717423" y="5729764"/>
+              <a:ext cx="2587562" cy="249364"/>
             </a:xfrm>
             <a:prstGeom prst="rect">
               <a:avLst/>
@@ -18586,1303 +19806,142 @@
               <a:r>
                 <a:rPr lang="zh-CN" sz="1280" dirty="0">
                   <a:solidFill>
-                    <a:srgbClr val="5A6B7C"/>
+                    <a:srgbClr val="CBD5DF"/>
                   </a:solidFill>
                   <a:latin typeface="Segoe UI"/>
                   <a:ea typeface="Microsoft YaHei"/>
                   <a:cs typeface="Segoe UI"/>
                 </a:rPr>
-                <a:t>PDF 页</a:t>
-              </a:r>
-            </a:p>
-          </p:txBody>
-        </p:sp>
-        <p:sp>
-          <p:nvSpPr>
-            <p:cNvPr id="12" name="TextBox 12"/>
-            <p:cNvSpPr txBox="1"/>
-            <p:nvPr/>
-          </p:nvSpPr>
-          <p:spPr>
-            <a:xfrm>
-              <a:off x="736473" y="3272314"/>
-              <a:ext cx="527876" cy="249364"/>
-            </a:xfrm>
-            <a:prstGeom prst="rect">
-              <a:avLst/>
-            </a:prstGeom>
-            <a:noFill/>
-            <a:ln>
-              <a:noFill/>
-            </a:ln>
-          </p:spPr>
-          <p:txBody>
-            <a:bodyPr wrap="none" lIns="0" tIns="0" rIns="0" bIns="0" anchor="t" anchorCtr="0">
-              <a:spAutoFit/>
-            </a:bodyPr>
-            <a:lstStyle/>
-            <a:p>
-              <a:pPr algn="l"/>
-              <a:r>
-                <a:rPr lang="zh-CN" sz="1280" dirty="0">
-                  <a:solidFill>
-                    <a:srgbClr val="5A6B7C"/>
-                  </a:solidFill>
-                  <a:latin typeface="Segoe UI"/>
-                  <a:ea typeface="Microsoft YaHei"/>
-                  <a:cs typeface="Segoe UI"/>
-                </a:rPr>
-                <a:t>表格行</a:t>
-              </a:r>
-            </a:p>
-          </p:txBody>
-        </p:sp>
-        <p:sp>
-          <p:nvSpPr>
-            <p:cNvPr id="13" name="TextBox 13"/>
-            <p:cNvSpPr txBox="1"/>
-            <p:nvPr/>
-          </p:nvSpPr>
-          <p:spPr>
-            <a:xfrm>
-              <a:off x="736473" y="3539014"/>
-              <a:ext cx="1394660" cy="249364"/>
-            </a:xfrm>
-            <a:prstGeom prst="rect">
-              <a:avLst/>
-            </a:prstGeom>
-            <a:noFill/>
-            <a:ln>
-              <a:noFill/>
-            </a:ln>
-          </p:spPr>
-          <p:txBody>
-            <a:bodyPr wrap="none" lIns="0" tIns="0" rIns="0" bIns="0" anchor="t" anchorCtr="0">
-              <a:spAutoFit/>
-            </a:bodyPr>
-            <a:lstStyle/>
-            <a:p>
-              <a:pPr algn="l"/>
-              <a:r>
-                <a:rPr lang="zh-CN" sz="1280" dirty="0">
-                  <a:solidFill>
-                    <a:srgbClr val="5A6B7C"/>
-                  </a:solidFill>
-                  <a:latin typeface="Segoe UI"/>
-                  <a:ea typeface="Microsoft YaHei"/>
-                  <a:cs typeface="Segoe UI"/>
-                </a:rPr>
-                <a:t>正文块 + revision</a:t>
-              </a:r>
-            </a:p>
-          </p:txBody>
-        </p:sp>
-        <p:sp>
-          <p:nvSpPr>
-            <p:cNvPr id="14" name="Freeform 14"/>
+                <a:t>而是成果、依据、影响和下一步。</a:t>
+              </a:r>
+            </a:p>
+          </p:txBody>
+        </p:sp>
+      </p:grpSp>
+      <p:grpSp>
+        <p:nvGrpSpPr>
+          <p:cNvPr id="39" name="Group 39"/>
+          <p:cNvGrpSpPr/>
+          <p:nvPr/>
+        </p:nvGrpSpPr>
+        <p:grpSpPr>
+          <a:xfrm>
+            <a:off x="4457700" y="1333500"/>
+            <a:ext cx="7239000" cy="5029200"/>
+            <a:chOff x="4457700" y="1333500"/>
+            <a:chExt cx="7239000" cy="5029200"/>
+          </a:xfrm>
+        </p:grpSpPr>
+        <p:sp>
+          <p:nvSpPr>
+            <p:cNvPr id="35" name="Rectangle 35"/>
             <p:cNvSpPr/>
             <p:nvPr/>
           </p:nvSpPr>
           <p:spPr>
             <a:xfrm>
-              <a:off x="2609850" y="1962150"/>
-              <a:ext cx="2019300" cy="2286000"/>
-            </a:xfrm>
-            <a:custGeom>
-              <a:avLst/>
-              <a:gdLst/>
-              <a:ahLst/>
-              <a:cxnLst/>
-              <a:rect l="l" t="t" r="r" b="b"/>
-              <a:pathLst>
-                <a:path w="2019300" h="2286000">
-                  <a:moveTo>
-                    <a:pt x="0" y="0"/>
-                  </a:moveTo>
-                  <a:lnTo>
-                    <a:pt x="1733550" y="0"/>
-                  </a:lnTo>
-                  <a:lnTo>
-                    <a:pt x="2019300" y="1143000"/>
-                  </a:lnTo>
-                  <a:lnTo>
-                    <a:pt x="1733550" y="2286000"/>
-                  </a:lnTo>
-                  <a:lnTo>
-                    <a:pt x="0" y="2286000"/>
-                  </a:lnTo>
-                  <a:lnTo>
-                    <a:pt x="285750" y="1143000"/>
-                  </a:lnTo>
-                  <a:close/>
-                </a:path>
-              </a:pathLst>
-            </a:custGeom>
+              <a:off x="4457700" y="1333500"/>
+              <a:ext cx="7239000" cy="5029200"/>
+            </a:xfrm>
+            <a:prstGeom prst="roundRect">
+              <a:avLst>
+                <a:gd name="adj" fmla="val 1136"/>
+              </a:avLst>
+            </a:prstGeom>
             <a:solidFill>
               <a:srgbClr val="FFFFFF"/>
             </a:solidFill>
             <a:ln w="19050">
               <a:solidFill>
-                <a:srgbClr val="1769E0"/>
+                <a:srgbClr val="CBD5DF"/>
               </a:solidFill>
             </a:ln>
           </p:spPr>
         </p:sp>
-        <p:sp>
-          <p:nvSpPr>
-            <p:cNvPr id="15" name="TextBox 15"/>
-            <p:cNvSpPr txBox="1"/>
-            <p:nvPr/>
-          </p:nvSpPr>
-          <p:spPr>
-            <a:xfrm>
-              <a:off x="2984373" y="2262664"/>
-              <a:ext cx="211199" cy="249364"/>
-            </a:xfrm>
-            <a:prstGeom prst="rect">
-              <a:avLst/>
-            </a:prstGeom>
-            <a:noFill/>
-            <a:ln>
-              <a:noFill/>
-            </a:ln>
-          </p:spPr>
-          <p:txBody>
-            <a:bodyPr wrap="none" lIns="0" tIns="0" rIns="0" bIns="0" anchor="t" anchorCtr="0">
-              <a:spAutoFit/>
-            </a:bodyPr>
-            <a:lstStyle/>
-            <a:p>
-              <a:pPr algn="l"/>
-              <a:r>
-                <a:rPr lang="en-US" sz="1280" b="1" dirty="0">
-                  <a:solidFill>
-                    <a:srgbClr val="1769E0"/>
-                  </a:solidFill>
-                  <a:latin typeface="Consolas"/>
-                  <a:ea typeface="Consolas"/>
-                  <a:cs typeface="Consolas"/>
-                </a:rPr>
-                <a:t>02</a:t>
-              </a:r>
-            </a:p>
-          </p:txBody>
-        </p:sp>
-        <p:sp>
-          <p:nvSpPr>
-            <p:cNvPr id="16" name="TextBox 16"/>
-            <p:cNvSpPr txBox="1"/>
-            <p:nvPr/>
-          </p:nvSpPr>
-          <p:spPr>
-            <a:xfrm>
-              <a:off x="2981706" y="2586990"/>
-              <a:ext cx="1290447" cy="352044"/>
-            </a:xfrm>
-            <a:prstGeom prst="rect">
-              <a:avLst/>
-            </a:prstGeom>
-            <a:noFill/>
-            <a:ln>
-              <a:noFill/>
-            </a:ln>
-          </p:spPr>
-          <p:txBody>
-            <a:bodyPr wrap="none" lIns="0" tIns="0" rIns="0" bIns="0" anchor="t" anchorCtr="0">
-              <a:spAutoFit/>
-            </a:bodyPr>
-            <a:lstStyle/>
-            <a:p>
-              <a:pPr algn="l"/>
-              <a:r>
-                <a:rPr lang="zh-CN" sz="1800" b="1" dirty="0">
-                  <a:solidFill>
-                    <a:srgbClr val="132A3A"/>
+        <p:pic>
+          <p:nvPicPr>
+            <p:cNvPr id="36" name="Image 36"/>
+            <p:cNvPicPr>
+              <a:picLocks noChangeAspect="1"/>
+            </p:cNvPicPr>
+            <p:nvPr/>
+          </p:nvPicPr>
+          <p:blipFill>
+            <a:blip r:embed="rId2"/>
+            <a:stretch>
+              <a:fillRect/>
+            </a:stretch>
+          </p:blipFill>
+          <p:spPr>
+            <a:xfrm>
+              <a:off x="4552950" y="1428750"/>
+              <a:ext cx="7048500" cy="4895850"/>
+            </a:xfrm>
+            <a:prstGeom prst="rect">
+              <a:avLst/>
+            </a:prstGeom>
+          </p:spPr>
+        </p:pic>
+        <p:sp>
+          <p:nvSpPr>
+            <p:cNvPr id="37" name="Rectangle 37"/>
+            <p:cNvSpPr/>
+            <p:nvPr/>
+          </p:nvSpPr>
+          <p:spPr>
+            <a:xfrm>
+              <a:off x="4648200" y="1543050"/>
+              <a:ext cx="1447800" cy="304800"/>
+            </a:xfrm>
+            <a:prstGeom prst="roundRect">
+              <a:avLst>
+                <a:gd name="adj" fmla="val 18750"/>
+              </a:avLst>
+            </a:prstGeom>
+            <a:solidFill>
+              <a:srgbClr val="132A3A"/>
+            </a:solidFill>
+            <a:ln>
+              <a:noFill/>
+            </a:ln>
+          </p:spPr>
+        </p:sp>
+        <p:sp>
+          <p:nvSpPr>
+            <p:cNvPr id="38" name="TextBox 38"/>
+            <p:cNvSpPr txBox="1"/>
+            <p:nvPr/>
+          </p:nvSpPr>
+          <p:spPr>
+            <a:xfrm>
+              <a:off x="4824955" y="1614964"/>
+              <a:ext cx="1094289" cy="249364"/>
+            </a:xfrm>
+            <a:prstGeom prst="rect">
+              <a:avLst/>
+            </a:prstGeom>
+            <a:noFill/>
+            <a:ln>
+              <a:noFill/>
+            </a:ln>
+          </p:spPr>
+          <p:txBody>
+            <a:bodyPr wrap="none" lIns="0" tIns="0" rIns="0" bIns="0" anchor="t" anchorCtr="0">
+              <a:spAutoFit/>
+            </a:bodyPr>
+            <a:lstStyle/>
+            <a:p>
+              <a:pPr algn="ctr"/>
+              <a:r>
+                <a:rPr lang="zh-CN" sz="1280" b="1" dirty="0">
+                  <a:solidFill>
+                    <a:srgbClr val="FFFFFF"/>
                   </a:solidFill>
                   <a:latin typeface="Segoe UI Semibold"/>
                   <a:ea typeface="Microsoft YaHei"/>
                   <a:cs typeface="Segoe UI Semibold"/>
                 </a:rPr>
-                <a:t>携证成果包</a:t>
-              </a:r>
-            </a:p>
-          </p:txBody>
-        </p:sp>
-        <p:sp>
-          <p:nvSpPr>
-            <p:cNvPr id="17" name="TextBox 17"/>
-            <p:cNvSpPr txBox="1"/>
-            <p:nvPr/>
-          </p:nvSpPr>
-          <p:spPr>
-            <a:xfrm>
-              <a:off x="2984373" y="3005614"/>
-              <a:ext cx="730302" cy="249364"/>
-            </a:xfrm>
-            <a:prstGeom prst="rect">
-              <a:avLst/>
-            </a:prstGeom>
-            <a:noFill/>
-            <a:ln>
-              <a:noFill/>
-            </a:ln>
-          </p:spPr>
-          <p:txBody>
-            <a:bodyPr wrap="none" lIns="0" tIns="0" rIns="0" bIns="0" anchor="t" anchorCtr="0">
-              <a:spAutoFit/>
-            </a:bodyPr>
-            <a:lstStyle/>
-            <a:p>
-              <a:pPr algn="l"/>
-              <a:r>
-                <a:rPr lang="en-US" sz="1280" dirty="0">
-                  <a:solidFill>
-                    <a:srgbClr val="5A6B7C"/>
-                  </a:solidFill>
-                  <a:latin typeface="Segoe UI"/>
-                  <a:ea typeface="Segoe UI"/>
-                  <a:cs typeface="Segoe UI"/>
-                </a:rPr>
-                <a:t>Artifact</a:t>
-              </a:r>
-            </a:p>
-          </p:txBody>
-        </p:sp>
-        <p:sp>
-          <p:nvSpPr>
-            <p:cNvPr id="18" name="TextBox 18"/>
-            <p:cNvSpPr txBox="1"/>
-            <p:nvPr/>
-          </p:nvSpPr>
-          <p:spPr>
-            <a:xfrm>
-              <a:off x="2984373" y="3272314"/>
-              <a:ext cx="1207587" cy="249364"/>
-            </a:xfrm>
-            <a:prstGeom prst="rect">
-              <a:avLst/>
-            </a:prstGeom>
-            <a:noFill/>
-            <a:ln>
-              <a:noFill/>
-            </a:ln>
-          </p:spPr>
-          <p:txBody>
-            <a:bodyPr wrap="none" lIns="0" tIns="0" rIns="0" bIns="0" anchor="t" anchorCtr="0">
-              <a:spAutoFit/>
-            </a:bodyPr>
-            <a:lstStyle/>
-            <a:p>
-              <a:pPr algn="l"/>
-              <a:r>
-                <a:rPr lang="en-US" sz="1280" dirty="0">
-                  <a:solidFill>
-                    <a:srgbClr val="5A6B7C"/>
-                  </a:solidFill>
-                  <a:latin typeface="Segoe UI"/>
-                  <a:ea typeface="Segoe UI"/>
-                  <a:cs typeface="Segoe UI"/>
-                </a:rPr>
-                <a:t>EffectReceipt</a:t>
-              </a:r>
-            </a:p>
-          </p:txBody>
-        </p:sp>
-        <p:sp>
-          <p:nvSpPr>
-            <p:cNvPr id="19" name="TextBox 19"/>
-            <p:cNvSpPr txBox="1"/>
-            <p:nvPr/>
-          </p:nvSpPr>
-          <p:spPr>
-            <a:xfrm>
-              <a:off x="2984373" y="3539014"/>
-              <a:ext cx="1497644" cy="249364"/>
-            </a:xfrm>
-            <a:prstGeom prst="rect">
-              <a:avLst/>
-            </a:prstGeom>
-            <a:noFill/>
-            <a:ln>
-              <a:noFill/>
-            </a:ln>
-          </p:spPr>
-          <p:txBody>
-            <a:bodyPr wrap="none" lIns="0" tIns="0" rIns="0" bIns="0" anchor="t" anchorCtr="0">
-              <a:spAutoFit/>
-            </a:bodyPr>
-            <a:lstStyle/>
-            <a:p>
-              <a:pPr algn="l"/>
-              <a:r>
-                <a:rPr lang="zh-CN" sz="1280" dirty="0">
-                  <a:solidFill>
-                    <a:srgbClr val="5A6B7C"/>
-                  </a:solidFill>
-                  <a:latin typeface="Segoe UI"/>
-                  <a:ea typeface="Microsoft YaHei"/>
-                  <a:cs typeface="Segoe UI"/>
-                </a:rPr>
-                <a:t>provenance + 边界</a:t>
-              </a:r>
-            </a:p>
-          </p:txBody>
-        </p:sp>
-        <p:sp>
-          <p:nvSpPr>
-            <p:cNvPr id="20" name="Freeform 20"/>
-            <p:cNvSpPr/>
-            <p:nvPr/>
-          </p:nvSpPr>
-          <p:spPr>
-            <a:xfrm>
-              <a:off x="4629150" y="1962150"/>
-              <a:ext cx="2019300" cy="2286000"/>
-            </a:xfrm>
-            <a:custGeom>
-              <a:avLst/>
-              <a:gdLst/>
-              <a:ahLst/>
-              <a:cxnLst/>
-              <a:rect l="l" t="t" r="r" b="b"/>
-              <a:pathLst>
-                <a:path w="2019300" h="2286000">
-                  <a:moveTo>
-                    <a:pt x="0" y="0"/>
-                  </a:moveTo>
-                  <a:lnTo>
-                    <a:pt x="1733550" y="0"/>
-                  </a:lnTo>
-                  <a:lnTo>
-                    <a:pt x="2019300" y="1143000"/>
-                  </a:lnTo>
-                  <a:lnTo>
-                    <a:pt x="1733550" y="2286000"/>
-                  </a:lnTo>
-                  <a:lnTo>
-                    <a:pt x="0" y="2286000"/>
-                  </a:lnTo>
-                  <a:lnTo>
-                    <a:pt x="285750" y="1143000"/>
-                  </a:lnTo>
-                  <a:close/>
-                </a:path>
-              </a:pathLst>
-            </a:custGeom>
-            <a:solidFill>
-              <a:srgbClr val="EDF1F4"/>
-            </a:solidFill>
-            <a:ln w="19050">
-              <a:solidFill>
-                <a:srgbClr val="1769E0"/>
-              </a:solidFill>
-            </a:ln>
-          </p:spPr>
-        </p:sp>
-        <p:sp>
-          <p:nvSpPr>
-            <p:cNvPr id="21" name="TextBox 21"/>
-            <p:cNvSpPr txBox="1"/>
-            <p:nvPr/>
-          </p:nvSpPr>
-          <p:spPr>
-            <a:xfrm>
-              <a:off x="5003673" y="2262664"/>
-              <a:ext cx="211199" cy="249364"/>
-            </a:xfrm>
-            <a:prstGeom prst="rect">
-              <a:avLst/>
-            </a:prstGeom>
-            <a:noFill/>
-            <a:ln>
-              <a:noFill/>
-            </a:ln>
-          </p:spPr>
-          <p:txBody>
-            <a:bodyPr wrap="none" lIns="0" tIns="0" rIns="0" bIns="0" anchor="t" anchorCtr="0">
-              <a:spAutoFit/>
-            </a:bodyPr>
-            <a:lstStyle/>
-            <a:p>
-              <a:pPr algn="l"/>
-              <a:r>
-                <a:rPr lang="en-US" sz="1280" b="1" dirty="0">
-                  <a:solidFill>
-                    <a:srgbClr val="1769E0"/>
-                  </a:solidFill>
-                  <a:latin typeface="Consolas"/>
-                  <a:ea typeface="Consolas"/>
-                  <a:cs typeface="Consolas"/>
-                </a:rPr>
-                <a:t>03</a:t>
-              </a:r>
-            </a:p>
-          </p:txBody>
-        </p:sp>
-        <p:sp>
-          <p:nvSpPr>
-            <p:cNvPr id="22" name="TextBox 22"/>
-            <p:cNvSpPr txBox="1"/>
-            <p:nvPr/>
-          </p:nvSpPr>
-          <p:spPr>
-            <a:xfrm>
-              <a:off x="5001006" y="2586990"/>
-              <a:ext cx="1606927" cy="352044"/>
-            </a:xfrm>
-            <a:prstGeom prst="rect">
-              <a:avLst/>
-            </a:prstGeom>
-            <a:noFill/>
-            <a:ln>
-              <a:noFill/>
-            </a:ln>
-          </p:spPr>
-          <p:txBody>
-            <a:bodyPr wrap="none" lIns="0" tIns="0" rIns="0" bIns="0" anchor="t" anchorCtr="0">
-              <a:spAutoFit/>
-            </a:bodyPr>
-            <a:lstStyle/>
-            <a:p>
-              <a:pPr algn="l"/>
-              <a:r>
-                <a:rPr lang="zh-CN" sz="1800" b="1" dirty="0">
-                  <a:solidFill>
-                    <a:srgbClr val="132A3A"/>
-                  </a:solidFill>
-                  <a:latin typeface="Segoe UI Semibold"/>
-                  <a:ea typeface="Microsoft YaHei"/>
-                  <a:cs typeface="Segoe UI Semibold"/>
-                </a:rPr>
-                <a:t>业务 Verifier</a:t>
-              </a:r>
-            </a:p>
-          </p:txBody>
-        </p:sp>
-        <p:sp>
-          <p:nvSpPr>
-            <p:cNvPr id="23" name="TextBox 23"/>
-            <p:cNvSpPr txBox="1"/>
-            <p:nvPr/>
-          </p:nvSpPr>
-          <p:spPr>
-            <a:xfrm>
-              <a:off x="5003673" y="3005614"/>
-              <a:ext cx="1042797" cy="249364"/>
-            </a:xfrm>
-            <a:prstGeom prst="rect">
-              <a:avLst/>
-            </a:prstGeom>
-            <a:noFill/>
-            <a:ln>
-              <a:noFill/>
-            </a:ln>
-          </p:spPr>
-          <p:txBody>
-            <a:bodyPr wrap="none" lIns="0" tIns="0" rIns="0" bIns="0" anchor="t" anchorCtr="0">
-              <a:spAutoFit/>
-            </a:bodyPr>
-            <a:lstStyle/>
-            <a:p>
-              <a:pPr algn="l"/>
-              <a:r>
-                <a:rPr lang="zh-CN" sz="1280" dirty="0">
-                  <a:solidFill>
-                    <a:srgbClr val="5A6B7C"/>
-                  </a:solidFill>
-                  <a:latin typeface="Segoe UI"/>
-                  <a:ea typeface="Microsoft YaHei"/>
-                  <a:cs typeface="Segoe UI"/>
-                </a:rPr>
-                <a:t>从固定适配器</a:t>
-              </a:r>
-            </a:p>
-          </p:txBody>
-        </p:sp>
-        <p:sp>
-          <p:nvSpPr>
-            <p:cNvPr id="24" name="TextBox 24"/>
-            <p:cNvSpPr txBox="1"/>
-            <p:nvPr/>
-          </p:nvSpPr>
-          <p:spPr>
-            <a:xfrm>
-              <a:off x="5003673" y="3272314"/>
-              <a:ext cx="1042797" cy="249364"/>
-            </a:xfrm>
-            <a:prstGeom prst="rect">
-              <a:avLst/>
-            </a:prstGeom>
-            <a:noFill/>
-            <a:ln>
-              <a:noFill/>
-            </a:ln>
-          </p:spPr>
-          <p:txBody>
-            <a:bodyPr wrap="none" lIns="0" tIns="0" rIns="0" bIns="0" anchor="t" anchorCtr="0">
-              <a:spAutoFit/>
-            </a:bodyPr>
-            <a:lstStyle/>
-            <a:p>
-              <a:pPr algn="l"/>
-              <a:r>
-                <a:rPr lang="zh-CN" sz="1280" dirty="0">
-                  <a:solidFill>
-                    <a:srgbClr val="5A6B7C"/>
-                  </a:solidFill>
-                  <a:latin typeface="Segoe UI"/>
-                  <a:ea typeface="Microsoft YaHei"/>
-                  <a:cs typeface="Segoe UI"/>
-                </a:rPr>
-                <a:t>扩展到可配置</a:t>
-              </a:r>
-            </a:p>
-          </p:txBody>
-        </p:sp>
-        <p:sp>
-          <p:nvSpPr>
-            <p:cNvPr id="25" name="TextBox 25"/>
-            <p:cNvSpPr txBox="1"/>
-            <p:nvPr/>
-          </p:nvSpPr>
-          <p:spPr>
-            <a:xfrm>
-              <a:off x="5003673" y="3539014"/>
-              <a:ext cx="1214438" cy="249364"/>
-            </a:xfrm>
-            <a:prstGeom prst="rect">
-              <a:avLst/>
-            </a:prstGeom>
-            <a:noFill/>
-            <a:ln>
-              <a:noFill/>
-            </a:ln>
-          </p:spPr>
-          <p:txBody>
-            <a:bodyPr wrap="none" lIns="0" tIns="0" rIns="0" bIns="0" anchor="t" anchorCtr="0">
-              <a:spAutoFit/>
-            </a:bodyPr>
-            <a:lstStyle/>
-            <a:p>
-              <a:pPr algn="l"/>
-              <a:r>
-                <a:rPr lang="zh-CN" sz="1280" dirty="0">
-                  <a:solidFill>
-                    <a:srgbClr val="5A6B7C"/>
-                  </a:solidFill>
-                  <a:latin typeface="Segoe UI"/>
-                  <a:ea typeface="Microsoft YaHei"/>
-                  <a:cs typeface="Segoe UI"/>
-                </a:rPr>
-                <a:t>数值与语义规则</a:t>
-              </a:r>
-            </a:p>
-          </p:txBody>
-        </p:sp>
-        <p:sp>
-          <p:nvSpPr>
-            <p:cNvPr id="26" name="Freeform 26"/>
-            <p:cNvSpPr/>
-            <p:nvPr/>
-          </p:nvSpPr>
-          <p:spPr>
-            <a:xfrm>
-              <a:off x="6648450" y="1962150"/>
-              <a:ext cx="2019300" cy="2286000"/>
-            </a:xfrm>
-            <a:custGeom>
-              <a:avLst/>
-              <a:gdLst/>
-              <a:ahLst/>
-              <a:cxnLst/>
-              <a:rect l="l" t="t" r="r" b="b"/>
-              <a:pathLst>
-                <a:path w="2019300" h="2286000">
-                  <a:moveTo>
-                    <a:pt x="0" y="0"/>
-                  </a:moveTo>
-                  <a:lnTo>
-                    <a:pt x="1733550" y="0"/>
-                  </a:lnTo>
-                  <a:lnTo>
-                    <a:pt x="2019300" y="1143000"/>
-                  </a:lnTo>
-                  <a:lnTo>
-                    <a:pt x="1733550" y="2286000"/>
-                  </a:lnTo>
-                  <a:lnTo>
-                    <a:pt x="0" y="2286000"/>
-                  </a:lnTo>
-                  <a:lnTo>
-                    <a:pt x="285750" y="1143000"/>
-                  </a:lnTo>
-                  <a:close/>
-                </a:path>
-              </a:pathLst>
-            </a:custGeom>
-            <a:solidFill>
-              <a:srgbClr val="FFFFFF"/>
-            </a:solidFill>
-            <a:ln w="19050">
-              <a:solidFill>
-                <a:srgbClr val="D97706"/>
-              </a:solidFill>
-            </a:ln>
-          </p:spPr>
-        </p:sp>
-        <p:sp>
-          <p:nvSpPr>
-            <p:cNvPr id="27" name="TextBox 27"/>
-            <p:cNvSpPr txBox="1"/>
-            <p:nvPr/>
-          </p:nvSpPr>
-          <p:spPr>
-            <a:xfrm>
-              <a:off x="7022973" y="2262664"/>
-              <a:ext cx="211199" cy="249364"/>
-            </a:xfrm>
-            <a:prstGeom prst="rect">
-              <a:avLst/>
-            </a:prstGeom>
-            <a:noFill/>
-            <a:ln>
-              <a:noFill/>
-            </a:ln>
-          </p:spPr>
-          <p:txBody>
-            <a:bodyPr wrap="none" lIns="0" tIns="0" rIns="0" bIns="0" anchor="t" anchorCtr="0">
-              <a:spAutoFit/>
-            </a:bodyPr>
-            <a:lstStyle/>
-            <a:p>
-              <a:pPr algn="l"/>
-              <a:r>
-                <a:rPr lang="en-US" sz="1280" b="1" dirty="0">
-                  <a:solidFill>
-                    <a:srgbClr val="B54708"/>
-                  </a:solidFill>
-                  <a:latin typeface="Consolas"/>
-                  <a:ea typeface="Consolas"/>
-                  <a:cs typeface="Consolas"/>
-                </a:rPr>
-                <a:t>04</a:t>
-              </a:r>
-            </a:p>
-          </p:txBody>
-        </p:sp>
-        <p:sp>
-          <p:nvSpPr>
-            <p:cNvPr id="28" name="TextBox 28"/>
-            <p:cNvSpPr txBox="1"/>
-            <p:nvPr/>
-          </p:nvSpPr>
-          <p:spPr>
-            <a:xfrm>
-              <a:off x="7020306" y="2586990"/>
-              <a:ext cx="1036015" cy="352044"/>
-            </a:xfrm>
-            <a:prstGeom prst="rect">
-              <a:avLst/>
-            </a:prstGeom>
-            <a:noFill/>
-            <a:ln>
-              <a:noFill/>
-            </a:ln>
-          </p:spPr>
-          <p:txBody>
-            <a:bodyPr wrap="none" lIns="0" tIns="0" rIns="0" bIns="0" anchor="t" anchorCtr="0">
-              <a:spAutoFit/>
-            </a:bodyPr>
-            <a:lstStyle/>
-            <a:p>
-              <a:pPr algn="l"/>
-              <a:r>
-                <a:rPr lang="zh-CN" sz="1800" b="1" dirty="0">
-                  <a:solidFill>
-                    <a:srgbClr val="132A3A"/>
-                  </a:solidFill>
-                  <a:latin typeface="Segoe UI Semibold"/>
-                  <a:ea typeface="Microsoft YaHei"/>
-                  <a:cs typeface="Segoe UI Semibold"/>
-                </a:rPr>
-                <a:t>执行能力</a:t>
-              </a:r>
-            </a:p>
-          </p:txBody>
-        </p:sp>
-        <p:sp>
-          <p:nvSpPr>
-            <p:cNvPr id="29" name="TextBox 29"/>
-            <p:cNvSpPr txBox="1"/>
-            <p:nvPr/>
-          </p:nvSpPr>
-          <p:spPr>
-            <a:xfrm>
-              <a:off x="7022973" y="3005614"/>
-              <a:ext cx="1158606" cy="249364"/>
-            </a:xfrm>
-            <a:prstGeom prst="rect">
-              <a:avLst/>
-            </a:prstGeom>
-            <a:noFill/>
-            <a:ln>
-              <a:noFill/>
-            </a:ln>
-          </p:spPr>
-          <p:txBody>
-            <a:bodyPr wrap="none" lIns="0" tIns="0" rIns="0" bIns="0" anchor="t" anchorCtr="0">
-              <a:spAutoFit/>
-            </a:bodyPr>
-            <a:lstStyle/>
-            <a:p>
-              <a:pPr algn="l"/>
-              <a:r>
-                <a:rPr lang="en-US" sz="1280" dirty="0">
-                  <a:solidFill>
-                    <a:srgbClr val="5A6B7C"/>
-                  </a:solidFill>
-                  <a:latin typeface="Segoe UI"/>
-                  <a:ea typeface="Segoe UI"/>
-                  <a:cs typeface="Segoe UI"/>
-                </a:rPr>
-                <a:t>Worker / Tool</a:t>
-              </a:r>
-            </a:p>
-          </p:txBody>
-        </p:sp>
-        <p:sp>
-          <p:nvSpPr>
-            <p:cNvPr id="30" name="TextBox 30"/>
-            <p:cNvSpPr txBox="1"/>
-            <p:nvPr/>
-          </p:nvSpPr>
-          <p:spPr>
-            <a:xfrm>
-              <a:off x="7022973" y="3272314"/>
-              <a:ext cx="1629905" cy="249364"/>
-            </a:xfrm>
-            <a:prstGeom prst="rect">
-              <a:avLst/>
-            </a:prstGeom>
-            <a:noFill/>
-            <a:ln>
-              <a:noFill/>
-            </a:ln>
-          </p:spPr>
-          <p:txBody>
-            <a:bodyPr wrap="none" lIns="0" tIns="0" rIns="0" bIns="0" anchor="t" anchorCtr="0">
-              <a:spAutoFit/>
-            </a:bodyPr>
-            <a:lstStyle/>
-            <a:p>
-              <a:pPr algn="l"/>
-              <a:r>
-                <a:rPr lang="en-US" sz="1280" dirty="0">
-                  <a:solidFill>
-                    <a:srgbClr val="5A6B7C"/>
-                  </a:solidFill>
-                  <a:latin typeface="Segoe UI"/>
-                  <a:ea typeface="Segoe UI"/>
-                  <a:cs typeface="Segoe UI"/>
-                </a:rPr>
-                <a:t>Connector / Permit</a:t>
-              </a:r>
-            </a:p>
-          </p:txBody>
-        </p:sp>
-        <p:sp>
-          <p:nvSpPr>
-            <p:cNvPr id="31" name="TextBox 31"/>
-            <p:cNvSpPr txBox="1"/>
-            <p:nvPr/>
-          </p:nvSpPr>
-          <p:spPr>
-            <a:xfrm>
-              <a:off x="7022973" y="3539014"/>
-              <a:ext cx="1214438" cy="249364"/>
-            </a:xfrm>
-            <a:prstGeom prst="rect">
-              <a:avLst/>
-            </a:prstGeom>
-            <a:noFill/>
-            <a:ln>
-              <a:noFill/>
-            </a:ln>
-          </p:spPr>
-          <p:txBody>
-            <a:bodyPr wrap="none" lIns="0" tIns="0" rIns="0" bIns="0" anchor="t" anchorCtr="0">
-              <a:spAutoFit/>
-            </a:bodyPr>
-            <a:lstStyle/>
-            <a:p>
-              <a:pPr algn="l"/>
-              <a:r>
-                <a:rPr lang="zh-CN" sz="1280" dirty="0">
-                  <a:solidFill>
-                    <a:srgbClr val="5A6B7C"/>
-                  </a:solidFill>
-                  <a:latin typeface="Segoe UI"/>
-                  <a:ea typeface="Microsoft YaHei"/>
-                  <a:cs typeface="Segoe UI"/>
-                </a:rPr>
-                <a:t>幂等与动作回执</a:t>
-              </a:r>
-            </a:p>
-          </p:txBody>
-        </p:sp>
-        <p:sp>
-          <p:nvSpPr>
-            <p:cNvPr id="32" name="Freeform 32"/>
-            <p:cNvSpPr/>
-            <p:nvPr/>
-          </p:nvSpPr>
-          <p:spPr>
-            <a:xfrm>
-              <a:off x="8667750" y="1962150"/>
-              <a:ext cx="1981200" cy="2286000"/>
-            </a:xfrm>
-            <a:custGeom>
-              <a:avLst/>
-              <a:gdLst/>
-              <a:ahLst/>
-              <a:cxnLst/>
-              <a:rect l="l" t="t" r="r" b="b"/>
-              <a:pathLst>
-                <a:path w="1981200" h="2286000">
-                  <a:moveTo>
-                    <a:pt x="0" y="0"/>
-                  </a:moveTo>
-                  <a:lnTo>
-                    <a:pt x="1695450" y="0"/>
-                  </a:lnTo>
-                  <a:lnTo>
-                    <a:pt x="1981200" y="1143000"/>
-                  </a:lnTo>
-                  <a:lnTo>
-                    <a:pt x="1695450" y="2286000"/>
-                  </a:lnTo>
-                  <a:lnTo>
-                    <a:pt x="0" y="2286000"/>
-                  </a:lnTo>
-                  <a:lnTo>
-                    <a:pt x="285750" y="1143000"/>
-                  </a:lnTo>
-                  <a:close/>
-                </a:path>
-              </a:pathLst>
-            </a:custGeom>
-            <a:solidFill>
-              <a:srgbClr val="EDF1F4"/>
-            </a:solidFill>
-            <a:ln w="19050">
-              <a:solidFill>
-                <a:srgbClr val="D97706"/>
-              </a:solidFill>
-            </a:ln>
-          </p:spPr>
-        </p:sp>
-        <p:sp>
-          <p:nvSpPr>
-            <p:cNvPr id="33" name="TextBox 33"/>
-            <p:cNvSpPr txBox="1"/>
-            <p:nvPr/>
-          </p:nvSpPr>
-          <p:spPr>
-            <a:xfrm>
-              <a:off x="9042273" y="2262664"/>
-              <a:ext cx="211199" cy="249364"/>
-            </a:xfrm>
-            <a:prstGeom prst="rect">
-              <a:avLst/>
-            </a:prstGeom>
-            <a:noFill/>
-            <a:ln>
-              <a:noFill/>
-            </a:ln>
-          </p:spPr>
-          <p:txBody>
-            <a:bodyPr wrap="none" lIns="0" tIns="0" rIns="0" bIns="0" anchor="t" anchorCtr="0">
-              <a:spAutoFit/>
-            </a:bodyPr>
-            <a:lstStyle/>
-            <a:p>
-              <a:pPr algn="l"/>
-              <a:r>
-                <a:rPr lang="en-US" sz="1280" b="1" dirty="0">
-                  <a:solidFill>
-                    <a:srgbClr val="B54708"/>
-                  </a:solidFill>
-                  <a:latin typeface="Consolas"/>
-                  <a:ea typeface="Consolas"/>
-                  <a:cs typeface="Consolas"/>
-                </a:rPr>
-                <a:t>05</a:t>
-              </a:r>
-            </a:p>
-          </p:txBody>
-        </p:sp>
-        <p:sp>
-          <p:nvSpPr>
-            <p:cNvPr id="34" name="TextBox 34"/>
-            <p:cNvSpPr txBox="1"/>
-            <p:nvPr/>
-          </p:nvSpPr>
-          <p:spPr>
-            <a:xfrm>
-              <a:off x="9039606" y="2586990"/>
-              <a:ext cx="1036015" cy="352044"/>
-            </a:xfrm>
-            <a:prstGeom prst="rect">
-              <a:avLst/>
-            </a:prstGeom>
-            <a:noFill/>
-            <a:ln>
-              <a:noFill/>
-            </a:ln>
-          </p:spPr>
-          <p:txBody>
-            <a:bodyPr wrap="none" lIns="0" tIns="0" rIns="0" bIns="0" anchor="t" anchorCtr="0">
-              <a:spAutoFit/>
-            </a:bodyPr>
-            <a:lstStyle/>
-            <a:p>
-              <a:pPr algn="l"/>
-              <a:r>
-                <a:rPr lang="zh-CN" sz="1800" b="1" dirty="0">
-                  <a:solidFill>
-                    <a:srgbClr val="132A3A"/>
-                  </a:solidFill>
-                  <a:latin typeface="Segoe UI Semibold"/>
-                  <a:ea typeface="Microsoft YaHei"/>
-                  <a:cs typeface="Segoe UI Semibold"/>
-                </a:rPr>
-                <a:t>同场挑战</a:t>
-              </a:r>
-            </a:p>
-          </p:txBody>
-        </p:sp>
-        <p:sp>
-          <p:nvSpPr>
-            <p:cNvPr id="35" name="TextBox 35"/>
-            <p:cNvSpPr txBox="1"/>
-            <p:nvPr/>
-          </p:nvSpPr>
-          <p:spPr>
-            <a:xfrm>
-              <a:off x="9042273" y="3005614"/>
-              <a:ext cx="1574883" cy="249364"/>
-            </a:xfrm>
-            <a:prstGeom prst="rect">
-              <a:avLst/>
-            </a:prstGeom>
-            <a:noFill/>
-            <a:ln>
-              <a:noFill/>
-            </a:ln>
-          </p:spPr>
-          <p:txBody>
-            <a:bodyPr wrap="none" lIns="0" tIns="0" rIns="0" bIns="0" anchor="t" anchorCtr="0">
-              <a:spAutoFit/>
-            </a:bodyPr>
-            <a:lstStyle/>
-            <a:p>
-              <a:pPr algn="l"/>
-              <a:r>
-                <a:rPr lang="zh-CN" sz="1280" dirty="0">
-                  <a:solidFill>
-                    <a:srgbClr val="5A6B7C"/>
-                  </a:solidFill>
-                  <a:latin typeface="Segoe UI"/>
-                  <a:ea typeface="Microsoft YaHei"/>
-                  <a:cs typeface="Segoe UI"/>
-                </a:rPr>
-                <a:t>固定任务/模型/来源</a:t>
-              </a:r>
-            </a:p>
-          </p:txBody>
-        </p:sp>
-        <p:sp>
-          <p:nvSpPr>
-            <p:cNvPr id="36" name="TextBox 36"/>
-            <p:cNvSpPr txBox="1"/>
-            <p:nvPr/>
-          </p:nvSpPr>
-          <p:spPr>
-            <a:xfrm>
-              <a:off x="9042273" y="3272314"/>
-              <a:ext cx="699516" cy="249364"/>
-            </a:xfrm>
-            <a:prstGeom prst="rect">
-              <a:avLst/>
-            </a:prstGeom>
-            <a:noFill/>
-            <a:ln>
-              <a:noFill/>
-            </a:ln>
-          </p:spPr>
-          <p:txBody>
-            <a:bodyPr wrap="none" lIns="0" tIns="0" rIns="0" bIns="0" anchor="t" anchorCtr="0">
-              <a:spAutoFit/>
-            </a:bodyPr>
-            <a:lstStyle/>
-            <a:p>
-              <a:pPr algn="l"/>
-              <a:r>
-                <a:rPr lang="zh-CN" sz="1280" dirty="0">
-                  <a:solidFill>
-                    <a:srgbClr val="5A6B7C"/>
-                  </a:solidFill>
-                  <a:latin typeface="Segoe UI"/>
-                  <a:ea typeface="Microsoft YaHei"/>
-                  <a:cs typeface="Segoe UI"/>
-                </a:rPr>
-                <a:t>竞品实测</a:t>
-              </a:r>
-            </a:p>
-          </p:txBody>
-        </p:sp>
-        <p:sp>
-          <p:nvSpPr>
-            <p:cNvPr id="37" name="TextBox 37"/>
-            <p:cNvSpPr txBox="1"/>
-            <p:nvPr/>
-          </p:nvSpPr>
-          <p:spPr>
-            <a:xfrm>
-              <a:off x="9042273" y="3539014"/>
-              <a:ext cx="1042797" cy="249364"/>
-            </a:xfrm>
-            <a:prstGeom prst="rect">
-              <a:avLst/>
-            </a:prstGeom>
-            <a:noFill/>
-            <a:ln>
-              <a:noFill/>
-            </a:ln>
-          </p:spPr>
-          <p:txBody>
-            <a:bodyPr wrap="none" lIns="0" tIns="0" rIns="0" bIns="0" anchor="t" anchorCtr="0">
-              <a:spAutoFit/>
-            </a:bodyPr>
-            <a:lstStyle/>
-            <a:p>
-              <a:pPr algn="l"/>
-              <a:r>
-                <a:rPr lang="zh-CN" sz="1280" dirty="0">
-                  <a:solidFill>
-                    <a:srgbClr val="5A6B7C"/>
-                  </a:solidFill>
-                  <a:latin typeface="Segoe UI"/>
-                  <a:ea typeface="Microsoft YaHei"/>
-                  <a:cs typeface="Segoe UI"/>
-                </a:rPr>
-                <a:t>目标用户研究</a:t>
-              </a:r>
-            </a:p>
-          </p:txBody>
-        </p:sp>
-        <p:sp>
-          <p:nvSpPr>
-            <p:cNvPr id="38" name="Freeform 38"/>
-            <p:cNvSpPr/>
-            <p:nvPr/>
-          </p:nvSpPr>
-          <p:spPr>
-            <a:xfrm>
-              <a:off x="10648950" y="1962150"/>
-              <a:ext cx="1047750" cy="2286000"/>
-            </a:xfrm>
-            <a:custGeom>
-              <a:avLst/>
-              <a:gdLst/>
-              <a:ahLst/>
-              <a:cxnLst/>
-              <a:rect l="l" t="t" r="r" b="b"/>
-              <a:pathLst>
-                <a:path w="1047750" h="2286000">
-                  <a:moveTo>
-                    <a:pt x="0" y="0"/>
-                  </a:moveTo>
-                  <a:lnTo>
-                    <a:pt x="1047750" y="0"/>
-                  </a:lnTo>
-                  <a:lnTo>
-                    <a:pt x="1047750" y="2286000"/>
-                  </a:lnTo>
-                  <a:lnTo>
-                    <a:pt x="0" y="2286000"/>
-                  </a:lnTo>
-                  <a:lnTo>
-                    <a:pt x="285750" y="1143000"/>
-                  </a:lnTo>
-                  <a:close/>
-                </a:path>
-              </a:pathLst>
-            </a:custGeom>
-            <a:solidFill>
-              <a:srgbClr val="132A3A"/>
-            </a:solidFill>
-            <a:ln>
-              <a:noFill/>
-            </a:ln>
-          </p:spPr>
-        </p:sp>
-        <p:sp>
-          <p:nvSpPr>
-            <p:cNvPr id="39" name="TextBox 39"/>
-            <p:cNvSpPr txBox="1"/>
-            <p:nvPr/>
-          </p:nvSpPr>
-          <p:spPr>
-            <a:xfrm>
-              <a:off x="10791558" y="2491740"/>
-              <a:ext cx="781583" cy="352044"/>
-            </a:xfrm>
-            <a:prstGeom prst="rect">
-              <a:avLst/>
-            </a:prstGeom>
-            <a:noFill/>
-            <a:ln>
-              <a:noFill/>
-            </a:ln>
-          </p:spPr>
-          <p:txBody>
-            <a:bodyPr wrap="none" lIns="0" tIns="0" rIns="0" bIns="0" anchor="t" anchorCtr="0">
-              <a:spAutoFit/>
-            </a:bodyPr>
-            <a:lstStyle/>
-            <a:p>
-              <a:pPr algn="ctr"/>
-              <a:r>
-                <a:rPr lang="zh-CN" sz="1800" b="1" dirty="0">
-                  <a:solidFill>
-                    <a:srgbClr val="FFFFFF"/>
-                  </a:solidFill>
-                  <a:latin typeface="Segoe UI Semibold"/>
-                  <a:ea typeface="Microsoft YaHei"/>
-                  <a:cs typeface="Segoe UI Semibold"/>
-                </a:rPr>
-                <a:t>已验证</a:t>
-              </a:r>
-            </a:p>
-          </p:txBody>
-        </p:sp>
-        <p:sp>
-          <p:nvSpPr>
-            <p:cNvPr id="40" name="TextBox 40"/>
-            <p:cNvSpPr txBox="1"/>
-            <p:nvPr/>
-          </p:nvSpPr>
-          <p:spPr>
-            <a:xfrm>
-              <a:off x="10918774" y="2815590"/>
-              <a:ext cx="527152" cy="352044"/>
-            </a:xfrm>
-            <a:prstGeom prst="rect">
-              <a:avLst/>
-            </a:prstGeom>
-            <a:noFill/>
-            <a:ln>
-              <a:noFill/>
-            </a:ln>
-          </p:spPr>
-          <p:txBody>
-            <a:bodyPr wrap="none" lIns="0" tIns="0" rIns="0" bIns="0" anchor="t" anchorCtr="0">
-              <a:spAutoFit/>
-            </a:bodyPr>
-            <a:lstStyle/>
-            <a:p>
-              <a:pPr algn="ctr"/>
-              <a:r>
-                <a:rPr lang="zh-CN" sz="1800" b="1" dirty="0">
-                  <a:solidFill>
-                    <a:srgbClr val="FFFFFF"/>
-                  </a:solidFill>
-                  <a:latin typeface="Segoe UI Semibold"/>
-                  <a:ea typeface="Microsoft YaHei"/>
-                  <a:cs typeface="Segoe UI Semibold"/>
-                </a:rPr>
-                <a:t>差异</a:t>
-              </a:r>
-            </a:p>
-          </p:txBody>
-        </p:sp>
-        <p:sp>
-          <p:nvSpPr>
-            <p:cNvPr id="41" name="TextBox 41"/>
-            <p:cNvSpPr txBox="1"/>
-            <p:nvPr/>
-          </p:nvSpPr>
-          <p:spPr>
-            <a:xfrm>
-              <a:off x="10894314" y="3372802"/>
-              <a:ext cx="576072" cy="205359"/>
-            </a:xfrm>
-            <a:prstGeom prst="rect">
-              <a:avLst/>
-            </a:prstGeom>
-            <a:noFill/>
-            <a:ln>
-              <a:noFill/>
-            </a:ln>
-          </p:spPr>
-          <p:txBody>
-            <a:bodyPr wrap="none" lIns="0" tIns="0" rIns="0" bIns="0" anchor="t" anchorCtr="0">
-              <a:spAutoFit/>
-            </a:bodyPr>
-            <a:lstStyle/>
-            <a:p>
-              <a:pPr algn="ctr"/>
-              <a:r>
-                <a:rPr lang="zh-CN" sz="1050" dirty="0">
-                  <a:solidFill>
-                    <a:srgbClr val="CBD5DF"/>
-                  </a:solidFill>
-                  <a:latin typeface="Segoe UI"/>
-                  <a:ea typeface="Microsoft YaHei"/>
-                  <a:cs typeface="Segoe UI"/>
-                </a:rPr>
-                <a:t>通过门后</a:t>
-              </a:r>
-            </a:p>
-          </p:txBody>
-        </p:sp>
-        <p:sp>
-          <p:nvSpPr>
-            <p:cNvPr id="42" name="TextBox 42"/>
-            <p:cNvSpPr txBox="1"/>
-            <p:nvPr/>
-          </p:nvSpPr>
-          <p:spPr>
-            <a:xfrm>
-              <a:off x="10752963" y="3601402"/>
-              <a:ext cx="858774" cy="205359"/>
-            </a:xfrm>
-            <a:prstGeom prst="rect">
-              <a:avLst/>
-            </a:prstGeom>
-            <a:noFill/>
-            <a:ln>
-              <a:noFill/>
-            </a:ln>
-          </p:spPr>
-          <p:txBody>
-            <a:bodyPr wrap="none" lIns="0" tIns="0" rIns="0" bIns="0" anchor="t" anchorCtr="0">
-              <a:spAutoFit/>
-            </a:bodyPr>
-            <a:lstStyle/>
-            <a:p>
-              <a:pPr algn="ctr"/>
-              <a:r>
-                <a:rPr lang="zh-CN" sz="1050" dirty="0">
-                  <a:solidFill>
-                    <a:srgbClr val="CBD5DF"/>
-                  </a:solidFill>
-                  <a:latin typeface="Segoe UI"/>
-                  <a:ea typeface="Microsoft YaHei"/>
-                  <a:cs typeface="Segoe UI"/>
-                </a:rPr>
-                <a:t>才可升级结论</a:t>
+                <a:t>真实运行界面</a:t>
               </a:r>
             </a:p>
           </p:txBody>
@@ -19890,181 +19949,7 @@
       </p:grpSp>
       <p:grpSp>
         <p:nvGrpSpPr>
-          <p:cNvPr id="46" name="Group 46"/>
-          <p:cNvGrpSpPr/>
-          <p:nvPr/>
-        </p:nvGrpSpPr>
-        <p:grpSpPr>
-          <a:xfrm>
-            <a:off x="483108" y="4712970"/>
-            <a:ext cx="7826959" cy="888492"/>
-            <a:chOff x="483108" y="4712970"/>
-            <a:chExt cx="7826959" cy="888492"/>
-          </a:xfrm>
-        </p:grpSpPr>
-        <p:sp>
-          <p:nvSpPr>
-            <p:cNvPr id="44" name="TextBox 44"/>
-            <p:cNvSpPr txBox="1"/>
-            <p:nvPr/>
-          </p:nvSpPr>
-          <p:spPr>
-            <a:xfrm>
-              <a:off x="483108" y="4712970"/>
-              <a:ext cx="6056498" cy="469392"/>
-            </a:xfrm>
-            <a:prstGeom prst="rect">
-              <a:avLst/>
-            </a:prstGeom>
-            <a:noFill/>
-            <a:ln>
-              <a:noFill/>
-            </a:ln>
-          </p:spPr>
-          <p:txBody>
-            <a:bodyPr wrap="none" lIns="0" tIns="0" rIns="0" bIns="0" anchor="t" anchorCtr="0">
-              <a:spAutoFit/>
-            </a:bodyPr>
-            <a:lstStyle/>
-            <a:p>
-              <a:pPr algn="l"/>
-              <a:r>
-                <a:rPr lang="zh-CN" sz="2400" b="1" dirty="0">
-                  <a:solidFill>
-                    <a:srgbClr val="132A3A"/>
-                  </a:solidFill>
-                  <a:latin typeface="Segoe UI Semibold"/>
-                  <a:ea typeface="Microsoft YaHei"/>
-                  <a:cs typeface="Segoe UI Semibold"/>
-                </a:rPr>
-                <a:t>Office Agent 的产品，不是一段回答；</a:t>
-              </a:r>
-            </a:p>
-          </p:txBody>
-        </p:sp>
-        <p:sp>
-          <p:nvSpPr>
-            <p:cNvPr id="45" name="TextBox 45"/>
-            <p:cNvSpPr txBox="1"/>
-            <p:nvPr/>
-          </p:nvSpPr>
-          <p:spPr>
-            <a:xfrm>
-              <a:off x="483108" y="5132070"/>
-              <a:ext cx="7826959" cy="469392"/>
-            </a:xfrm>
-            <a:prstGeom prst="rect">
-              <a:avLst/>
-            </a:prstGeom>
-            <a:noFill/>
-            <a:ln>
-              <a:noFill/>
-            </a:ln>
-          </p:spPr>
-          <p:txBody>
-            <a:bodyPr wrap="none" lIns="0" tIns="0" rIns="0" bIns="0" anchor="t" anchorCtr="0">
-              <a:spAutoFit/>
-            </a:bodyPr>
-            <a:lstStyle/>
-            <a:p>
-              <a:pPr algn="l"/>
-              <a:r>
-                <a:rPr lang="zh-CN" sz="2400" b="1" dirty="0">
-                  <a:solidFill>
-                    <a:srgbClr val="1769E0"/>
-                  </a:solidFill>
-                  <a:latin typeface="Segoe UI Semibold"/>
-                  <a:ea typeface="Microsoft YaHei"/>
-                  <a:cs typeface="Segoe UI Semibold"/>
-                </a:rPr>
-                <a:t>而是一份可复核、可恢复、可追责的当前工作结论。</a:t>
-              </a:r>
-            </a:p>
-          </p:txBody>
-        </p:sp>
-      </p:grpSp>
-      <p:grpSp>
-        <p:nvGrpSpPr>
-          <p:cNvPr id="49" name="Group 49"/>
-          <p:cNvGrpSpPr/>
-          <p:nvPr/>
-        </p:nvGrpSpPr>
-        <p:grpSpPr>
-          <a:xfrm>
-            <a:off x="495300" y="5810250"/>
-            <a:ext cx="11201400" cy="419100"/>
-            <a:chOff x="495300" y="5810250"/>
-            <a:chExt cx="11201400" cy="419100"/>
-          </a:xfrm>
-        </p:grpSpPr>
-        <p:sp>
-          <p:nvSpPr>
-            <p:cNvPr id="47" name="Rectangle 47"/>
-            <p:cNvSpPr/>
-            <p:nvPr/>
-          </p:nvSpPr>
-          <p:spPr>
-            <a:xfrm>
-              <a:off x="495300" y="5810250"/>
-              <a:ext cx="11201400" cy="419100"/>
-            </a:xfrm>
-            <a:prstGeom prst="roundRect">
-              <a:avLst>
-                <a:gd name="adj" fmla="val 13636"/>
-              </a:avLst>
-            </a:prstGeom>
-            <a:solidFill>
-              <a:srgbClr val="EDF1F4"/>
-            </a:solidFill>
-            <a:ln>
-              <a:noFill/>
-            </a:ln>
-          </p:spPr>
-        </p:sp>
-        <p:sp>
-          <p:nvSpPr>
-            <p:cNvPr id="48" name="TextBox 48"/>
-            <p:cNvSpPr txBox="1"/>
-            <p:nvPr/>
-          </p:nvSpPr>
-          <p:spPr>
-            <a:xfrm>
-              <a:off x="717423" y="5939314"/>
-              <a:ext cx="5861685" cy="249364"/>
-            </a:xfrm>
-            <a:prstGeom prst="rect">
-              <a:avLst/>
-            </a:prstGeom>
-            <a:noFill/>
-            <a:ln>
-              <a:noFill/>
-            </a:ln>
-          </p:spPr>
-          <p:txBody>
-            <a:bodyPr wrap="none" lIns="0" tIns="0" rIns="0" bIns="0" anchor="t" anchorCtr="0">
-              <a:spAutoFit/>
-            </a:bodyPr>
-            <a:lstStyle/>
-            <a:p>
-              <a:pPr algn="l"/>
-              <a:r>
-                <a:rPr lang="zh-CN" sz="1280" dirty="0">
-                  <a:solidFill>
-                    <a:srgbClr val="5A6B7C"/>
-                  </a:solidFill>
-                  <a:latin typeface="Segoe UI"/>
-                  <a:ea typeface="Microsoft YaHei"/>
-                  <a:cs typeface="Segoe UI"/>
-                </a:rPr>
-                <a:t>当前不证明全面领先 · 不证明生产 SLA · 不证明用户已经更信任或更高效</a:t>
-              </a:r>
-            </a:p>
-          </p:txBody>
-        </p:sp>
-      </p:grpSp>
-      <p:grpSp>
-        <p:nvGrpSpPr>
-          <p:cNvPr id="52" name="Group 52"/>
+          <p:cNvPr id="42" name="Group 42"/>
           <p:cNvGrpSpPr/>
           <p:nvPr/>
         </p:nvGrpSpPr>
@@ -20078,14 +19963,14 @@
         </p:grpSpPr>
         <p:sp>
           <p:nvSpPr>
-            <p:cNvPr id="50" name="TextBox 50"/>
+            <p:cNvPr id="40" name="TextBox 40"/>
             <p:cNvSpPr txBox="1"/>
             <p:nvPr/>
           </p:nvSpPr>
           <p:spPr>
             <a:xfrm>
               <a:off x="489966" y="6458902"/>
-              <a:ext cx="5639211" cy="205359"/>
+              <a:ext cx="6031947" cy="205359"/>
             </a:xfrm>
             <a:prstGeom prst="rect">
               <a:avLst/>
@@ -20111,14 +19996,14 @@
                   <a:ea typeface="Microsoft YaHei"/>
                   <a:cs typeface="Segoe UI"/>
                 </a:rPr>
-                <a:t>研究路线依据：MCP · A2A · W3C PROV-O · Microsoft HAI Guidelines · Google HEART</a:t>
-              </a:r>
-            </a:p>
-          </p:txBody>
-        </p:sp>
-        <p:sp>
-          <p:nvSpPr>
-            <p:cNvPr id="51" name="TextBox 51"/>
+                <a:t>当前边界：有界只读 Agent Control Loop + 固定成果适配器；不是通用执行器或生产 SLA 证明</a:t>
+              </a:r>
+            </a:p>
+          </p:txBody>
+        </p:sp>
+        <p:sp>
+          <p:nvSpPr>
+            <p:cNvPr id="41" name="TextBox 41"/>
             <p:cNvSpPr txBox="1"/>
             <p:nvPr/>
           </p:nvSpPr>
@@ -20151,7 +20036,2049 @@
                   <a:ea typeface="Consolas"/>
                   <a:cs typeface="Consolas"/>
                 </a:rPr>
-                <a:t>17 / 17</a:t>
+                <a:t>17 / 21</a:t>
+              </a:r>
+            </a:p>
+          </p:txBody>
+        </p:sp>
+      </p:grpSp>
+    </p:spTree>
+  </p:cSld>
+  <p:clrMapOvr>
+    <a:masterClrMapping/>
+  </p:clrMapOvr>
+  <p:transition xmlns:p14="http://schemas.microsoft.com/office/powerpoint/2010/main" p14:dur="400">
+    <p:fade/>
+  </p:transition>
+</p:sld>
+</file>
+
+<file path=ppt/slides/slide18.xml><?xml version="1.0" encoding="utf-8"?>
+<p:sld xmlns:a="http://schemas.openxmlformats.org/drawingml/2006/main" xmlns:r="http://schemas.openxmlformats.org/officeDocument/2006/relationships" xmlns:p="http://schemas.openxmlformats.org/presentationml/2006/main">
+  <p:cSld>
+    <p:spTree>
+      <p:nvGrpSpPr>
+        <p:cNvPr id="1" name=""/>
+        <p:cNvGrpSpPr/>
+        <p:nvPr/>
+      </p:nvGrpSpPr>
+      <p:grpSpPr>
+        <a:xfrm>
+          <a:off x="0" y="0"/>
+          <a:ext cx="0" cy="0"/>
+          <a:chOff x="0" y="0"/>
+          <a:chExt cx="0" cy="0"/>
+        </a:xfrm>
+      </p:grpSpPr>
+      <p:grpSp>
+        <p:nvGrpSpPr>
+          <p:cNvPr id="4" name="Group 4"/>
+          <p:cNvGrpSpPr/>
+          <p:nvPr/>
+        </p:nvGrpSpPr>
+        <p:grpSpPr>
+          <a:xfrm>
+            <a:off x="0" y="0"/>
+            <a:ext cx="12192000" cy="6858000"/>
+            <a:chOff x="0" y="0"/>
+            <a:chExt cx="12192000" cy="6858000"/>
+          </a:xfrm>
+        </p:grpSpPr>
+        <p:sp>
+          <p:nvSpPr>
+            <p:cNvPr id="2" name="Rectangle 2"/>
+            <p:cNvSpPr/>
+            <p:nvPr/>
+          </p:nvSpPr>
+          <p:spPr>
+            <a:xfrm>
+              <a:off x="0" y="0"/>
+              <a:ext cx="12192000" cy="6858000"/>
+            </a:xfrm>
+            <a:prstGeom prst="rect">
+              <a:avLst/>
+            </a:prstGeom>
+            <a:solidFill>
+              <a:srgbClr val="F7F8FA"/>
+            </a:solidFill>
+            <a:ln>
+              <a:noFill/>
+            </a:ln>
+          </p:spPr>
+        </p:sp>
+        <p:sp>
+          <p:nvSpPr>
+            <p:cNvPr id="3" name="Freeform 3"/>
+            <p:cNvSpPr/>
+            <p:nvPr/>
+          </p:nvSpPr>
+          <p:spPr>
+            <a:xfrm>
+              <a:off x="495300" y="1066800"/>
+              <a:ext cx="11201400" cy="9525"/>
+            </a:xfrm>
+            <a:custGeom>
+              <a:avLst/>
+              <a:gdLst/>
+              <a:ahLst/>
+              <a:cxnLst/>
+              <a:rect l="l" t="t" r="r" b="b"/>
+              <a:pathLst>
+                <a:path w="11201400" h="9525">
+                  <a:moveTo>
+                    <a:pt x="0" y="0"/>
+                  </a:moveTo>
+                  <a:lnTo>
+                    <a:pt x="11201400" y="0"/>
+                  </a:lnTo>
+                </a:path>
+              </a:pathLst>
+            </a:custGeom>
+            <a:solidFill>
+              <a:srgbClr val="000000"/>
+            </a:solidFill>
+            <a:ln w="19050">
+              <a:solidFill>
+                <a:srgbClr val="CBD5DF"/>
+              </a:solidFill>
+            </a:ln>
+          </p:spPr>
+        </p:sp>
+      </p:grpSp>
+      <p:sp>
+        <p:nvSpPr>
+          <p:cNvPr id="5" name="TextBox 5"/>
+          <p:cNvSpPr txBox="1"/>
+          <p:nvPr/>
+        </p:nvSpPr>
+        <p:spPr>
+          <a:xfrm>
+            <a:off x="477774" y="370522"/>
+            <a:ext cx="9849367" cy="674751"/>
+          </a:xfrm>
+          <a:prstGeom prst="rect">
+            <a:avLst/>
+          </a:prstGeom>
+          <a:noFill/>
+          <a:ln>
+            <a:noFill/>
+          </a:ln>
+        </p:spPr>
+        <p:txBody>
+          <a:bodyPr wrap="none" lIns="0" tIns="0" rIns="0" bIns="0" anchor="t" anchorCtr="0">
+            <a:spAutoFit/>
+          </a:bodyPr>
+          <a:lstStyle/>
+          <a:p>
+            <a:pPr algn="l"/>
+            <a:r>
+              <a:rPr lang="zh-CN" sz="3450" b="1" dirty="0">
+                <a:solidFill>
+                  <a:srgbClr val="132A3A"/>
+                </a:solidFill>
+                <a:latin typeface="Segoe UI Semibold"/>
+                <a:ea typeface="Microsoft YaHei"/>
+                <a:cs typeface="Segoe UI Semibold"/>
+              </a:rPr>
+              <a:t>实操 1：用户只说目标，Agent 自主选择资料</a:t>
+            </a:r>
+          </a:p>
+        </p:txBody>
+      </p:sp>
+      <p:grpSp>
+        <p:nvGrpSpPr>
+          <p:cNvPr id="10" name="Group 10"/>
+          <p:cNvGrpSpPr/>
+          <p:nvPr/>
+        </p:nvGrpSpPr>
+        <p:grpSpPr>
+          <a:xfrm>
+            <a:off x="495300" y="1333500"/>
+            <a:ext cx="7543800" cy="5029200"/>
+            <a:chOff x="495300" y="1333500"/>
+            <a:chExt cx="7543800" cy="5029200"/>
+          </a:xfrm>
+        </p:grpSpPr>
+        <p:sp>
+          <p:nvSpPr>
+            <p:cNvPr id="6" name="Rectangle 6"/>
+            <p:cNvSpPr/>
+            <p:nvPr/>
+          </p:nvSpPr>
+          <p:spPr>
+            <a:xfrm>
+              <a:off x="495300" y="1333500"/>
+              <a:ext cx="7543800" cy="5029200"/>
+            </a:xfrm>
+            <a:prstGeom prst="roundRect">
+              <a:avLst>
+                <a:gd name="adj" fmla="val 1136"/>
+              </a:avLst>
+            </a:prstGeom>
+            <a:solidFill>
+              <a:srgbClr val="FFFFFF"/>
+            </a:solidFill>
+            <a:ln w="19050">
+              <a:solidFill>
+                <a:srgbClr val="CBD5DF"/>
+              </a:solidFill>
+            </a:ln>
+          </p:spPr>
+        </p:sp>
+        <p:pic>
+          <p:nvPicPr>
+            <p:cNvPr id="7" name="Image 7"/>
+            <p:cNvPicPr>
+              <a:picLocks noChangeAspect="1"/>
+            </p:cNvPicPr>
+            <p:nvPr/>
+          </p:nvPicPr>
+          <p:blipFill>
+            <a:blip r:embed="rId2"/>
+            <a:stretch>
+              <a:fillRect/>
+            </a:stretch>
+          </p:blipFill>
+          <p:spPr>
+            <a:xfrm>
+              <a:off x="783336" y="1428750"/>
+              <a:ext cx="6967728" cy="4838700"/>
+            </a:xfrm>
+            <a:prstGeom prst="rect">
+              <a:avLst/>
+            </a:prstGeom>
+          </p:spPr>
+        </p:pic>
+        <p:sp>
+          <p:nvSpPr>
+            <p:cNvPr id="8" name="Rectangle 8"/>
+            <p:cNvSpPr/>
+            <p:nvPr/>
+          </p:nvSpPr>
+          <p:spPr>
+            <a:xfrm>
+              <a:off x="685800" y="1524000"/>
+              <a:ext cx="1466850" cy="304800"/>
+            </a:xfrm>
+            <a:prstGeom prst="roundRect">
+              <a:avLst>
+                <a:gd name="adj" fmla="val 18750"/>
+              </a:avLst>
+            </a:prstGeom>
+            <a:solidFill>
+              <a:srgbClr val="1769E0"/>
+            </a:solidFill>
+            <a:ln>
+              <a:noFill/>
+            </a:ln>
+          </p:spPr>
+        </p:sp>
+        <p:sp>
+          <p:nvSpPr>
+            <p:cNvPr id="9" name="TextBox 9"/>
+            <p:cNvSpPr txBox="1"/>
+            <p:nvPr/>
+          </p:nvSpPr>
+          <p:spPr>
+            <a:xfrm>
+              <a:off x="872080" y="1595914"/>
+              <a:ext cx="1094289" cy="249364"/>
+            </a:xfrm>
+            <a:prstGeom prst="rect">
+              <a:avLst/>
+            </a:prstGeom>
+            <a:noFill/>
+            <a:ln>
+              <a:noFill/>
+            </a:ln>
+          </p:spPr>
+          <p:txBody>
+            <a:bodyPr wrap="none" lIns="0" tIns="0" rIns="0" bIns="0" anchor="t" anchorCtr="0">
+              <a:spAutoFit/>
+            </a:bodyPr>
+            <a:lstStyle/>
+            <a:p>
+              <a:pPr algn="ctr"/>
+              <a:r>
+                <a:rPr lang="zh-CN" sz="1280" b="1" dirty="0">
+                  <a:solidFill>
+                    <a:srgbClr val="FFFFFF"/>
+                  </a:solidFill>
+                  <a:latin typeface="Segoe UI Semibold"/>
+                  <a:ea typeface="Microsoft YaHei"/>
+                  <a:cs typeface="Segoe UI Semibold"/>
+                </a:rPr>
+                <a:t>当前系统实测</a:t>
+              </a:r>
+            </a:p>
+          </p:txBody>
+        </p:sp>
+      </p:grpSp>
+      <p:grpSp>
+        <p:nvGrpSpPr>
+          <p:cNvPr id="33" name="Group 33"/>
+          <p:cNvGrpSpPr/>
+          <p:nvPr/>
+        </p:nvGrpSpPr>
+        <p:grpSpPr>
+          <a:xfrm>
+            <a:off x="8305800" y="1333500"/>
+            <a:ext cx="3505314" cy="5029200"/>
+            <a:chOff x="8305800" y="1333500"/>
+            <a:chExt cx="3505314" cy="5029200"/>
+          </a:xfrm>
+        </p:grpSpPr>
+        <p:sp>
+          <p:nvSpPr>
+            <p:cNvPr id="11" name="Rectangle 11"/>
+            <p:cNvSpPr/>
+            <p:nvPr/>
+          </p:nvSpPr>
+          <p:spPr>
+            <a:xfrm>
+              <a:off x="8305800" y="1333500"/>
+              <a:ext cx="3390900" cy="1257300"/>
+            </a:xfrm>
+            <a:prstGeom prst="roundRect">
+              <a:avLst>
+                <a:gd name="adj" fmla="val 4545"/>
+              </a:avLst>
+            </a:prstGeom>
+            <a:solidFill>
+              <a:srgbClr val="FFFFFF"/>
+            </a:solidFill>
+            <a:ln w="19050">
+              <a:solidFill>
+                <a:srgbClr val="1769E0"/>
+              </a:solidFill>
+            </a:ln>
+          </p:spPr>
+        </p:sp>
+        <p:sp>
+          <p:nvSpPr>
+            <p:cNvPr id="12" name="Ellipse 12"/>
+            <p:cNvSpPr/>
+            <p:nvPr/>
+          </p:nvSpPr>
+          <p:spPr>
+            <a:xfrm>
+              <a:off x="8420100" y="1485900"/>
+              <a:ext cx="342900" cy="342900"/>
+            </a:xfrm>
+            <a:prstGeom prst="ellipse">
+              <a:avLst/>
+            </a:prstGeom>
+            <a:solidFill>
+              <a:srgbClr val="1769E0"/>
+            </a:solidFill>
+            <a:ln>
+              <a:noFill/>
+            </a:ln>
+          </p:spPr>
+        </p:sp>
+        <p:sp>
+          <p:nvSpPr>
+            <p:cNvPr id="13" name="TextBox 13"/>
+            <p:cNvSpPr txBox="1"/>
+            <p:nvPr/>
+          </p:nvSpPr>
+          <p:spPr>
+            <a:xfrm>
+              <a:off x="8535512" y="1586389"/>
+              <a:ext cx="112076" cy="249364"/>
+            </a:xfrm>
+            <a:prstGeom prst="rect">
+              <a:avLst/>
+            </a:prstGeom>
+            <a:noFill/>
+            <a:ln>
+              <a:noFill/>
+            </a:ln>
+          </p:spPr>
+          <p:txBody>
+            <a:bodyPr wrap="none" lIns="0" tIns="0" rIns="0" bIns="0" anchor="t" anchorCtr="0">
+              <a:spAutoFit/>
+            </a:bodyPr>
+            <a:lstStyle/>
+            <a:p>
+              <a:pPr algn="ctr"/>
+              <a:r>
+                <a:rPr lang="en-US" sz="1280" b="1" dirty="0">
+                  <a:solidFill>
+                    <a:srgbClr val="FFFFFF"/>
+                  </a:solidFill>
+                  <a:latin typeface="Consolas"/>
+                  <a:ea typeface="Consolas"/>
+                  <a:cs typeface="Consolas"/>
+                </a:rPr>
+                <a:t>1</a:t>
+              </a:r>
+            </a:p>
+          </p:txBody>
+        </p:sp>
+        <p:sp>
+          <p:nvSpPr>
+            <p:cNvPr id="14" name="TextBox 14"/>
+            <p:cNvSpPr txBox="1"/>
+            <p:nvPr/>
+          </p:nvSpPr>
+          <p:spPr>
+            <a:xfrm>
+              <a:off x="8868156" y="1529715"/>
+              <a:ext cx="1036015" cy="352044"/>
+            </a:xfrm>
+            <a:prstGeom prst="rect">
+              <a:avLst/>
+            </a:prstGeom>
+            <a:noFill/>
+            <a:ln>
+              <a:noFill/>
+            </a:ln>
+          </p:spPr>
+          <p:txBody>
+            <a:bodyPr wrap="none" lIns="0" tIns="0" rIns="0" bIns="0" anchor="t" anchorCtr="0">
+              <a:spAutoFit/>
+            </a:bodyPr>
+            <a:lstStyle/>
+            <a:p>
+              <a:pPr algn="l"/>
+              <a:r>
+                <a:rPr lang="zh-CN" sz="1800" b="1" dirty="0">
+                  <a:solidFill>
+                    <a:srgbClr val="132A3A"/>
+                  </a:solidFill>
+                  <a:latin typeface="Segoe UI Semibold"/>
+                  <a:ea typeface="Microsoft YaHei"/>
+                  <a:cs typeface="Segoe UI Semibold"/>
+                </a:rPr>
+                <a:t>用户动作</a:t>
+              </a:r>
+            </a:p>
+          </p:txBody>
+        </p:sp>
+        <p:sp>
+          <p:nvSpPr>
+            <p:cNvPr id="15" name="TextBox 15"/>
+            <p:cNvSpPr txBox="1"/>
+            <p:nvPr/>
+          </p:nvSpPr>
+          <p:spPr>
+            <a:xfrm>
+              <a:off x="8527923" y="1976914"/>
+              <a:ext cx="2587562" cy="249364"/>
+            </a:xfrm>
+            <a:prstGeom prst="rect">
+              <a:avLst/>
+            </a:prstGeom>
+            <a:noFill/>
+            <a:ln>
+              <a:noFill/>
+            </a:ln>
+          </p:spPr>
+          <p:txBody>
+            <a:bodyPr wrap="none" lIns="0" tIns="0" rIns="0" bIns="0" anchor="t" anchorCtr="0">
+              <a:spAutoFit/>
+            </a:bodyPr>
+            <a:lstStyle/>
+            <a:p>
+              <a:pPr algn="l"/>
+              <a:r>
+                <a:rPr lang="zh-CN" sz="1280" dirty="0">
+                  <a:solidFill>
+                    <a:srgbClr val="5A6B7C"/>
+                  </a:solidFill>
+                  <a:latin typeface="Segoe UI"/>
+                  <a:ea typeface="Microsoft YaHei"/>
+                  <a:cs typeface="Segoe UI"/>
+                </a:rPr>
+                <a:t>只写自然语言目标，不先猜文件。</a:t>
+              </a:r>
+            </a:p>
+          </p:txBody>
+        </p:sp>
+        <p:sp>
+          <p:nvSpPr>
+            <p:cNvPr id="16" name="TextBox 16"/>
+            <p:cNvSpPr txBox="1"/>
+            <p:nvPr/>
+          </p:nvSpPr>
+          <p:spPr>
+            <a:xfrm>
+              <a:off x="8529066" y="2248852"/>
+              <a:ext cx="1501921" cy="205359"/>
+            </a:xfrm>
+            <a:prstGeom prst="rect">
+              <a:avLst/>
+            </a:prstGeom>
+            <a:noFill/>
+            <a:ln>
+              <a:noFill/>
+            </a:ln>
+          </p:spPr>
+          <p:txBody>
+            <a:bodyPr wrap="none" lIns="0" tIns="0" rIns="0" bIns="0" anchor="t" anchorCtr="0">
+              <a:spAutoFit/>
+            </a:bodyPr>
+            <a:lstStyle/>
+            <a:p>
+              <a:pPr algn="l"/>
+              <a:r>
+                <a:rPr lang="en-US" sz="1050" dirty="0">
+                  <a:solidFill>
+                    <a:srgbClr val="1769E0"/>
+                  </a:solidFill>
+                  <a:latin typeface="Consolas"/>
+                  <a:ea typeface="Consolas"/>
+                  <a:cs typeface="Consolas"/>
+                </a:rPr>
+                <a:t>no selected_file_refs</a:t>
+              </a:r>
+            </a:p>
+          </p:txBody>
+        </p:sp>
+        <p:sp>
+          <p:nvSpPr>
+            <p:cNvPr id="17" name="Rectangle 17"/>
+            <p:cNvSpPr/>
+            <p:nvPr/>
+          </p:nvSpPr>
+          <p:spPr>
+            <a:xfrm>
+              <a:off x="8305800" y="2743200"/>
+              <a:ext cx="3390900" cy="1447800"/>
+            </a:xfrm>
+            <a:prstGeom prst="roundRect">
+              <a:avLst>
+                <a:gd name="adj" fmla="val 3947"/>
+              </a:avLst>
+            </a:prstGeom>
+            <a:solidFill>
+              <a:srgbClr val="FFFFFF"/>
+            </a:solidFill>
+            <a:ln w="19050">
+              <a:solidFill>
+                <a:srgbClr val="1769E0"/>
+              </a:solidFill>
+            </a:ln>
+          </p:spPr>
+        </p:sp>
+        <p:sp>
+          <p:nvSpPr>
+            <p:cNvPr id="18" name="Ellipse 18"/>
+            <p:cNvSpPr/>
+            <p:nvPr/>
+          </p:nvSpPr>
+          <p:spPr>
+            <a:xfrm>
+              <a:off x="8420100" y="2895600"/>
+              <a:ext cx="342900" cy="342900"/>
+            </a:xfrm>
+            <a:prstGeom prst="ellipse">
+              <a:avLst/>
+            </a:prstGeom>
+            <a:solidFill>
+              <a:srgbClr val="1769E0"/>
+            </a:solidFill>
+            <a:ln>
+              <a:noFill/>
+            </a:ln>
+          </p:spPr>
+        </p:sp>
+        <p:sp>
+          <p:nvSpPr>
+            <p:cNvPr id="19" name="TextBox 19"/>
+            <p:cNvSpPr txBox="1"/>
+            <p:nvPr/>
+          </p:nvSpPr>
+          <p:spPr>
+            <a:xfrm>
+              <a:off x="8535512" y="2996089"/>
+              <a:ext cx="112076" cy="249364"/>
+            </a:xfrm>
+            <a:prstGeom prst="rect">
+              <a:avLst/>
+            </a:prstGeom>
+            <a:noFill/>
+            <a:ln>
+              <a:noFill/>
+            </a:ln>
+          </p:spPr>
+          <p:txBody>
+            <a:bodyPr wrap="none" lIns="0" tIns="0" rIns="0" bIns="0" anchor="t" anchorCtr="0">
+              <a:spAutoFit/>
+            </a:bodyPr>
+            <a:lstStyle/>
+            <a:p>
+              <a:pPr algn="ctr"/>
+              <a:r>
+                <a:rPr lang="en-US" sz="1280" b="1" dirty="0">
+                  <a:solidFill>
+                    <a:srgbClr val="FFFFFF"/>
+                  </a:solidFill>
+                  <a:latin typeface="Consolas"/>
+                  <a:ea typeface="Consolas"/>
+                  <a:cs typeface="Consolas"/>
+                </a:rPr>
+                <a:t>2</a:t>
+              </a:r>
+            </a:p>
+          </p:txBody>
+        </p:sp>
+        <p:sp>
+          <p:nvSpPr>
+            <p:cNvPr id="20" name="TextBox 20"/>
+            <p:cNvSpPr txBox="1"/>
+            <p:nvPr/>
+          </p:nvSpPr>
+          <p:spPr>
+            <a:xfrm>
+              <a:off x="8868156" y="2939415"/>
+              <a:ext cx="1290447" cy="352044"/>
+            </a:xfrm>
+            <a:prstGeom prst="rect">
+              <a:avLst/>
+            </a:prstGeom>
+            <a:noFill/>
+            <a:ln>
+              <a:noFill/>
+            </a:ln>
+          </p:spPr>
+          <p:txBody>
+            <a:bodyPr wrap="none" lIns="0" tIns="0" rIns="0" bIns="0" anchor="t" anchorCtr="0">
+              <a:spAutoFit/>
+            </a:bodyPr>
+            <a:lstStyle/>
+            <a:p>
+              <a:pPr algn="l"/>
+              <a:r>
+                <a:rPr lang="zh-CN" sz="1800" b="1" dirty="0">
+                  <a:solidFill>
+                    <a:srgbClr val="132A3A"/>
+                  </a:solidFill>
+                  <a:latin typeface="Segoe UI Semibold"/>
+                  <a:ea typeface="Microsoft YaHei"/>
+                  <a:cs typeface="Segoe UI Semibold"/>
+                </a:rPr>
+                <a:t>服务端事实</a:t>
+              </a:r>
+            </a:p>
+          </p:txBody>
+        </p:sp>
+        <p:sp>
+          <p:nvSpPr>
+            <p:cNvPr id="21" name="TextBox 21"/>
+            <p:cNvSpPr txBox="1"/>
+            <p:nvPr/>
+          </p:nvSpPr>
+          <p:spPr>
+            <a:xfrm>
+              <a:off x="8527923" y="3386614"/>
+              <a:ext cx="2218534" cy="249364"/>
+            </a:xfrm>
+            <a:prstGeom prst="rect">
+              <a:avLst/>
+            </a:prstGeom>
+            <a:noFill/>
+            <a:ln>
+              <a:noFill/>
+            </a:ln>
+          </p:spPr>
+          <p:txBody>
+            <a:bodyPr wrap="none" lIns="0" tIns="0" rIns="0" bIns="0" anchor="t" anchorCtr="0">
+              <a:spAutoFit/>
+            </a:bodyPr>
+            <a:lstStyle/>
+            <a:p>
+              <a:pPr algn="l"/>
+              <a:r>
+                <a:rPr lang="zh-CN" sz="1280" dirty="0">
+                  <a:solidFill>
+                    <a:srgbClr val="5A6B7C"/>
+                  </a:solidFill>
+                  <a:latin typeface="Segoe UI"/>
+                  <a:ea typeface="Microsoft YaHei"/>
+                  <a:cs typeface="Segoe UI"/>
+                </a:rPr>
+                <a:t>冻结完整 allowlisted 索引；</a:t>
+              </a:r>
+            </a:p>
+          </p:txBody>
+        </p:sp>
+        <p:sp>
+          <p:nvSpPr>
+            <p:cNvPr id="22" name="TextBox 22"/>
+            <p:cNvSpPr txBox="1"/>
+            <p:nvPr/>
+          </p:nvSpPr>
+          <p:spPr>
+            <a:xfrm>
+              <a:off x="8527923" y="3653314"/>
+              <a:ext cx="3283191" cy="249364"/>
+            </a:xfrm>
+            <a:prstGeom prst="rect">
+              <a:avLst/>
+            </a:prstGeom>
+            <a:noFill/>
+            <a:ln>
+              <a:noFill/>
+            </a:ln>
+          </p:spPr>
+          <p:txBody>
+            <a:bodyPr wrap="none" lIns="0" tIns="0" rIns="0" bIns="0" anchor="t" anchorCtr="0">
+              <a:spAutoFit/>
+            </a:bodyPr>
+            <a:lstStyle/>
+            <a:p>
+              <a:pPr algn="l"/>
+              <a:r>
+                <a:rPr lang="zh-CN" sz="1280" dirty="0">
+                  <a:solidFill>
+                    <a:srgbClr val="5A6B7C"/>
+                  </a:solidFill>
+                  <a:latin typeface="Segoe UI"/>
+                  <a:ea typeface="Microsoft YaHei"/>
+                  <a:cs typeface="Segoe UI"/>
+                </a:rPr>
+                <a:t>Planner 只看安全元数据，提出本轮证据。</a:t>
+              </a:r>
+            </a:p>
+          </p:txBody>
+        </p:sp>
+        <p:sp>
+          <p:nvSpPr>
+            <p:cNvPr id="23" name="TextBox 23"/>
+            <p:cNvSpPr txBox="1"/>
+            <p:nvPr/>
+          </p:nvSpPr>
+          <p:spPr>
+            <a:xfrm>
+              <a:off x="8529066" y="3925252"/>
+              <a:ext cx="2081460" cy="205359"/>
+            </a:xfrm>
+            <a:prstGeom prst="rect">
+              <a:avLst/>
+            </a:prstGeom>
+            <a:noFill/>
+            <a:ln>
+              <a:noFill/>
+            </a:ln>
+          </p:spPr>
+          <p:txBody>
+            <a:bodyPr wrap="none" lIns="0" tIns="0" rIns="0" bIns="0" anchor="t" anchorCtr="0">
+              <a:spAutoFit/>
+            </a:bodyPr>
+            <a:lstStyle/>
+            <a:p>
+              <a:pPr algn="l"/>
+              <a:r>
+                <a:rPr lang="en-US" sz="1050" dirty="0">
+                  <a:solidFill>
+                    <a:srgbClr val="1769E0"/>
+                  </a:solidFill>
+                  <a:latin typeface="Consolas"/>
+                  <a:ea typeface="Consolas"/>
+                  <a:cs typeface="Consolas"/>
+                </a:rPr>
+                <a:t>scope_mode=whole_workspace</a:t>
+              </a:r>
+            </a:p>
+          </p:txBody>
+        </p:sp>
+        <p:sp>
+          <p:nvSpPr>
+            <p:cNvPr id="24" name="Rectangle 24"/>
+            <p:cNvSpPr/>
+            <p:nvPr/>
+          </p:nvSpPr>
+          <p:spPr>
+            <a:xfrm>
+              <a:off x="8305800" y="4343400"/>
+              <a:ext cx="3390900" cy="1257300"/>
+            </a:xfrm>
+            <a:prstGeom prst="roundRect">
+              <a:avLst>
+                <a:gd name="adj" fmla="val 4545"/>
+              </a:avLst>
+            </a:prstGeom>
+            <a:solidFill>
+              <a:srgbClr val="FFFFFF"/>
+            </a:solidFill>
+            <a:ln w="19050">
+              <a:solidFill>
+                <a:srgbClr val="2E7D32"/>
+              </a:solidFill>
+            </a:ln>
+          </p:spPr>
+        </p:sp>
+        <p:sp>
+          <p:nvSpPr>
+            <p:cNvPr id="25" name="Ellipse 25"/>
+            <p:cNvSpPr/>
+            <p:nvPr/>
+          </p:nvSpPr>
+          <p:spPr>
+            <a:xfrm>
+              <a:off x="8420100" y="4495800"/>
+              <a:ext cx="342900" cy="342900"/>
+            </a:xfrm>
+            <a:prstGeom prst="ellipse">
+              <a:avLst/>
+            </a:prstGeom>
+            <a:solidFill>
+              <a:srgbClr val="2E7D32"/>
+            </a:solidFill>
+            <a:ln>
+              <a:noFill/>
+            </a:ln>
+          </p:spPr>
+        </p:sp>
+        <p:sp>
+          <p:nvSpPr>
+            <p:cNvPr id="26" name="TextBox 26"/>
+            <p:cNvSpPr txBox="1"/>
+            <p:nvPr/>
+          </p:nvSpPr>
+          <p:spPr>
+            <a:xfrm>
+              <a:off x="8535512" y="4596289"/>
+              <a:ext cx="112076" cy="249364"/>
+            </a:xfrm>
+            <a:prstGeom prst="rect">
+              <a:avLst/>
+            </a:prstGeom>
+            <a:noFill/>
+            <a:ln>
+              <a:noFill/>
+            </a:ln>
+          </p:spPr>
+          <p:txBody>
+            <a:bodyPr wrap="none" lIns="0" tIns="0" rIns="0" bIns="0" anchor="t" anchorCtr="0">
+              <a:spAutoFit/>
+            </a:bodyPr>
+            <a:lstStyle/>
+            <a:p>
+              <a:pPr algn="ctr"/>
+              <a:r>
+                <a:rPr lang="en-US" sz="1280" b="1" dirty="0">
+                  <a:solidFill>
+                    <a:srgbClr val="FFFFFF"/>
+                  </a:solidFill>
+                  <a:latin typeface="Consolas"/>
+                  <a:ea typeface="Consolas"/>
+                  <a:cs typeface="Consolas"/>
+                </a:rPr>
+                <a:t>3</a:t>
+              </a:r>
+            </a:p>
+          </p:txBody>
+        </p:sp>
+        <p:sp>
+          <p:nvSpPr>
+            <p:cNvPr id="27" name="TextBox 27"/>
+            <p:cNvSpPr txBox="1"/>
+            <p:nvPr/>
+          </p:nvSpPr>
+          <p:spPr>
+            <a:xfrm>
+              <a:off x="8868156" y="4539615"/>
+              <a:ext cx="1036015" cy="352044"/>
+            </a:xfrm>
+            <a:prstGeom prst="rect">
+              <a:avLst/>
+            </a:prstGeom>
+            <a:noFill/>
+            <a:ln>
+              <a:noFill/>
+            </a:ln>
+          </p:spPr>
+          <p:txBody>
+            <a:bodyPr wrap="none" lIns="0" tIns="0" rIns="0" bIns="0" anchor="t" anchorCtr="0">
+              <a:spAutoFit/>
+            </a:bodyPr>
+            <a:lstStyle/>
+            <a:p>
+              <a:pPr algn="l"/>
+              <a:r>
+                <a:rPr lang="zh-CN" sz="1800" b="1" dirty="0">
+                  <a:solidFill>
+                    <a:srgbClr val="132A3A"/>
+                  </a:solidFill>
+                  <a:latin typeface="Segoe UI Semibold"/>
+                  <a:ea typeface="Microsoft YaHei"/>
+                  <a:cs typeface="Segoe UI Semibold"/>
+                </a:rPr>
+                <a:t>前台反馈</a:t>
+              </a:r>
+            </a:p>
+          </p:txBody>
+        </p:sp>
+        <p:sp>
+          <p:nvSpPr>
+            <p:cNvPr id="28" name="TextBox 28"/>
+            <p:cNvSpPr txBox="1"/>
+            <p:nvPr/>
+          </p:nvSpPr>
+          <p:spPr>
+            <a:xfrm>
+              <a:off x="8527923" y="4986814"/>
+              <a:ext cx="2759202" cy="249364"/>
+            </a:xfrm>
+            <a:prstGeom prst="rect">
+              <a:avLst/>
+            </a:prstGeom>
+            <a:noFill/>
+            <a:ln>
+              <a:noFill/>
+            </a:ln>
+          </p:spPr>
+          <p:txBody>
+            <a:bodyPr wrap="none" lIns="0" tIns="0" rIns="0" bIns="0" anchor="t" anchorCtr="0">
+              <a:spAutoFit/>
+            </a:bodyPr>
+            <a:lstStyle/>
+            <a:p>
+              <a:pPr algn="l"/>
+              <a:r>
+                <a:rPr lang="zh-CN" sz="1280" dirty="0">
+                  <a:solidFill>
+                    <a:srgbClr val="5A6B7C"/>
+                  </a:solidFill>
+                  <a:latin typeface="Segoe UI"/>
+                  <a:ea typeface="Microsoft YaHei"/>
+                  <a:cs typeface="Segoe UI"/>
+                </a:rPr>
+                <a:t>展示资料依据、模型采用、剩余预算</a:t>
+              </a:r>
+            </a:p>
+          </p:txBody>
+        </p:sp>
+        <p:sp>
+          <p:nvSpPr>
+            <p:cNvPr id="29" name="TextBox 29"/>
+            <p:cNvSpPr txBox="1"/>
+            <p:nvPr/>
+          </p:nvSpPr>
+          <p:spPr>
+            <a:xfrm>
+              <a:off x="8527923" y="5253514"/>
+              <a:ext cx="1757469" cy="249364"/>
+            </a:xfrm>
+            <a:prstGeom prst="rect">
+              <a:avLst/>
+            </a:prstGeom>
+            <a:noFill/>
+            <a:ln>
+              <a:noFill/>
+            </a:ln>
+          </p:spPr>
+          <p:txBody>
+            <a:bodyPr wrap="none" lIns="0" tIns="0" rIns="0" bIns="0" anchor="t" anchorCtr="0">
+              <a:spAutoFit/>
+            </a:bodyPr>
+            <a:lstStyle/>
+            <a:p>
+              <a:pPr algn="l"/>
+              <a:r>
+                <a:rPr lang="zh-CN" sz="1280" dirty="0">
+                  <a:solidFill>
+                    <a:srgbClr val="5A6B7C"/>
+                  </a:solidFill>
+                  <a:latin typeface="Segoe UI"/>
+                  <a:ea typeface="Microsoft YaHei"/>
+                  <a:cs typeface="Segoe UI"/>
+                </a:rPr>
+                <a:t>以及实时有序 Trace。</a:t>
+              </a:r>
+            </a:p>
+          </p:txBody>
+        </p:sp>
+        <p:sp>
+          <p:nvSpPr>
+            <p:cNvPr id="30" name="Rectangle 30"/>
+            <p:cNvSpPr/>
+            <p:nvPr/>
+          </p:nvSpPr>
+          <p:spPr>
+            <a:xfrm>
+              <a:off x="8305800" y="5753100"/>
+              <a:ext cx="3390900" cy="609600"/>
+            </a:xfrm>
+            <a:prstGeom prst="roundRect">
+              <a:avLst>
+                <a:gd name="adj" fmla="val 9375"/>
+              </a:avLst>
+            </a:prstGeom>
+            <a:solidFill>
+              <a:srgbClr val="EDF1F4"/>
+            </a:solidFill>
+            <a:ln>
+              <a:noFill/>
+            </a:ln>
+          </p:spPr>
+        </p:sp>
+        <p:sp>
+          <p:nvSpPr>
+            <p:cNvPr id="31" name="TextBox 31"/>
+            <p:cNvSpPr txBox="1"/>
+            <p:nvPr/>
+          </p:nvSpPr>
+          <p:spPr>
+            <a:xfrm>
+              <a:off x="8527923" y="5872639"/>
+              <a:ext cx="373399" cy="249364"/>
+            </a:xfrm>
+            <a:prstGeom prst="rect">
+              <a:avLst/>
+            </a:prstGeom>
+            <a:noFill/>
+            <a:ln>
+              <a:noFill/>
+            </a:ln>
+          </p:spPr>
+          <p:txBody>
+            <a:bodyPr wrap="none" lIns="0" tIns="0" rIns="0" bIns="0" anchor="t" anchorCtr="0">
+              <a:spAutoFit/>
+            </a:bodyPr>
+            <a:lstStyle/>
+            <a:p>
+              <a:pPr algn="l"/>
+              <a:r>
+                <a:rPr lang="zh-CN" sz="1280" b="1" dirty="0">
+                  <a:solidFill>
+                    <a:srgbClr val="B54708"/>
+                  </a:solidFill>
+                  <a:latin typeface="Segoe UI Semibold"/>
+                  <a:ea typeface="Microsoft YaHei"/>
+                  <a:cs typeface="Segoe UI Semibold"/>
+                </a:rPr>
+                <a:t>边界</a:t>
+              </a:r>
+            </a:p>
+          </p:txBody>
+        </p:sp>
+        <p:sp>
+          <p:nvSpPr>
+            <p:cNvPr id="32" name="TextBox 32"/>
+            <p:cNvSpPr txBox="1"/>
+            <p:nvPr/>
+          </p:nvSpPr>
+          <p:spPr>
+            <a:xfrm>
+              <a:off x="8529066" y="6125528"/>
+              <a:ext cx="2554986" cy="205359"/>
+            </a:xfrm>
+            <a:prstGeom prst="rect">
+              <a:avLst/>
+            </a:prstGeom>
+            <a:noFill/>
+            <a:ln>
+              <a:noFill/>
+            </a:ln>
+          </p:spPr>
+          <p:txBody>
+            <a:bodyPr wrap="none" lIns="0" tIns="0" rIns="0" bIns="0" anchor="t" anchorCtr="0">
+              <a:spAutoFit/>
+            </a:bodyPr>
+            <a:lstStyle/>
+            <a:p>
+              <a:pPr algn="l"/>
+              <a:r>
+                <a:rPr lang="zh-CN" sz="1050" dirty="0">
+                  <a:solidFill>
+                    <a:srgbClr val="5A6B7C"/>
+                  </a:solidFill>
+                  <a:latin typeface="Segoe UI"/>
+                  <a:ea typeface="Microsoft YaHei"/>
+                  <a:cs typeface="Segoe UI"/>
+                </a:rPr>
+                <a:t>自主选资料不等于穷举正确，仍需复核。</a:t>
+              </a:r>
+            </a:p>
+          </p:txBody>
+        </p:sp>
+      </p:grpSp>
+      <p:grpSp>
+        <p:nvGrpSpPr>
+          <p:cNvPr id="36" name="Group 36"/>
+          <p:cNvGrpSpPr/>
+          <p:nvPr/>
+        </p:nvGrpSpPr>
+        <p:grpSpPr>
+          <a:xfrm>
+            <a:off x="489966" y="6458902"/>
+            <a:ext cx="11021568" cy="205359"/>
+            <a:chOff x="489966" y="6458902"/>
+            <a:chExt cx="11021568" cy="205359"/>
+          </a:xfrm>
+        </p:grpSpPr>
+        <p:sp>
+          <p:nvSpPr>
+            <p:cNvPr id="34" name="TextBox 34"/>
+            <p:cNvSpPr txBox="1"/>
+            <p:nvPr/>
+          </p:nvSpPr>
+          <p:spPr>
+            <a:xfrm>
+              <a:off x="489966" y="6458902"/>
+              <a:ext cx="4420819" cy="205359"/>
+            </a:xfrm>
+            <a:prstGeom prst="rect">
+              <a:avLst/>
+            </a:prstGeom>
+            <a:noFill/>
+            <a:ln>
+              <a:noFill/>
+            </a:ln>
+          </p:spPr>
+          <p:txBody>
+            <a:bodyPr wrap="none" lIns="0" tIns="0" rIns="0" bIns="0" anchor="t" anchorCtr="0">
+              <a:spAutoFit/>
+            </a:bodyPr>
+            <a:lstStyle/>
+            <a:p>
+              <a:pPr algn="l"/>
+              <a:r>
+                <a:rPr lang="zh-CN" sz="1050" dirty="0">
+                  <a:solidFill>
+                    <a:srgbClr val="7C8A98"/>
+                  </a:solidFill>
+                  <a:latin typeface="Segoe UI"/>
+                  <a:ea typeface="Microsoft YaHei"/>
+                  <a:cs typeface="Segoe UI"/>
+                </a:rPr>
+                <a:t>交互变化：从“用户先选文件”变为“用户说明目标，系统解释资料选择”</a:t>
+              </a:r>
+            </a:p>
+          </p:txBody>
+        </p:sp>
+        <p:sp>
+          <p:nvSpPr>
+            <p:cNvPr id="35" name="TextBox 35"/>
+            <p:cNvSpPr txBox="1"/>
+            <p:nvPr/>
+          </p:nvSpPr>
+          <p:spPr>
+            <a:xfrm>
+              <a:off x="11027340" y="6458902"/>
+              <a:ext cx="484194" cy="205359"/>
+            </a:xfrm>
+            <a:prstGeom prst="rect">
+              <a:avLst/>
+            </a:prstGeom>
+            <a:noFill/>
+            <a:ln>
+              <a:noFill/>
+            </a:ln>
+          </p:spPr>
+          <p:txBody>
+            <a:bodyPr wrap="none" lIns="0" tIns="0" rIns="0" bIns="0" anchor="t" anchorCtr="0">
+              <a:spAutoFit/>
+            </a:bodyPr>
+            <a:lstStyle/>
+            <a:p>
+              <a:pPr algn="r"/>
+              <a:r>
+                <a:rPr lang="en-US" sz="1050" dirty="0">
+                  <a:solidFill>
+                    <a:srgbClr val="7C8A98"/>
+                  </a:solidFill>
+                  <a:latin typeface="Consolas"/>
+                  <a:ea typeface="Consolas"/>
+                  <a:cs typeface="Consolas"/>
+                </a:rPr>
+                <a:t>18 / 21</a:t>
+              </a:r>
+            </a:p>
+          </p:txBody>
+        </p:sp>
+      </p:grpSp>
+    </p:spTree>
+  </p:cSld>
+  <p:clrMapOvr>
+    <a:masterClrMapping/>
+  </p:clrMapOvr>
+  <p:transition xmlns:p14="http://schemas.microsoft.com/office/powerpoint/2010/main" p14:dur="400">
+    <p:fade/>
+  </p:transition>
+</p:sld>
+</file>
+
+<file path=ppt/slides/slide19.xml><?xml version="1.0" encoding="utf-8"?>
+<p:sld xmlns:a="http://schemas.openxmlformats.org/drawingml/2006/main" xmlns:r="http://schemas.openxmlformats.org/officeDocument/2006/relationships" xmlns:p="http://schemas.openxmlformats.org/presentationml/2006/main">
+  <p:cSld>
+    <p:spTree>
+      <p:nvGrpSpPr>
+        <p:cNvPr id="1" name=""/>
+        <p:cNvGrpSpPr/>
+        <p:nvPr/>
+      </p:nvGrpSpPr>
+      <p:grpSpPr>
+        <a:xfrm>
+          <a:off x="0" y="0"/>
+          <a:ext cx="0" cy="0"/>
+          <a:chOff x="0" y="0"/>
+          <a:chExt cx="0" cy="0"/>
+        </a:xfrm>
+      </p:grpSpPr>
+      <p:grpSp>
+        <p:nvGrpSpPr>
+          <p:cNvPr id="4" name="Group 4"/>
+          <p:cNvGrpSpPr/>
+          <p:nvPr/>
+        </p:nvGrpSpPr>
+        <p:grpSpPr>
+          <a:xfrm>
+            <a:off x="0" y="0"/>
+            <a:ext cx="12192000" cy="6858000"/>
+            <a:chOff x="0" y="0"/>
+            <a:chExt cx="12192000" cy="6858000"/>
+          </a:xfrm>
+        </p:grpSpPr>
+        <p:sp>
+          <p:nvSpPr>
+            <p:cNvPr id="2" name="Rectangle 2"/>
+            <p:cNvSpPr/>
+            <p:nvPr/>
+          </p:nvSpPr>
+          <p:spPr>
+            <a:xfrm>
+              <a:off x="0" y="0"/>
+              <a:ext cx="12192000" cy="6858000"/>
+            </a:xfrm>
+            <a:prstGeom prst="rect">
+              <a:avLst/>
+            </a:prstGeom>
+            <a:solidFill>
+              <a:srgbClr val="F7F8FA"/>
+            </a:solidFill>
+            <a:ln>
+              <a:noFill/>
+            </a:ln>
+          </p:spPr>
+        </p:sp>
+        <p:sp>
+          <p:nvSpPr>
+            <p:cNvPr id="3" name="Freeform 3"/>
+            <p:cNvSpPr/>
+            <p:nvPr/>
+          </p:nvSpPr>
+          <p:spPr>
+            <a:xfrm>
+              <a:off x="495300" y="1066800"/>
+              <a:ext cx="11201400" cy="9525"/>
+            </a:xfrm>
+            <a:custGeom>
+              <a:avLst/>
+              <a:gdLst/>
+              <a:ahLst/>
+              <a:cxnLst/>
+              <a:rect l="l" t="t" r="r" b="b"/>
+              <a:pathLst>
+                <a:path w="11201400" h="9525">
+                  <a:moveTo>
+                    <a:pt x="0" y="0"/>
+                  </a:moveTo>
+                  <a:lnTo>
+                    <a:pt x="11201400" y="0"/>
+                  </a:lnTo>
+                </a:path>
+              </a:pathLst>
+            </a:custGeom>
+            <a:solidFill>
+              <a:srgbClr val="000000"/>
+            </a:solidFill>
+            <a:ln w="19050">
+              <a:solidFill>
+                <a:srgbClr val="CBD5DF"/>
+              </a:solidFill>
+            </a:ln>
+          </p:spPr>
+        </p:sp>
+      </p:grpSp>
+      <p:sp>
+        <p:nvSpPr>
+          <p:cNvPr id="5" name="TextBox 5"/>
+          <p:cNvSpPr txBox="1"/>
+          <p:nvPr/>
+        </p:nvSpPr>
+        <p:spPr>
+          <a:xfrm>
+            <a:off x="477774" y="370522"/>
+            <a:ext cx="9227461" cy="674751"/>
+          </a:xfrm>
+          <a:prstGeom prst="rect">
+            <a:avLst/>
+          </a:prstGeom>
+          <a:noFill/>
+          <a:ln>
+            <a:noFill/>
+          </a:ln>
+        </p:spPr>
+        <p:txBody>
+          <a:bodyPr wrap="none" lIns="0" tIns="0" rIns="0" bIns="0" anchor="t" anchorCtr="0">
+            <a:spAutoFit/>
+          </a:bodyPr>
+          <a:lstStyle/>
+          <a:p>
+            <a:pPr algn="l"/>
+            <a:r>
+              <a:rPr lang="zh-CN" sz="3450" b="1" dirty="0">
+                <a:solidFill>
+                  <a:srgbClr val="132A3A"/>
+                </a:solidFill>
+                <a:latin typeface="Segoe UI Semibold"/>
+                <a:ea typeface="Microsoft YaHei"/>
+                <a:cs typeface="Segoe UI Semibold"/>
+              </a:rPr>
+              <a:t>实操 2：证据有歧义，只恢复受影响的分支</a:t>
+            </a:r>
+          </a:p>
+        </p:txBody>
+      </p:sp>
+      <p:grpSp>
+        <p:nvGrpSpPr>
+          <p:cNvPr id="10" name="Group 10"/>
+          <p:cNvGrpSpPr/>
+          <p:nvPr/>
+        </p:nvGrpSpPr>
+        <p:grpSpPr>
+          <a:xfrm>
+            <a:off x="495300" y="1333500"/>
+            <a:ext cx="7543800" cy="5029200"/>
+            <a:chOff x="495300" y="1333500"/>
+            <a:chExt cx="7543800" cy="5029200"/>
+          </a:xfrm>
+        </p:grpSpPr>
+        <p:sp>
+          <p:nvSpPr>
+            <p:cNvPr id="6" name="Rectangle 6"/>
+            <p:cNvSpPr/>
+            <p:nvPr/>
+          </p:nvSpPr>
+          <p:spPr>
+            <a:xfrm>
+              <a:off x="495300" y="1333500"/>
+              <a:ext cx="7543800" cy="5029200"/>
+            </a:xfrm>
+            <a:prstGeom prst="roundRect">
+              <a:avLst>
+                <a:gd name="adj" fmla="val 1136"/>
+              </a:avLst>
+            </a:prstGeom>
+            <a:solidFill>
+              <a:srgbClr val="FFFFFF"/>
+            </a:solidFill>
+            <a:ln w="19050">
+              <a:solidFill>
+                <a:srgbClr val="CBD5DF"/>
+              </a:solidFill>
+            </a:ln>
+          </p:spPr>
+        </p:sp>
+        <p:pic>
+          <p:nvPicPr>
+            <p:cNvPr id="7" name="Image 7"/>
+            <p:cNvPicPr>
+              <a:picLocks noChangeAspect="1"/>
+            </p:cNvPicPr>
+            <p:nvPr/>
+          </p:nvPicPr>
+          <p:blipFill>
+            <a:blip r:embed="rId2"/>
+            <a:stretch>
+              <a:fillRect/>
+            </a:stretch>
+          </p:blipFill>
+          <p:spPr>
+            <a:xfrm>
+              <a:off x="832320" y="1428750"/>
+              <a:ext cx="6869759" cy="4838700"/>
+            </a:xfrm>
+            <a:prstGeom prst="rect">
+              <a:avLst/>
+            </a:prstGeom>
+          </p:spPr>
+        </p:pic>
+        <p:sp>
+          <p:nvSpPr>
+            <p:cNvPr id="8" name="Rectangle 8"/>
+            <p:cNvSpPr/>
+            <p:nvPr/>
+          </p:nvSpPr>
+          <p:spPr>
+            <a:xfrm>
+              <a:off x="685800" y="1524000"/>
+              <a:ext cx="1619250" cy="304800"/>
+            </a:xfrm>
+            <a:prstGeom prst="roundRect">
+              <a:avLst>
+                <a:gd name="adj" fmla="val 18750"/>
+              </a:avLst>
+            </a:prstGeom>
+            <a:solidFill>
+              <a:srgbClr val="D97706"/>
+            </a:solidFill>
+            <a:ln>
+              <a:noFill/>
+            </a:ln>
+          </p:spPr>
+        </p:sp>
+        <p:sp>
+          <p:nvSpPr>
+            <p:cNvPr id="9" name="TextBox 9"/>
+            <p:cNvSpPr txBox="1"/>
+            <p:nvPr/>
+          </p:nvSpPr>
+          <p:spPr>
+            <a:xfrm>
+              <a:off x="948280" y="1595914"/>
+              <a:ext cx="1094289" cy="249364"/>
+            </a:xfrm>
+            <a:prstGeom prst="rect">
+              <a:avLst/>
+            </a:prstGeom>
+            <a:noFill/>
+            <a:ln>
+              <a:noFill/>
+            </a:ln>
+          </p:spPr>
+          <p:txBody>
+            <a:bodyPr wrap="none" lIns="0" tIns="0" rIns="0" bIns="0" anchor="t" anchorCtr="0">
+              <a:spAutoFit/>
+            </a:bodyPr>
+            <a:lstStyle/>
+            <a:p>
+              <a:pPr algn="ctr"/>
+              <a:r>
+                <a:rPr lang="zh-CN" sz="1280" b="1" dirty="0">
+                  <a:solidFill>
+                    <a:srgbClr val="FFFFFF"/>
+                  </a:solidFill>
+                  <a:latin typeface="Segoe UI Semibold"/>
+                  <a:ea typeface="Microsoft YaHei"/>
+                  <a:cs typeface="Segoe UI Semibold"/>
+                </a:rPr>
+                <a:t>证据复核实景</a:t>
+              </a:r>
+            </a:p>
+          </p:txBody>
+        </p:sp>
+      </p:grpSp>
+      <p:grpSp>
+        <p:nvGrpSpPr>
+          <p:cNvPr id="26" name="Group 26"/>
+          <p:cNvGrpSpPr/>
+          <p:nvPr/>
+        </p:nvGrpSpPr>
+        <p:grpSpPr>
+          <a:xfrm>
+            <a:off x="8305800" y="1333500"/>
+            <a:ext cx="3390900" cy="5029200"/>
+            <a:chOff x="8305800" y="1333500"/>
+            <a:chExt cx="3390900" cy="5029200"/>
+          </a:xfrm>
+        </p:grpSpPr>
+        <p:sp>
+          <p:nvSpPr>
+            <p:cNvPr id="11" name="Rectangle 11"/>
+            <p:cNvSpPr/>
+            <p:nvPr/>
+          </p:nvSpPr>
+          <p:spPr>
+            <a:xfrm>
+              <a:off x="8305800" y="1333500"/>
+              <a:ext cx="3390900" cy="1200150"/>
+            </a:xfrm>
+            <a:prstGeom prst="roundRect">
+              <a:avLst>
+                <a:gd name="adj" fmla="val 4762"/>
+              </a:avLst>
+            </a:prstGeom>
+            <a:solidFill>
+              <a:srgbClr val="FFFFFF"/>
+            </a:solidFill>
+            <a:ln w="19050">
+              <a:solidFill>
+                <a:srgbClr val="D97706"/>
+              </a:solidFill>
+            </a:ln>
+          </p:spPr>
+        </p:sp>
+        <p:sp>
+          <p:nvSpPr>
+            <p:cNvPr id="12" name="TextBox 12"/>
+            <p:cNvSpPr txBox="1"/>
+            <p:nvPr/>
+          </p:nvSpPr>
+          <p:spPr>
+            <a:xfrm>
+              <a:off x="8525256" y="1482090"/>
+              <a:ext cx="2053742" cy="352044"/>
+            </a:xfrm>
+            <a:prstGeom prst="rect">
+              <a:avLst/>
+            </a:prstGeom>
+            <a:noFill/>
+            <a:ln>
+              <a:noFill/>
+            </a:ln>
+          </p:spPr>
+          <p:txBody>
+            <a:bodyPr wrap="none" lIns="0" tIns="0" rIns="0" bIns="0" anchor="t" anchorCtr="0">
+              <a:spAutoFit/>
+            </a:bodyPr>
+            <a:lstStyle/>
+            <a:p>
+              <a:pPr algn="l"/>
+              <a:r>
+                <a:rPr lang="zh-CN" sz="1800" b="1" dirty="0">
+                  <a:solidFill>
+                    <a:srgbClr val="132A3A"/>
+                  </a:solidFill>
+                  <a:latin typeface="Segoe UI Semibold"/>
+                  <a:ea typeface="Microsoft YaHei"/>
+                  <a:cs typeface="Segoe UI Semibold"/>
+                </a:rPr>
+                <a:t>先解释发生了什么</a:t>
+              </a:r>
+            </a:p>
+          </p:txBody>
+        </p:sp>
+        <p:sp>
+          <p:nvSpPr>
+            <p:cNvPr id="13" name="TextBox 13"/>
+            <p:cNvSpPr txBox="1"/>
+            <p:nvPr/>
+          </p:nvSpPr>
+          <p:spPr>
+            <a:xfrm>
+              <a:off x="8527923" y="1881664"/>
+              <a:ext cx="2759202" cy="249364"/>
+            </a:xfrm>
+            <a:prstGeom prst="rect">
+              <a:avLst/>
+            </a:prstGeom>
+            <a:noFill/>
+            <a:ln>
+              <a:noFill/>
+            </a:ln>
+          </p:spPr>
+          <p:txBody>
+            <a:bodyPr wrap="none" lIns="0" tIns="0" rIns="0" bIns="0" anchor="t" anchorCtr="0">
+              <a:spAutoFit/>
+            </a:bodyPr>
+            <a:lstStyle/>
+            <a:p>
+              <a:pPr algn="l"/>
+              <a:r>
+                <a:rPr lang="zh-CN" sz="1280" dirty="0">
+                  <a:solidFill>
+                    <a:srgbClr val="5A6B7C"/>
+                  </a:solidFill>
+                  <a:latin typeface="Segoe UI"/>
+                  <a:ea typeface="Microsoft YaHei"/>
+                  <a:cs typeface="Segoe UI"/>
+                </a:rPr>
+                <a:t>同一逐字片段出现多次，服务端无法</a:t>
+              </a:r>
+            </a:p>
+          </p:txBody>
+        </p:sp>
+        <p:sp>
+          <p:nvSpPr>
+            <p:cNvPr id="14" name="TextBox 14"/>
+            <p:cNvSpPr txBox="1"/>
+            <p:nvPr/>
+          </p:nvSpPr>
+          <p:spPr>
+            <a:xfrm>
+              <a:off x="8527923" y="2148364"/>
+              <a:ext cx="2244281" cy="249364"/>
+            </a:xfrm>
+            <a:prstGeom prst="rect">
+              <a:avLst/>
+            </a:prstGeom>
+            <a:noFill/>
+            <a:ln>
+              <a:noFill/>
+            </a:ln>
+          </p:spPr>
+          <p:txBody>
+            <a:bodyPr wrap="none" lIns="0" tIns="0" rIns="0" bIns="0" anchor="t" anchorCtr="0">
+              <a:spAutoFit/>
+            </a:bodyPr>
+            <a:lstStyle/>
+            <a:p>
+              <a:pPr algn="l"/>
+              <a:r>
+                <a:rPr lang="zh-CN" sz="1280" dirty="0">
+                  <a:solidFill>
+                    <a:srgbClr val="5A6B7C"/>
+                  </a:solidFill>
+                  <a:latin typeface="Segoe UI"/>
+                  <a:ea typeface="Microsoft YaHei"/>
+                  <a:cs typeface="Segoe UI"/>
+                </a:rPr>
+                <a:t>唯一决定该回开哪一处原文。</a:t>
+              </a:r>
+            </a:p>
+          </p:txBody>
+        </p:sp>
+        <p:sp>
+          <p:nvSpPr>
+            <p:cNvPr id="15" name="Rectangle 15"/>
+            <p:cNvSpPr/>
+            <p:nvPr/>
+          </p:nvSpPr>
+          <p:spPr>
+            <a:xfrm>
+              <a:off x="8305800" y="2686050"/>
+              <a:ext cx="3390900" cy="1200150"/>
+            </a:xfrm>
+            <a:prstGeom prst="roundRect">
+              <a:avLst>
+                <a:gd name="adj" fmla="val 4762"/>
+              </a:avLst>
+            </a:prstGeom>
+            <a:solidFill>
+              <a:srgbClr val="FFFFFF"/>
+            </a:solidFill>
+            <a:ln w="19050">
+              <a:solidFill>
+                <a:srgbClr val="1769E0"/>
+              </a:solidFill>
+            </a:ln>
+          </p:spPr>
+        </p:sp>
+        <p:sp>
+          <p:nvSpPr>
+            <p:cNvPr id="16" name="TextBox 16"/>
+            <p:cNvSpPr txBox="1"/>
+            <p:nvPr/>
+          </p:nvSpPr>
+          <p:spPr>
+            <a:xfrm>
+              <a:off x="8525256" y="2834640"/>
+              <a:ext cx="2053742" cy="352044"/>
+            </a:xfrm>
+            <a:prstGeom prst="rect">
+              <a:avLst/>
+            </a:prstGeom>
+            <a:noFill/>
+            <a:ln>
+              <a:noFill/>
+            </a:ln>
+          </p:spPr>
+          <p:txBody>
+            <a:bodyPr wrap="none" lIns="0" tIns="0" rIns="0" bIns="0" anchor="t" anchorCtr="0">
+              <a:spAutoFit/>
+            </a:bodyPr>
+            <a:lstStyle/>
+            <a:p>
+              <a:pPr algn="l"/>
+              <a:r>
+                <a:rPr lang="zh-CN" sz="1800" b="1" dirty="0">
+                  <a:solidFill>
+                    <a:srgbClr val="132A3A"/>
+                  </a:solidFill>
+                  <a:latin typeface="Segoe UI Semibold"/>
+                  <a:ea typeface="Microsoft YaHei"/>
+                  <a:cs typeface="Segoe UI Semibold"/>
+                </a:rPr>
+                <a:t>再让用户决定位置</a:t>
+              </a:r>
+            </a:p>
+          </p:txBody>
+        </p:sp>
+        <p:sp>
+          <p:nvSpPr>
+            <p:cNvPr id="17" name="TextBox 17"/>
+            <p:cNvSpPr txBox="1"/>
+            <p:nvPr/>
+          </p:nvSpPr>
+          <p:spPr>
+            <a:xfrm>
+              <a:off x="8527923" y="3234214"/>
+              <a:ext cx="2759202" cy="249364"/>
+            </a:xfrm>
+            <a:prstGeom prst="rect">
+              <a:avLst/>
+            </a:prstGeom>
+            <a:noFill/>
+            <a:ln>
+              <a:noFill/>
+            </a:ln>
+          </p:spPr>
+          <p:txBody>
+            <a:bodyPr wrap="none" lIns="0" tIns="0" rIns="0" bIns="0" anchor="t" anchorCtr="0">
+              <a:spAutoFit/>
+            </a:bodyPr>
+            <a:lstStyle/>
+            <a:p>
+              <a:pPr algn="l"/>
+              <a:r>
+                <a:rPr lang="zh-CN" sz="1280" dirty="0">
+                  <a:solidFill>
+                    <a:srgbClr val="5A6B7C"/>
+                  </a:solidFill>
+                  <a:latin typeface="Segoe UI"/>
+                  <a:ea typeface="Microsoft YaHei"/>
+                  <a:cs typeface="Segoe UI"/>
+                </a:rPr>
+                <a:t>界面同时给出事实、影响、下一步，</a:t>
+              </a:r>
+            </a:p>
+          </p:txBody>
+        </p:sp>
+        <p:sp>
+          <p:nvSpPr>
+            <p:cNvPr id="18" name="TextBox 18"/>
+            <p:cNvSpPr txBox="1"/>
+            <p:nvPr/>
+          </p:nvSpPr>
+          <p:spPr>
+            <a:xfrm>
+              <a:off x="8527923" y="3500914"/>
+              <a:ext cx="2415921" cy="249364"/>
+            </a:xfrm>
+            <a:prstGeom prst="rect">
+              <a:avLst/>
+            </a:prstGeom>
+            <a:noFill/>
+            <a:ln>
+              <a:noFill/>
+            </a:ln>
+          </p:spPr>
+          <p:txBody>
+            <a:bodyPr wrap="none" lIns="0" tIns="0" rIns="0" bIns="0" anchor="t" anchorCtr="0">
+              <a:spAutoFit/>
+            </a:bodyPr>
+            <a:lstStyle/>
+            <a:p>
+              <a:pPr algn="l"/>
+              <a:r>
+                <a:rPr lang="zh-CN" sz="1280" dirty="0">
+                  <a:solidFill>
+                    <a:srgbClr val="5A6B7C"/>
+                  </a:solidFill>
+                  <a:latin typeface="Segoe UI"/>
+                  <a:ea typeface="Microsoft YaHei"/>
+                  <a:cs typeface="Segoe UI"/>
+                </a:rPr>
+                <a:t>并在安全预览中高亮候选原文。</a:t>
+              </a:r>
+            </a:p>
+          </p:txBody>
+        </p:sp>
+        <p:sp>
+          <p:nvSpPr>
+            <p:cNvPr id="19" name="Rectangle 19"/>
+            <p:cNvSpPr/>
+            <p:nvPr/>
+          </p:nvSpPr>
+          <p:spPr>
+            <a:xfrm>
+              <a:off x="8305800" y="4038600"/>
+              <a:ext cx="3390900" cy="1600200"/>
+            </a:xfrm>
+            <a:prstGeom prst="roundRect">
+              <a:avLst>
+                <a:gd name="adj" fmla="val 3571"/>
+              </a:avLst>
+            </a:prstGeom>
+            <a:solidFill>
+              <a:srgbClr val="FFFFFF"/>
+            </a:solidFill>
+            <a:ln w="19050">
+              <a:solidFill>
+                <a:srgbClr val="CBD5DF"/>
+              </a:solidFill>
+            </a:ln>
+          </p:spPr>
+        </p:sp>
+        <p:pic>
+          <p:nvPicPr>
+            <p:cNvPr id="20" name="Image 20"/>
+            <p:cNvPicPr>
+              <a:picLocks noChangeAspect="1"/>
+            </p:cNvPicPr>
+            <p:nvPr/>
+          </p:nvPicPr>
+          <p:blipFill>
+            <a:blip r:embed="rId3"/>
+            <a:stretch>
+              <a:fillRect/>
+            </a:stretch>
+          </p:blipFill>
+          <p:spPr>
+            <a:xfrm>
+              <a:off x="8404968" y="4133850"/>
+              <a:ext cx="3192564" cy="1514475"/>
+            </a:xfrm>
+            <a:prstGeom prst="rect">
+              <a:avLst/>
+            </a:prstGeom>
+          </p:spPr>
+        </p:pic>
+        <p:sp>
+          <p:nvSpPr>
+            <p:cNvPr id="21" name="Rectangle 21"/>
+            <p:cNvSpPr/>
+            <p:nvPr/>
+          </p:nvSpPr>
+          <p:spPr>
+            <a:xfrm>
+              <a:off x="8439150" y="4191000"/>
+              <a:ext cx="1219200" cy="285750"/>
+            </a:xfrm>
+            <a:prstGeom prst="roundRect">
+              <a:avLst>
+                <a:gd name="adj" fmla="val 20000"/>
+              </a:avLst>
+            </a:prstGeom>
+            <a:solidFill>
+              <a:srgbClr val="132A3A"/>
+            </a:solidFill>
+            <a:ln>
+              <a:noFill/>
+            </a:ln>
+          </p:spPr>
+        </p:sp>
+        <p:sp>
+          <p:nvSpPr>
+            <p:cNvPr id="22" name="TextBox 22"/>
+            <p:cNvSpPr txBox="1"/>
+            <p:nvPr/>
+          </p:nvSpPr>
+          <p:spPr>
+            <a:xfrm>
+              <a:off x="8598160" y="4277678"/>
+              <a:ext cx="901179" cy="205359"/>
+            </a:xfrm>
+            <a:prstGeom prst="rect">
+              <a:avLst/>
+            </a:prstGeom>
+            <a:noFill/>
+            <a:ln>
+              <a:noFill/>
+            </a:ln>
+          </p:spPr>
+          <p:txBody>
+            <a:bodyPr wrap="none" lIns="0" tIns="0" rIns="0" bIns="0" anchor="t" anchorCtr="0">
+              <a:spAutoFit/>
+            </a:bodyPr>
+            <a:lstStyle/>
+            <a:p>
+              <a:pPr algn="ctr"/>
+              <a:r>
+                <a:rPr lang="zh-CN" sz="1050" b="1" dirty="0">
+                  <a:solidFill>
+                    <a:srgbClr val="FFFFFF"/>
+                  </a:solidFill>
+                  <a:latin typeface="Segoe UI Semibold"/>
+                  <a:ea typeface="Microsoft YaHei"/>
+                  <a:cs typeface="Segoe UI Semibold"/>
+                </a:rPr>
+                <a:t>分支动作实景</a:t>
+              </a:r>
+            </a:p>
+          </p:txBody>
+        </p:sp>
+        <p:sp>
+          <p:nvSpPr>
+            <p:cNvPr id="23" name="Rectangle 23"/>
+            <p:cNvSpPr/>
+            <p:nvPr/>
+          </p:nvSpPr>
+          <p:spPr>
+            <a:xfrm>
+              <a:off x="8305800" y="5791200"/>
+              <a:ext cx="3390900" cy="571500"/>
+            </a:xfrm>
+            <a:prstGeom prst="roundRect">
+              <a:avLst>
+                <a:gd name="adj" fmla="val 10000"/>
+              </a:avLst>
+            </a:prstGeom>
+            <a:solidFill>
+              <a:srgbClr val="EDF1F4"/>
+            </a:solidFill>
+            <a:ln>
+              <a:noFill/>
+            </a:ln>
+          </p:spPr>
+        </p:sp>
+        <p:sp>
+          <p:nvSpPr>
+            <p:cNvPr id="24" name="TextBox 24"/>
+            <p:cNvSpPr txBox="1"/>
+            <p:nvPr/>
+          </p:nvSpPr>
+          <p:spPr>
+            <a:xfrm>
+              <a:off x="8527923" y="5901214"/>
+              <a:ext cx="1577490" cy="249364"/>
+            </a:xfrm>
+            <a:prstGeom prst="rect">
+              <a:avLst/>
+            </a:prstGeom>
+            <a:noFill/>
+            <a:ln>
+              <a:noFill/>
+            </a:ln>
+          </p:spPr>
+          <p:txBody>
+            <a:bodyPr wrap="none" lIns="0" tIns="0" rIns="0" bIns="0" anchor="t" anchorCtr="0">
+              <a:spAutoFit/>
+            </a:bodyPr>
+            <a:lstStyle/>
+            <a:p>
+              <a:pPr algn="l"/>
+              <a:r>
+                <a:rPr lang="zh-CN" sz="1280" b="1" dirty="0">
+                  <a:solidFill>
+                    <a:srgbClr val="2E7D32"/>
+                  </a:solidFill>
+                  <a:latin typeface="Segoe UI Semibold"/>
+                  <a:ea typeface="Microsoft YaHei"/>
+                  <a:cs typeface="Segoe UI Semibold"/>
+                </a:rPr>
+                <a:t>只改变目标 Branch</a:t>
+              </a:r>
+            </a:p>
+          </p:txBody>
+        </p:sp>
+        <p:sp>
+          <p:nvSpPr>
+            <p:cNvPr id="25" name="TextBox 25"/>
+            <p:cNvSpPr txBox="1"/>
+            <p:nvPr/>
+          </p:nvSpPr>
+          <p:spPr>
+            <a:xfrm>
+              <a:off x="8529066" y="6135052"/>
+              <a:ext cx="2130933" cy="205359"/>
+            </a:xfrm>
+            <a:prstGeom prst="rect">
+              <a:avLst/>
+            </a:prstGeom>
+            <a:noFill/>
+            <a:ln>
+              <a:noFill/>
+            </a:ln>
+          </p:spPr>
+          <p:txBody>
+            <a:bodyPr wrap="none" lIns="0" tIns="0" rIns="0" bIns="0" anchor="t" anchorCtr="0">
+              <a:spAutoFit/>
+            </a:bodyPr>
+            <a:lstStyle/>
+            <a:p>
+              <a:pPr algn="l"/>
+              <a:r>
+                <a:rPr lang="zh-CN" sz="1050" dirty="0">
+                  <a:solidFill>
+                    <a:srgbClr val="5A6B7C"/>
+                  </a:solidFill>
+                  <a:latin typeface="Segoe UI"/>
+                  <a:ea typeface="Microsoft YaHei"/>
+                  <a:cs typeface="Segoe UI"/>
+                </a:rPr>
+                <a:t>已完成成果和其他分支继续保留。</a:t>
+              </a:r>
+            </a:p>
+          </p:txBody>
+        </p:sp>
+      </p:grpSp>
+      <p:grpSp>
+        <p:nvGrpSpPr>
+          <p:cNvPr id="29" name="Group 29"/>
+          <p:cNvGrpSpPr/>
+          <p:nvPr/>
+        </p:nvGrpSpPr>
+        <p:grpSpPr>
+          <a:xfrm>
+            <a:off x="489966" y="6458902"/>
+            <a:ext cx="11212068" cy="205359"/>
+            <a:chOff x="489966" y="6458902"/>
+            <a:chExt cx="11212068" cy="205359"/>
+          </a:xfrm>
+        </p:grpSpPr>
+        <p:sp>
+          <p:nvSpPr>
+            <p:cNvPr id="27" name="TextBox 27"/>
+            <p:cNvSpPr txBox="1"/>
+            <p:nvPr/>
+          </p:nvSpPr>
+          <p:spPr>
+            <a:xfrm>
+              <a:off x="489966" y="6458902"/>
+              <a:ext cx="5760680" cy="205359"/>
+            </a:xfrm>
+            <a:prstGeom prst="rect">
+              <a:avLst/>
+            </a:prstGeom>
+            <a:noFill/>
+            <a:ln>
+              <a:noFill/>
+            </a:ln>
+          </p:spPr>
+          <p:txBody>
+            <a:bodyPr wrap="none" lIns="0" tIns="0" rIns="0" bIns="0" anchor="t" anchorCtr="0">
+              <a:spAutoFit/>
+            </a:bodyPr>
+            <a:lstStyle/>
+            <a:p>
+              <a:pPr algn="l"/>
+              <a:r>
+                <a:rPr lang="zh-CN" sz="1050" dirty="0">
+                  <a:solidFill>
+                    <a:srgbClr val="7C8A98"/>
+                  </a:solidFill>
+                  <a:latin typeface="Segoe UI"/>
+                  <a:ea typeface="Microsoft YaHei"/>
+                  <a:cs typeface="Segoe UI"/>
+                </a:rPr>
+                <a:t>用户确认的是原文位置，不是替 Agent 为结论背书；来源版本变化会进入 stale 并重新核对</a:t>
+              </a:r>
+            </a:p>
+          </p:txBody>
+        </p:sp>
+        <p:sp>
+          <p:nvSpPr>
+            <p:cNvPr id="28" name="TextBox 28"/>
+            <p:cNvSpPr txBox="1"/>
+            <p:nvPr/>
+          </p:nvSpPr>
+          <p:spPr>
+            <a:xfrm>
+              <a:off x="11217840" y="6458902"/>
+              <a:ext cx="484194" cy="205359"/>
+            </a:xfrm>
+            <a:prstGeom prst="rect">
+              <a:avLst/>
+            </a:prstGeom>
+            <a:noFill/>
+            <a:ln>
+              <a:noFill/>
+            </a:ln>
+          </p:spPr>
+          <p:txBody>
+            <a:bodyPr wrap="none" lIns="0" tIns="0" rIns="0" bIns="0" anchor="t" anchorCtr="0">
+              <a:spAutoFit/>
+            </a:bodyPr>
+            <a:lstStyle/>
+            <a:p>
+              <a:pPr algn="r"/>
+              <a:r>
+                <a:rPr lang="en-US" sz="1050" dirty="0">
+                  <a:solidFill>
+                    <a:srgbClr val="7C8A98"/>
+                  </a:solidFill>
+                  <a:latin typeface="Consolas"/>
+                  <a:ea typeface="Consolas"/>
+                  <a:cs typeface="Consolas"/>
+                </a:rPr>
+                <a:t>19 / 21</a:t>
               </a:r>
             </a:p>
           </p:txBody>
@@ -21989,7 +23916,2803 @@
                   <a:ea typeface="Consolas"/>
                   <a:cs typeface="Consolas"/>
                 </a:rPr>
-                <a:t>02 / 17</a:t>
+                <a:t>02 / 21</a:t>
+              </a:r>
+            </a:p>
+          </p:txBody>
+        </p:sp>
+      </p:grpSp>
+    </p:spTree>
+  </p:cSld>
+  <p:clrMapOvr>
+    <a:masterClrMapping/>
+  </p:clrMapOvr>
+  <p:transition xmlns:p14="http://schemas.microsoft.com/office/powerpoint/2010/main" p14:dur="400">
+    <p:fade/>
+  </p:transition>
+</p:sld>
+</file>
+
+<file path=ppt/slides/slide20.xml><?xml version="1.0" encoding="utf-8"?>
+<p:sld xmlns:a="http://schemas.openxmlformats.org/drawingml/2006/main" xmlns:r="http://schemas.openxmlformats.org/officeDocument/2006/relationships" xmlns:p="http://schemas.openxmlformats.org/presentationml/2006/main">
+  <p:cSld>
+    <p:spTree>
+      <p:nvGrpSpPr>
+        <p:cNvPr id="1" name=""/>
+        <p:cNvGrpSpPr/>
+        <p:nvPr/>
+      </p:nvGrpSpPr>
+      <p:grpSpPr>
+        <a:xfrm>
+          <a:off x="0" y="0"/>
+          <a:ext cx="0" cy="0"/>
+          <a:chOff x="0" y="0"/>
+          <a:chExt cx="0" cy="0"/>
+        </a:xfrm>
+      </p:grpSpPr>
+      <p:grpSp>
+        <p:nvGrpSpPr>
+          <p:cNvPr id="4" name="Group 4"/>
+          <p:cNvGrpSpPr/>
+          <p:nvPr/>
+        </p:nvGrpSpPr>
+        <p:grpSpPr>
+          <a:xfrm>
+            <a:off x="0" y="0"/>
+            <a:ext cx="12192000" cy="6858000"/>
+            <a:chOff x="0" y="0"/>
+            <a:chExt cx="12192000" cy="6858000"/>
+          </a:xfrm>
+        </p:grpSpPr>
+        <p:sp>
+          <p:nvSpPr>
+            <p:cNvPr id="2" name="Rectangle 2"/>
+            <p:cNvSpPr/>
+            <p:nvPr/>
+          </p:nvSpPr>
+          <p:spPr>
+            <a:xfrm>
+              <a:off x="0" y="0"/>
+              <a:ext cx="12192000" cy="6858000"/>
+            </a:xfrm>
+            <a:prstGeom prst="rect">
+              <a:avLst/>
+            </a:prstGeom>
+            <a:solidFill>
+              <a:srgbClr val="F7F8FA"/>
+            </a:solidFill>
+            <a:ln>
+              <a:noFill/>
+            </a:ln>
+          </p:spPr>
+        </p:sp>
+        <p:sp>
+          <p:nvSpPr>
+            <p:cNvPr id="3" name="Freeform 3"/>
+            <p:cNvSpPr/>
+            <p:nvPr/>
+          </p:nvSpPr>
+          <p:spPr>
+            <a:xfrm>
+              <a:off x="495300" y="1066800"/>
+              <a:ext cx="11201400" cy="9525"/>
+            </a:xfrm>
+            <a:custGeom>
+              <a:avLst/>
+              <a:gdLst/>
+              <a:ahLst/>
+              <a:cxnLst/>
+              <a:rect l="l" t="t" r="r" b="b"/>
+              <a:pathLst>
+                <a:path w="11201400" h="9525">
+                  <a:moveTo>
+                    <a:pt x="0" y="0"/>
+                  </a:moveTo>
+                  <a:lnTo>
+                    <a:pt x="11201400" y="0"/>
+                  </a:lnTo>
+                </a:path>
+              </a:pathLst>
+            </a:custGeom>
+            <a:solidFill>
+              <a:srgbClr val="000000"/>
+            </a:solidFill>
+            <a:ln w="19050">
+              <a:solidFill>
+                <a:srgbClr val="CBD5DF"/>
+              </a:solidFill>
+            </a:ln>
+          </p:spPr>
+        </p:sp>
+      </p:grpSp>
+      <p:grpSp>
+        <p:nvGrpSpPr>
+          <p:cNvPr id="7" name="Group 7"/>
+          <p:cNvGrpSpPr/>
+          <p:nvPr/>
+        </p:nvGrpSpPr>
+        <p:grpSpPr>
+          <a:xfrm>
+            <a:off x="477774" y="370522"/>
+            <a:ext cx="9045416" cy="674751"/>
+            <a:chOff x="477774" y="370522"/>
+            <a:chExt cx="9045416" cy="674751"/>
+          </a:xfrm>
+        </p:grpSpPr>
+        <p:sp>
+          <p:nvSpPr>
+            <p:cNvPr id="5" name="TextBox 5"/>
+            <p:cNvSpPr txBox="1"/>
+            <p:nvPr/>
+          </p:nvSpPr>
+          <p:spPr>
+            <a:xfrm>
+              <a:off x="477774" y="370522"/>
+              <a:ext cx="1912547" cy="674751"/>
+            </a:xfrm>
+            <a:prstGeom prst="rect">
+              <a:avLst/>
+            </a:prstGeom>
+            <a:noFill/>
+            <a:ln>
+              <a:noFill/>
+            </a:ln>
+          </p:spPr>
+          <p:txBody>
+            <a:bodyPr wrap="none" lIns="0" tIns="0" rIns="0" bIns="0" anchor="t" anchorCtr="0">
+              <a:spAutoFit/>
+            </a:bodyPr>
+            <a:lstStyle/>
+            <a:p>
+              <a:pPr algn="l"/>
+              <a:r>
+                <a:rPr lang="zh-CN" sz="3450" b="1" dirty="0">
+                  <a:solidFill>
+                    <a:srgbClr val="132A3A"/>
+                  </a:solidFill>
+                  <a:latin typeface="Segoe UI Semibold"/>
+                  <a:ea typeface="Microsoft YaHei"/>
+                  <a:cs typeface="Segoe UI Semibold"/>
+                </a:rPr>
+                <a:t>实操 3：</a:t>
+              </a:r>
+            </a:p>
+          </p:txBody>
+        </p:sp>
+        <p:sp>
+          <p:nvSpPr>
+            <p:cNvPr id="6" name="TextBox 6"/>
+            <p:cNvSpPr txBox="1"/>
+            <p:nvPr/>
+          </p:nvSpPr>
+          <p:spPr>
+            <a:xfrm>
+              <a:off x="2173224" y="370522"/>
+              <a:ext cx="7349966" cy="674751"/>
+            </a:xfrm>
+            <a:prstGeom prst="rect">
+              <a:avLst/>
+            </a:prstGeom>
+            <a:noFill/>
+            <a:ln>
+              <a:noFill/>
+            </a:ln>
+          </p:spPr>
+          <p:txBody>
+            <a:bodyPr wrap="none" lIns="0" tIns="0" rIns="0" bIns="0" anchor="t" anchorCtr="0">
+              <a:spAutoFit/>
+            </a:bodyPr>
+            <a:lstStyle/>
+            <a:p>
+              <a:pPr algn="l"/>
+              <a:r>
+                <a:rPr lang="zh-CN" sz="3450" b="1" dirty="0">
+                  <a:solidFill>
+                    <a:srgbClr val="132A3A"/>
+                  </a:solidFill>
+                  <a:latin typeface="Segoe UI Semibold"/>
+                  <a:ea typeface="Microsoft YaHei"/>
+                  <a:cs typeface="Segoe UI Semibold"/>
+                </a:rPr>
+                <a:t>成果可检查，模型说明不覆盖事实</a:t>
+              </a:r>
+            </a:p>
+          </p:txBody>
+        </p:sp>
+      </p:grpSp>
+      <p:grpSp>
+        <p:nvGrpSpPr>
+          <p:cNvPr id="18" name="Group 18"/>
+          <p:cNvGrpSpPr/>
+          <p:nvPr/>
+        </p:nvGrpSpPr>
+        <p:grpSpPr>
+          <a:xfrm>
+            <a:off x="495300" y="1333500"/>
+            <a:ext cx="5219700" cy="4838700"/>
+            <a:chOff x="495300" y="1333500"/>
+            <a:chExt cx="5219700" cy="4838700"/>
+          </a:xfrm>
+        </p:grpSpPr>
+        <p:sp>
+          <p:nvSpPr>
+            <p:cNvPr id="8" name="Rectangle 8"/>
+            <p:cNvSpPr/>
+            <p:nvPr/>
+          </p:nvSpPr>
+          <p:spPr>
+            <a:xfrm>
+              <a:off x="495300" y="1333500"/>
+              <a:ext cx="5219700" cy="4838700"/>
+            </a:xfrm>
+            <a:prstGeom prst="roundRect">
+              <a:avLst>
+                <a:gd name="adj" fmla="val 1181"/>
+              </a:avLst>
+            </a:prstGeom>
+            <a:solidFill>
+              <a:srgbClr val="FFFFFF"/>
+            </a:solidFill>
+            <a:ln w="19050">
+              <a:solidFill>
+                <a:srgbClr val="2E7D32"/>
+              </a:solidFill>
+            </a:ln>
+          </p:spPr>
+        </p:sp>
+        <p:sp>
+          <p:nvSpPr>
+            <p:cNvPr id="9" name="TextBox 9"/>
+            <p:cNvSpPr txBox="1"/>
+            <p:nvPr/>
+          </p:nvSpPr>
+          <p:spPr>
+            <a:xfrm>
+              <a:off x="714756" y="1501140"/>
+              <a:ext cx="2814157" cy="352044"/>
+            </a:xfrm>
+            <a:prstGeom prst="rect">
+              <a:avLst/>
+            </a:prstGeom>
+            <a:noFill/>
+            <a:ln>
+              <a:noFill/>
+            </a:ln>
+          </p:spPr>
+          <p:txBody>
+            <a:bodyPr wrap="none" lIns="0" tIns="0" rIns="0" bIns="0" anchor="t" anchorCtr="0">
+              <a:spAutoFit/>
+            </a:bodyPr>
+            <a:lstStyle/>
+            <a:p>
+              <a:pPr algn="l"/>
+              <a:r>
+                <a:rPr lang="zh-CN" sz="1800" b="1" dirty="0">
+                  <a:solidFill>
+                    <a:srgbClr val="132A3A"/>
+                  </a:solidFill>
+                  <a:latin typeface="Segoe UI Semibold"/>
+                  <a:ea typeface="Microsoft YaHei"/>
+                  <a:cs typeface="Segoe UI Semibold"/>
+                </a:rPr>
+                <a:t>A. 成果与业务效果分层</a:t>
+              </a:r>
+            </a:p>
+          </p:txBody>
+        </p:sp>
+        <p:pic>
+          <p:nvPicPr>
+            <p:cNvPr id="10" name="Image 10"/>
+            <p:cNvPicPr>
+              <a:picLocks noChangeAspect="1"/>
+            </p:cNvPicPr>
+            <p:nvPr/>
+          </p:nvPicPr>
+          <p:blipFill>
+            <a:blip r:embed="rId2"/>
+            <a:stretch>
+              <a:fillRect/>
+            </a:stretch>
+          </p:blipFill>
+          <p:spPr>
+            <a:xfrm>
+              <a:off x="628650" y="1869281"/>
+              <a:ext cx="4953000" cy="2786062"/>
+            </a:xfrm>
+            <a:prstGeom prst="rect">
+              <a:avLst/>
+            </a:prstGeom>
+          </p:spPr>
+        </p:pic>
+        <p:sp>
+          <p:nvSpPr>
+            <p:cNvPr id="11" name="Rectangle 11"/>
+            <p:cNvSpPr/>
+            <p:nvPr/>
+          </p:nvSpPr>
+          <p:spPr>
+            <a:xfrm>
+              <a:off x="723900" y="4857750"/>
+              <a:ext cx="4762500" cy="1104900"/>
+            </a:xfrm>
+            <a:prstGeom prst="roundRect">
+              <a:avLst>
+                <a:gd name="adj" fmla="val 5172"/>
+              </a:avLst>
+            </a:prstGeom>
+            <a:solidFill>
+              <a:srgbClr val="EDF1F4"/>
+            </a:solidFill>
+            <a:ln>
+              <a:noFill/>
+            </a:ln>
+          </p:spPr>
+        </p:sp>
+        <p:sp>
+          <p:nvSpPr>
+            <p:cNvPr id="12" name="Ellipse 12"/>
+            <p:cNvSpPr/>
+            <p:nvPr/>
+          </p:nvSpPr>
+          <p:spPr>
+            <a:xfrm>
+              <a:off x="857250" y="5048250"/>
+              <a:ext cx="190500" cy="190500"/>
+            </a:xfrm>
+            <a:prstGeom prst="ellipse">
+              <a:avLst/>
+            </a:prstGeom>
+            <a:solidFill>
+              <a:srgbClr val="2E7D32"/>
+            </a:solidFill>
+            <a:ln>
+              <a:noFill/>
+            </a:ln>
+          </p:spPr>
+        </p:sp>
+        <p:sp>
+          <p:nvSpPr>
+            <p:cNvPr id="13" name="TextBox 13"/>
+            <p:cNvSpPr txBox="1"/>
+            <p:nvPr/>
+          </p:nvSpPr>
+          <p:spPr>
+            <a:xfrm>
+              <a:off x="1155573" y="5063014"/>
+              <a:ext cx="3204496" cy="249364"/>
+            </a:xfrm>
+            <a:prstGeom prst="rect">
+              <a:avLst/>
+            </a:prstGeom>
+            <a:noFill/>
+            <a:ln>
+              <a:noFill/>
+            </a:ln>
+          </p:spPr>
+          <p:txBody>
+            <a:bodyPr wrap="none" lIns="0" tIns="0" rIns="0" bIns="0" anchor="t" anchorCtr="0">
+              <a:spAutoFit/>
+            </a:bodyPr>
+            <a:lstStyle/>
+            <a:p>
+              <a:pPr algn="l"/>
+              <a:r>
+                <a:rPr lang="zh-CN" sz="1280" dirty="0">
+                  <a:solidFill>
+                    <a:srgbClr val="1B2733"/>
+                  </a:solidFill>
+                  <a:latin typeface="Segoe UI"/>
+                  <a:ea typeface="Microsoft YaHei"/>
+                  <a:cs typeface="Segoe UI"/>
+                </a:rPr>
+                <a:t>真实文件写入隔离 Run 工作区，可下载。</a:t>
+              </a:r>
+            </a:p>
+          </p:txBody>
+        </p:sp>
+        <p:sp>
+          <p:nvSpPr>
+            <p:cNvPr id="14" name="Ellipse 14"/>
+            <p:cNvSpPr/>
+            <p:nvPr/>
+          </p:nvSpPr>
+          <p:spPr>
+            <a:xfrm>
+              <a:off x="857250" y="5381625"/>
+              <a:ext cx="190500" cy="190500"/>
+            </a:xfrm>
+            <a:prstGeom prst="ellipse">
+              <a:avLst/>
+            </a:prstGeom>
+            <a:solidFill>
+              <a:srgbClr val="2E7D32"/>
+            </a:solidFill>
+            <a:ln>
+              <a:noFill/>
+            </a:ln>
+          </p:spPr>
+        </p:sp>
+        <p:sp>
+          <p:nvSpPr>
+            <p:cNvPr id="15" name="TextBox 15"/>
+            <p:cNvSpPr txBox="1"/>
+            <p:nvPr/>
+          </p:nvSpPr>
+          <p:spPr>
+            <a:xfrm>
+              <a:off x="1155573" y="5396389"/>
+              <a:ext cx="3389090" cy="249364"/>
+            </a:xfrm>
+            <a:prstGeom prst="rect">
+              <a:avLst/>
+            </a:prstGeom>
+            <a:noFill/>
+            <a:ln>
+              <a:noFill/>
+            </a:ln>
+          </p:spPr>
+          <p:txBody>
+            <a:bodyPr wrap="none" lIns="0" tIns="0" rIns="0" bIns="0" anchor="t" anchorCtr="0">
+              <a:spAutoFit/>
+            </a:bodyPr>
+            <a:lstStyle/>
+            <a:p>
+              <a:pPr algn="l"/>
+              <a:r>
+                <a:rPr lang="zh-CN" sz="1280" dirty="0">
+                  <a:solidFill>
+                    <a:srgbClr val="1B2733"/>
+                  </a:solidFill>
+                  <a:latin typeface="Segoe UI"/>
+                  <a:ea typeface="Microsoft YaHei"/>
+                  <a:cs typeface="Segoe UI"/>
+                </a:rPr>
+                <a:t>具名确定性检查与 EffectReceipt 可追溯。</a:t>
+              </a:r>
+            </a:p>
+          </p:txBody>
+        </p:sp>
+        <p:sp>
+          <p:nvSpPr>
+            <p:cNvPr id="16" name="Ellipse 16"/>
+            <p:cNvSpPr/>
+            <p:nvPr/>
+          </p:nvSpPr>
+          <p:spPr>
+            <a:xfrm>
+              <a:off x="857250" y="5715000"/>
+              <a:ext cx="190500" cy="190500"/>
+            </a:xfrm>
+            <a:prstGeom prst="ellipse">
+              <a:avLst/>
+            </a:prstGeom>
+            <a:solidFill>
+              <a:srgbClr val="D97706"/>
+            </a:solidFill>
+            <a:ln>
+              <a:noFill/>
+            </a:ln>
+          </p:spPr>
+        </p:sp>
+        <p:sp>
+          <p:nvSpPr>
+            <p:cNvPr id="17" name="TextBox 17"/>
+            <p:cNvSpPr txBox="1"/>
+            <p:nvPr/>
+          </p:nvSpPr>
+          <p:spPr>
+            <a:xfrm>
+              <a:off x="1155573" y="5729764"/>
+              <a:ext cx="3274124" cy="249364"/>
+            </a:xfrm>
+            <a:prstGeom prst="rect">
+              <a:avLst/>
+            </a:prstGeom>
+            <a:noFill/>
+            <a:ln>
+              <a:noFill/>
+            </a:ln>
+          </p:spPr>
+          <p:txBody>
+            <a:bodyPr wrap="none" lIns="0" tIns="0" rIns="0" bIns="0" anchor="t" anchorCtr="0">
+              <a:spAutoFit/>
+            </a:bodyPr>
+            <a:lstStyle/>
+            <a:p>
+              <a:pPr algn="l"/>
+              <a:r>
+                <a:rPr lang="zh-CN" sz="1280" dirty="0">
+                  <a:solidFill>
+                    <a:srgbClr val="1B2733"/>
+                  </a:solidFill>
+                  <a:latin typeface="Segoe UI"/>
+                  <a:ea typeface="Microsoft YaHei"/>
+                  <a:cs typeface="Segoe UI"/>
+                </a:rPr>
+                <a:t>未付款、未核销等动作继续明确为未发生。</a:t>
+              </a:r>
+            </a:p>
+          </p:txBody>
+        </p:sp>
+      </p:grpSp>
+      <p:grpSp>
+        <p:nvGrpSpPr>
+          <p:cNvPr id="24" name="Group 24"/>
+          <p:cNvGrpSpPr/>
+          <p:nvPr/>
+        </p:nvGrpSpPr>
+        <p:grpSpPr>
+          <a:xfrm>
+            <a:off x="5904015" y="1333500"/>
+            <a:ext cx="5792685" cy="4838700"/>
+            <a:chOff x="5904015" y="1333500"/>
+            <a:chExt cx="5792685" cy="4838700"/>
+          </a:xfrm>
+        </p:grpSpPr>
+        <p:sp>
+          <p:nvSpPr>
+            <p:cNvPr id="19" name="Rectangle 19"/>
+            <p:cNvSpPr/>
+            <p:nvPr/>
+          </p:nvSpPr>
+          <p:spPr>
+            <a:xfrm>
+              <a:off x="5981700" y="1333500"/>
+              <a:ext cx="5715000" cy="4838700"/>
+            </a:xfrm>
+            <a:prstGeom prst="roundRect">
+              <a:avLst>
+                <a:gd name="adj" fmla="val 1181"/>
+              </a:avLst>
+            </a:prstGeom>
+            <a:solidFill>
+              <a:srgbClr val="FFFFFF"/>
+            </a:solidFill>
+            <a:ln w="19050">
+              <a:solidFill>
+                <a:srgbClr val="C0362C"/>
+              </a:solidFill>
+            </a:ln>
+          </p:spPr>
+        </p:sp>
+        <p:sp>
+          <p:nvSpPr>
+            <p:cNvPr id="20" name="TextBox 20"/>
+            <p:cNvSpPr txBox="1"/>
+            <p:nvPr/>
+          </p:nvSpPr>
+          <p:spPr>
+            <a:xfrm>
+              <a:off x="6201156" y="1501140"/>
+              <a:ext cx="4158325" cy="352044"/>
+            </a:xfrm>
+            <a:prstGeom prst="rect">
+              <a:avLst/>
+            </a:prstGeom>
+            <a:noFill/>
+            <a:ln>
+              <a:noFill/>
+            </a:ln>
+          </p:spPr>
+          <p:txBody>
+            <a:bodyPr wrap="none" lIns="0" tIns="0" rIns="0" bIns="0" anchor="t" anchorCtr="0">
+              <a:spAutoFit/>
+            </a:bodyPr>
+            <a:lstStyle/>
+            <a:p>
+              <a:pPr algn="l"/>
+              <a:r>
+                <a:rPr lang="zh-CN" sz="1800" b="1" dirty="0">
+                  <a:solidFill>
+                    <a:srgbClr val="132A3A"/>
+                  </a:solidFill>
+                  <a:latin typeface="Segoe UI Semibold"/>
+                  <a:ea typeface="Microsoft YaHei"/>
+                  <a:cs typeface="Segoe UI Semibold"/>
+                </a:rPr>
+                <a:t>B. 模型被调用，不代表说明被采用</a:t>
+              </a:r>
+            </a:p>
+          </p:txBody>
+        </p:sp>
+        <p:pic>
+          <p:nvPicPr>
+            <p:cNvPr id="21" name="Image 21"/>
+            <p:cNvPicPr>
+              <a:picLocks noChangeAspect="1"/>
+            </p:cNvPicPr>
+            <p:nvPr/>
+          </p:nvPicPr>
+          <p:blipFill>
+            <a:blip r:embed="rId3"/>
+            <a:stretch>
+              <a:fillRect/>
+            </a:stretch>
+          </p:blipFill>
+          <p:spPr>
+            <a:xfrm>
+              <a:off x="6115050" y="1866900"/>
+              <a:ext cx="5448300" cy="4162425"/>
+            </a:xfrm>
+            <a:prstGeom prst="rect">
+              <a:avLst/>
+            </a:prstGeom>
+          </p:spPr>
+        </p:pic>
+        <p:sp>
+          <p:nvSpPr>
+            <p:cNvPr id="22" name="Rectangle 22"/>
+            <p:cNvSpPr/>
+            <p:nvPr/>
+          </p:nvSpPr>
+          <p:spPr>
+            <a:xfrm>
+              <a:off x="6229350" y="1962150"/>
+              <a:ext cx="2209800" cy="304800"/>
+            </a:xfrm>
+            <a:prstGeom prst="roundRect">
+              <a:avLst>
+                <a:gd name="adj" fmla="val 18750"/>
+              </a:avLst>
+            </a:prstGeom>
+            <a:solidFill>
+              <a:srgbClr val="C0362C"/>
+            </a:solidFill>
+            <a:ln>
+              <a:noFill/>
+            </a:ln>
+          </p:spPr>
+        </p:sp>
+        <p:sp>
+          <p:nvSpPr>
+            <p:cNvPr id="23" name="TextBox 23"/>
+            <p:cNvSpPr txBox="1"/>
+            <p:nvPr/>
+          </p:nvSpPr>
+          <p:spPr>
+            <a:xfrm>
+              <a:off x="5904015" y="2034064"/>
+              <a:ext cx="2860470" cy="249364"/>
+            </a:xfrm>
+            <a:prstGeom prst="rect">
+              <a:avLst/>
+            </a:prstGeom>
+            <a:noFill/>
+            <a:ln>
+              <a:noFill/>
+            </a:ln>
+          </p:spPr>
+          <p:txBody>
+            <a:bodyPr wrap="none" lIns="0" tIns="0" rIns="0" bIns="0" anchor="t" anchorCtr="0">
+              <a:spAutoFit/>
+            </a:bodyPr>
+            <a:lstStyle/>
+            <a:p>
+              <a:pPr algn="ctr"/>
+              <a:r>
+                <a:rPr lang="en-US" sz="1280" b="1" dirty="0">
+                  <a:solidFill>
+                    <a:srgbClr val="FFFFFF"/>
+                  </a:solidFill>
+                  <a:latin typeface="Consolas"/>
+                  <a:ea typeface="Consolas"/>
+                  <a:cs typeface="Consolas"/>
+                </a:rPr>
+                <a:t>called=true · output_used=false</a:t>
+              </a:r>
+            </a:p>
+          </p:txBody>
+        </p:sp>
+      </p:grpSp>
+      <p:grpSp>
+        <p:nvGrpSpPr>
+          <p:cNvPr id="27" name="Group 27"/>
+          <p:cNvGrpSpPr/>
+          <p:nvPr/>
+        </p:nvGrpSpPr>
+        <p:grpSpPr>
+          <a:xfrm>
+            <a:off x="488823" y="6282214"/>
+            <a:ext cx="7087362" cy="249364"/>
+            <a:chOff x="488823" y="6282214"/>
+            <a:chExt cx="7087362" cy="249364"/>
+          </a:xfrm>
+        </p:grpSpPr>
+        <p:sp>
+          <p:nvSpPr>
+            <p:cNvPr id="25" name="TextBox 25"/>
+            <p:cNvSpPr txBox="1"/>
+            <p:nvPr/>
+          </p:nvSpPr>
+          <p:spPr>
+            <a:xfrm>
+              <a:off x="488823" y="6282214"/>
+              <a:ext cx="914067" cy="249364"/>
+            </a:xfrm>
+            <a:prstGeom prst="rect">
+              <a:avLst/>
+            </a:prstGeom>
+            <a:noFill/>
+            <a:ln>
+              <a:noFill/>
+            </a:ln>
+          </p:spPr>
+          <p:txBody>
+            <a:bodyPr wrap="none" lIns="0" tIns="0" rIns="0" bIns="0" anchor="t" anchorCtr="0">
+              <a:spAutoFit/>
+            </a:bodyPr>
+            <a:lstStyle/>
+            <a:p>
+              <a:pPr algn="l"/>
+              <a:r>
+                <a:rPr lang="zh-CN" sz="1280" b="1" dirty="0">
+                  <a:solidFill>
+                    <a:srgbClr val="B54708"/>
+                  </a:solidFill>
+                  <a:latin typeface="Segoe UI Semibold"/>
+                  <a:ea typeface="Microsoft YaHei"/>
+                  <a:cs typeface="Segoe UI Semibold"/>
+                </a:rPr>
+                <a:t>当前边界：</a:t>
+              </a:r>
+            </a:p>
+          </p:txBody>
+        </p:sp>
+        <p:sp>
+          <p:nvSpPr>
+            <p:cNvPr id="26" name="TextBox 26"/>
+            <p:cNvSpPr txBox="1"/>
+            <p:nvPr/>
+          </p:nvSpPr>
+          <p:spPr>
+            <a:xfrm>
+              <a:off x="1384173" y="6282214"/>
+              <a:ext cx="6192012" cy="249364"/>
+            </a:xfrm>
+            <a:prstGeom prst="rect">
+              <a:avLst/>
+            </a:prstGeom>
+            <a:noFill/>
+            <a:ln>
+              <a:noFill/>
+            </a:ln>
+          </p:spPr>
+          <p:txBody>
+            <a:bodyPr wrap="none" lIns="0" tIns="0" rIns="0" bIns="0" anchor="t" anchorCtr="0">
+              <a:spAutoFit/>
+            </a:bodyPr>
+            <a:lstStyle/>
+            <a:p>
+              <a:pPr algn="l"/>
+              <a:r>
+                <a:rPr lang="zh-CN" sz="1280" dirty="0">
+                  <a:solidFill>
+                    <a:srgbClr val="5A6B7C"/>
+                  </a:solidFill>
+                  <a:latin typeface="Segoe UI"/>
+                  <a:ea typeface="Microsoft YaHei"/>
+                  <a:cs typeface="Segoe UI"/>
+                </a:rPr>
+                <a:t>固定检查证明特定字段与效果，不是通用语义真值证明器；前台仍要求人工复核。</a:t>
+              </a:r>
+            </a:p>
+          </p:txBody>
+        </p:sp>
+      </p:grpSp>
+      <p:grpSp>
+        <p:nvGrpSpPr>
+          <p:cNvPr id="30" name="Group 30"/>
+          <p:cNvGrpSpPr/>
+          <p:nvPr/>
+        </p:nvGrpSpPr>
+        <p:grpSpPr>
+          <a:xfrm>
+            <a:off x="489966" y="6592252"/>
+            <a:ext cx="11212068" cy="205359"/>
+            <a:chOff x="489966" y="6592252"/>
+            <a:chExt cx="11212068" cy="205359"/>
+          </a:xfrm>
+        </p:grpSpPr>
+        <p:sp>
+          <p:nvSpPr>
+            <p:cNvPr id="28" name="TextBox 28"/>
+            <p:cNvSpPr txBox="1"/>
+            <p:nvPr/>
+          </p:nvSpPr>
+          <p:spPr>
+            <a:xfrm>
+              <a:off x="489966" y="6592252"/>
+              <a:ext cx="4675251" cy="205359"/>
+            </a:xfrm>
+            <a:prstGeom prst="rect">
+              <a:avLst/>
+            </a:prstGeom>
+            <a:noFill/>
+            <a:ln>
+              <a:noFill/>
+            </a:ln>
+          </p:spPr>
+          <p:txBody>
+            <a:bodyPr wrap="none" lIns="0" tIns="0" rIns="0" bIns="0" anchor="t" anchorCtr="0">
+              <a:spAutoFit/>
+            </a:bodyPr>
+            <a:lstStyle/>
+            <a:p>
+              <a:pPr algn="l"/>
+              <a:r>
+                <a:rPr lang="zh-CN" sz="1050" dirty="0">
+                  <a:solidFill>
+                    <a:srgbClr val="7C8A98"/>
+                  </a:solidFill>
+                  <a:latin typeface="Segoe UI"/>
+                  <a:ea typeface="Microsoft YaHei"/>
+                  <a:cs typeface="Segoe UI"/>
+                </a:rPr>
+                <a:t>交互变化：先展示可用成果与检查回执，再解释模型说明是否采用及其原因</a:t>
+              </a:r>
+            </a:p>
+          </p:txBody>
+        </p:sp>
+        <p:sp>
+          <p:nvSpPr>
+            <p:cNvPr id="29" name="TextBox 29"/>
+            <p:cNvSpPr txBox="1"/>
+            <p:nvPr/>
+          </p:nvSpPr>
+          <p:spPr>
+            <a:xfrm>
+              <a:off x="11217840" y="6592252"/>
+              <a:ext cx="484194" cy="205359"/>
+            </a:xfrm>
+            <a:prstGeom prst="rect">
+              <a:avLst/>
+            </a:prstGeom>
+            <a:noFill/>
+            <a:ln>
+              <a:noFill/>
+            </a:ln>
+          </p:spPr>
+          <p:txBody>
+            <a:bodyPr wrap="none" lIns="0" tIns="0" rIns="0" bIns="0" anchor="t" anchorCtr="0">
+              <a:spAutoFit/>
+            </a:bodyPr>
+            <a:lstStyle/>
+            <a:p>
+              <a:pPr algn="r"/>
+              <a:r>
+                <a:rPr lang="en-US" sz="1050" dirty="0">
+                  <a:solidFill>
+                    <a:srgbClr val="7C8A98"/>
+                  </a:solidFill>
+                  <a:latin typeface="Consolas"/>
+                  <a:ea typeface="Consolas"/>
+                  <a:cs typeface="Consolas"/>
+                </a:rPr>
+                <a:t>20 / 21</a:t>
+              </a:r>
+            </a:p>
+          </p:txBody>
+        </p:sp>
+      </p:grpSp>
+    </p:spTree>
+  </p:cSld>
+  <p:clrMapOvr>
+    <a:masterClrMapping/>
+  </p:clrMapOvr>
+  <p:transition xmlns:p14="http://schemas.microsoft.com/office/powerpoint/2010/main" p14:dur="400">
+    <p:fade/>
+  </p:transition>
+</p:sld>
+</file>
+
+<file path=ppt/slides/slide21.xml><?xml version="1.0" encoding="utf-8"?>
+<p:sld xmlns:a="http://schemas.openxmlformats.org/drawingml/2006/main" xmlns:r="http://schemas.openxmlformats.org/officeDocument/2006/relationships" xmlns:p="http://schemas.openxmlformats.org/presentationml/2006/main">
+  <p:cSld>
+    <p:spTree>
+      <p:nvGrpSpPr>
+        <p:cNvPr id="1" name=""/>
+        <p:cNvGrpSpPr/>
+        <p:nvPr/>
+      </p:nvGrpSpPr>
+      <p:grpSpPr>
+        <a:xfrm>
+          <a:off x="0" y="0"/>
+          <a:ext cx="0" cy="0"/>
+          <a:chOff x="0" y="0"/>
+          <a:chExt cx="0" cy="0"/>
+        </a:xfrm>
+      </p:grpSpPr>
+      <p:grpSp>
+        <p:nvGrpSpPr>
+          <p:cNvPr id="4" name="Group 4"/>
+          <p:cNvGrpSpPr/>
+          <p:nvPr/>
+        </p:nvGrpSpPr>
+        <p:grpSpPr>
+          <a:xfrm>
+            <a:off x="0" y="0"/>
+            <a:ext cx="12192000" cy="6858000"/>
+            <a:chOff x="0" y="0"/>
+            <a:chExt cx="12192000" cy="6858000"/>
+          </a:xfrm>
+        </p:grpSpPr>
+        <p:sp>
+          <p:nvSpPr>
+            <p:cNvPr id="2" name="Rectangle 2"/>
+            <p:cNvSpPr/>
+            <p:nvPr/>
+          </p:nvSpPr>
+          <p:spPr>
+            <a:xfrm>
+              <a:off x="0" y="0"/>
+              <a:ext cx="12192000" cy="6858000"/>
+            </a:xfrm>
+            <a:prstGeom prst="rect">
+              <a:avLst/>
+            </a:prstGeom>
+            <a:solidFill>
+              <a:srgbClr val="F7F8FA"/>
+            </a:solidFill>
+            <a:ln>
+              <a:noFill/>
+            </a:ln>
+          </p:spPr>
+        </p:sp>
+        <p:sp>
+          <p:nvSpPr>
+            <p:cNvPr id="3" name="Rectangle 3"/>
+            <p:cNvSpPr/>
+            <p:nvPr/>
+          </p:nvSpPr>
+          <p:spPr>
+            <a:xfrm>
+              <a:off x="0" y="0"/>
+              <a:ext cx="171450" cy="6858000"/>
+            </a:xfrm>
+            <a:prstGeom prst="rect">
+              <a:avLst/>
+            </a:prstGeom>
+            <a:solidFill>
+              <a:srgbClr val="1769E0"/>
+            </a:solidFill>
+            <a:ln>
+              <a:noFill/>
+            </a:ln>
+          </p:spPr>
+        </p:sp>
+      </p:grpSp>
+      <p:grpSp>
+        <p:nvGrpSpPr>
+          <p:cNvPr id="7" name="Group 7"/>
+          <p:cNvGrpSpPr/>
+          <p:nvPr/>
+        </p:nvGrpSpPr>
+        <p:grpSpPr>
+          <a:xfrm>
+            <a:off x="477774" y="408622"/>
+            <a:ext cx="8983630" cy="949262"/>
+            <a:chOff x="477774" y="408622"/>
+            <a:chExt cx="8983630" cy="949262"/>
+          </a:xfrm>
+        </p:grpSpPr>
+        <p:sp>
+          <p:nvSpPr>
+            <p:cNvPr id="5" name="TextBox 5"/>
+            <p:cNvSpPr txBox="1"/>
+            <p:nvPr/>
+          </p:nvSpPr>
+          <p:spPr>
+            <a:xfrm>
+              <a:off x="477774" y="408622"/>
+              <a:ext cx="8983630" cy="674751"/>
+            </a:xfrm>
+            <a:prstGeom prst="rect">
+              <a:avLst/>
+            </a:prstGeom>
+            <a:noFill/>
+            <a:ln>
+              <a:noFill/>
+            </a:ln>
+          </p:spPr>
+          <p:txBody>
+            <a:bodyPr wrap="none" lIns="0" tIns="0" rIns="0" bIns="0" anchor="t" anchorCtr="0">
+              <a:spAutoFit/>
+            </a:bodyPr>
+            <a:lstStyle/>
+            <a:p>
+              <a:pPr algn="l"/>
+              <a:r>
+                <a:rPr lang="zh-CN" sz="3450" b="1" dirty="0">
+                  <a:solidFill>
+                    <a:srgbClr val="132A3A"/>
+                  </a:solidFill>
+                  <a:latin typeface="Segoe UI Semibold"/>
+                  <a:ea typeface="Microsoft YaHei"/>
+                  <a:cs typeface="Segoe UI Semibold"/>
+                </a:rPr>
+                <a:t>下一阶段：把 07-16 方向变成可证伪证据</a:t>
+              </a:r>
+            </a:p>
+          </p:txBody>
+        </p:sp>
+        <p:sp>
+          <p:nvSpPr>
+            <p:cNvPr id="6" name="TextBox 6"/>
+            <p:cNvSpPr txBox="1"/>
+            <p:nvPr/>
+          </p:nvSpPr>
+          <p:spPr>
+            <a:xfrm>
+              <a:off x="486156" y="1005840"/>
+              <a:ext cx="5833872" cy="352044"/>
+            </a:xfrm>
+            <a:prstGeom prst="rect">
+              <a:avLst/>
+            </a:prstGeom>
+            <a:noFill/>
+            <a:ln>
+              <a:noFill/>
+            </a:ln>
+          </p:spPr>
+          <p:txBody>
+            <a:bodyPr wrap="none" lIns="0" tIns="0" rIns="0" bIns="0" anchor="t" anchorCtr="0">
+              <a:spAutoFit/>
+            </a:bodyPr>
+            <a:lstStyle/>
+            <a:p>
+              <a:pPr algn="l"/>
+              <a:r>
+                <a:rPr lang="zh-CN" sz="1800" dirty="0">
+                  <a:solidFill>
+                    <a:srgbClr val="5A6B7C"/>
+                  </a:solidFill>
+                  <a:latin typeface="Segoe UI"/>
+                  <a:ea typeface="Microsoft YaHei"/>
+                  <a:cs typeface="Segoe UI"/>
+                </a:rPr>
+                <a:t>先闭合可信失败与恢复，再扩大业务效果和外部动作。</a:t>
+              </a:r>
+            </a:p>
+          </p:txBody>
+        </p:sp>
+      </p:grpSp>
+      <p:grpSp>
+        <p:nvGrpSpPr>
+          <p:cNvPr id="43" name="Group 43"/>
+          <p:cNvGrpSpPr/>
+          <p:nvPr/>
+        </p:nvGrpSpPr>
+        <p:grpSpPr>
+          <a:xfrm>
+            <a:off x="495300" y="1962150"/>
+            <a:ext cx="11201400" cy="2286000"/>
+            <a:chOff x="495300" y="1962150"/>
+            <a:chExt cx="11201400" cy="2286000"/>
+          </a:xfrm>
+        </p:grpSpPr>
+        <p:sp>
+          <p:nvSpPr>
+            <p:cNvPr id="8" name="Freeform 8"/>
+            <p:cNvSpPr/>
+            <p:nvPr/>
+          </p:nvSpPr>
+          <p:spPr>
+            <a:xfrm>
+              <a:off x="495300" y="1962150"/>
+              <a:ext cx="2114550" cy="2286000"/>
+            </a:xfrm>
+            <a:custGeom>
+              <a:avLst/>
+              <a:gdLst/>
+              <a:ahLst/>
+              <a:cxnLst/>
+              <a:rect l="l" t="t" r="r" b="b"/>
+              <a:pathLst>
+                <a:path w="2114550" h="2286000">
+                  <a:moveTo>
+                    <a:pt x="0" y="0"/>
+                  </a:moveTo>
+                  <a:lnTo>
+                    <a:pt x="1828800" y="0"/>
+                  </a:lnTo>
+                  <a:lnTo>
+                    <a:pt x="2114550" y="1143000"/>
+                  </a:lnTo>
+                  <a:lnTo>
+                    <a:pt x="1828800" y="2286000"/>
+                  </a:lnTo>
+                  <a:lnTo>
+                    <a:pt x="0" y="2286000"/>
+                  </a:lnTo>
+                  <a:close/>
+                </a:path>
+              </a:pathLst>
+            </a:custGeom>
+            <a:solidFill>
+              <a:srgbClr val="EDF1F4"/>
+            </a:solidFill>
+            <a:ln w="19050">
+              <a:solidFill>
+                <a:srgbClr val="1769E0"/>
+              </a:solidFill>
+            </a:ln>
+          </p:spPr>
+        </p:sp>
+        <p:sp>
+          <p:nvSpPr>
+            <p:cNvPr id="9" name="TextBox 9"/>
+            <p:cNvSpPr txBox="1"/>
+            <p:nvPr/>
+          </p:nvSpPr>
+          <p:spPr>
+            <a:xfrm>
+              <a:off x="736473" y="2262664"/>
+              <a:ext cx="211199" cy="249364"/>
+            </a:xfrm>
+            <a:prstGeom prst="rect">
+              <a:avLst/>
+            </a:prstGeom>
+            <a:noFill/>
+            <a:ln>
+              <a:noFill/>
+            </a:ln>
+          </p:spPr>
+          <p:txBody>
+            <a:bodyPr wrap="none" lIns="0" tIns="0" rIns="0" bIns="0" anchor="t" anchorCtr="0">
+              <a:spAutoFit/>
+            </a:bodyPr>
+            <a:lstStyle/>
+            <a:p>
+              <a:pPr algn="l"/>
+              <a:r>
+                <a:rPr lang="en-US" sz="1280" b="1" dirty="0">
+                  <a:solidFill>
+                    <a:srgbClr val="1769E0"/>
+                  </a:solidFill>
+                  <a:latin typeface="Consolas"/>
+                  <a:ea typeface="Consolas"/>
+                  <a:cs typeface="Consolas"/>
+                </a:rPr>
+                <a:t>01</a:t>
+              </a:r>
+            </a:p>
+          </p:txBody>
+        </p:sp>
+        <p:sp>
+          <p:nvSpPr>
+            <p:cNvPr id="10" name="TextBox 10"/>
+            <p:cNvSpPr txBox="1"/>
+            <p:nvPr/>
+          </p:nvSpPr>
+          <p:spPr>
+            <a:xfrm>
+              <a:off x="733806" y="2586990"/>
+              <a:ext cx="1595697" cy="352044"/>
+            </a:xfrm>
+            <a:prstGeom prst="rect">
+              <a:avLst/>
+            </a:prstGeom>
+            <a:noFill/>
+            <a:ln>
+              <a:noFill/>
+            </a:ln>
+          </p:spPr>
+          <p:txBody>
+            <a:bodyPr wrap="none" lIns="0" tIns="0" rIns="0" bIns="0" anchor="t" anchorCtr="0">
+              <a:spAutoFit/>
+            </a:bodyPr>
+            <a:lstStyle/>
+            <a:p>
+              <a:pPr algn="l"/>
+              <a:r>
+                <a:rPr lang="zh-CN" sz="1800" b="1" dirty="0">
+                  <a:solidFill>
+                    <a:srgbClr val="132A3A"/>
+                  </a:solidFill>
+                  <a:latin typeface="Segoe UI Semibold"/>
+                  <a:ea typeface="Microsoft YaHei"/>
+                  <a:cs typeface="Segoe UI Semibold"/>
+                </a:rPr>
+                <a:t>原生 Locator</a:t>
+              </a:r>
+            </a:p>
+          </p:txBody>
+        </p:sp>
+        <p:sp>
+          <p:nvSpPr>
+            <p:cNvPr id="11" name="TextBox 11"/>
+            <p:cNvSpPr txBox="1"/>
+            <p:nvPr/>
+          </p:nvSpPr>
+          <p:spPr>
+            <a:xfrm>
+              <a:off x="736473" y="3005614"/>
+              <a:ext cx="547954" cy="249364"/>
+            </a:xfrm>
+            <a:prstGeom prst="rect">
+              <a:avLst/>
+            </a:prstGeom>
+            <a:noFill/>
+            <a:ln>
+              <a:noFill/>
+            </a:ln>
+          </p:spPr>
+          <p:txBody>
+            <a:bodyPr wrap="none" lIns="0" tIns="0" rIns="0" bIns="0" anchor="t" anchorCtr="0">
+              <a:spAutoFit/>
+            </a:bodyPr>
+            <a:lstStyle/>
+            <a:p>
+              <a:pPr algn="l"/>
+              <a:r>
+                <a:rPr lang="zh-CN" sz="1280" dirty="0">
+                  <a:solidFill>
+                    <a:srgbClr val="5A6B7C"/>
+                  </a:solidFill>
+                  <a:latin typeface="Segoe UI"/>
+                  <a:ea typeface="Microsoft YaHei"/>
+                  <a:cs typeface="Segoe UI"/>
+                </a:rPr>
+                <a:t>PDF 页</a:t>
+              </a:r>
+            </a:p>
+          </p:txBody>
+        </p:sp>
+        <p:sp>
+          <p:nvSpPr>
+            <p:cNvPr id="12" name="TextBox 12"/>
+            <p:cNvSpPr txBox="1"/>
+            <p:nvPr/>
+          </p:nvSpPr>
+          <p:spPr>
+            <a:xfrm>
+              <a:off x="736473" y="3272314"/>
+              <a:ext cx="527876" cy="249364"/>
+            </a:xfrm>
+            <a:prstGeom prst="rect">
+              <a:avLst/>
+            </a:prstGeom>
+            <a:noFill/>
+            <a:ln>
+              <a:noFill/>
+            </a:ln>
+          </p:spPr>
+          <p:txBody>
+            <a:bodyPr wrap="none" lIns="0" tIns="0" rIns="0" bIns="0" anchor="t" anchorCtr="0">
+              <a:spAutoFit/>
+            </a:bodyPr>
+            <a:lstStyle/>
+            <a:p>
+              <a:pPr algn="l"/>
+              <a:r>
+                <a:rPr lang="zh-CN" sz="1280" dirty="0">
+                  <a:solidFill>
+                    <a:srgbClr val="5A6B7C"/>
+                  </a:solidFill>
+                  <a:latin typeface="Segoe UI"/>
+                  <a:ea typeface="Microsoft YaHei"/>
+                  <a:cs typeface="Segoe UI"/>
+                </a:rPr>
+                <a:t>表格行</a:t>
+              </a:r>
+            </a:p>
+          </p:txBody>
+        </p:sp>
+        <p:sp>
+          <p:nvSpPr>
+            <p:cNvPr id="13" name="TextBox 13"/>
+            <p:cNvSpPr txBox="1"/>
+            <p:nvPr/>
+          </p:nvSpPr>
+          <p:spPr>
+            <a:xfrm>
+              <a:off x="736473" y="3539014"/>
+              <a:ext cx="1394660" cy="249364"/>
+            </a:xfrm>
+            <a:prstGeom prst="rect">
+              <a:avLst/>
+            </a:prstGeom>
+            <a:noFill/>
+            <a:ln>
+              <a:noFill/>
+            </a:ln>
+          </p:spPr>
+          <p:txBody>
+            <a:bodyPr wrap="none" lIns="0" tIns="0" rIns="0" bIns="0" anchor="t" anchorCtr="0">
+              <a:spAutoFit/>
+            </a:bodyPr>
+            <a:lstStyle/>
+            <a:p>
+              <a:pPr algn="l"/>
+              <a:r>
+                <a:rPr lang="zh-CN" sz="1280" dirty="0">
+                  <a:solidFill>
+                    <a:srgbClr val="5A6B7C"/>
+                  </a:solidFill>
+                  <a:latin typeface="Segoe UI"/>
+                  <a:ea typeface="Microsoft YaHei"/>
+                  <a:cs typeface="Segoe UI"/>
+                </a:rPr>
+                <a:t>正文块 + revision</a:t>
+              </a:r>
+            </a:p>
+          </p:txBody>
+        </p:sp>
+        <p:sp>
+          <p:nvSpPr>
+            <p:cNvPr id="14" name="Freeform 14"/>
+            <p:cNvSpPr/>
+            <p:nvPr/>
+          </p:nvSpPr>
+          <p:spPr>
+            <a:xfrm>
+              <a:off x="2609850" y="1962150"/>
+              <a:ext cx="2019300" cy="2286000"/>
+            </a:xfrm>
+            <a:custGeom>
+              <a:avLst/>
+              <a:gdLst/>
+              <a:ahLst/>
+              <a:cxnLst/>
+              <a:rect l="l" t="t" r="r" b="b"/>
+              <a:pathLst>
+                <a:path w="2019300" h="2286000">
+                  <a:moveTo>
+                    <a:pt x="0" y="0"/>
+                  </a:moveTo>
+                  <a:lnTo>
+                    <a:pt x="1733550" y="0"/>
+                  </a:lnTo>
+                  <a:lnTo>
+                    <a:pt x="2019300" y="1143000"/>
+                  </a:lnTo>
+                  <a:lnTo>
+                    <a:pt x="1733550" y="2286000"/>
+                  </a:lnTo>
+                  <a:lnTo>
+                    <a:pt x="0" y="2286000"/>
+                  </a:lnTo>
+                  <a:lnTo>
+                    <a:pt x="285750" y="1143000"/>
+                  </a:lnTo>
+                  <a:close/>
+                </a:path>
+              </a:pathLst>
+            </a:custGeom>
+            <a:solidFill>
+              <a:srgbClr val="FFFFFF"/>
+            </a:solidFill>
+            <a:ln w="19050">
+              <a:solidFill>
+                <a:srgbClr val="1769E0"/>
+              </a:solidFill>
+            </a:ln>
+          </p:spPr>
+        </p:sp>
+        <p:sp>
+          <p:nvSpPr>
+            <p:cNvPr id="15" name="TextBox 15"/>
+            <p:cNvSpPr txBox="1"/>
+            <p:nvPr/>
+          </p:nvSpPr>
+          <p:spPr>
+            <a:xfrm>
+              <a:off x="2984373" y="2262664"/>
+              <a:ext cx="211199" cy="249364"/>
+            </a:xfrm>
+            <a:prstGeom prst="rect">
+              <a:avLst/>
+            </a:prstGeom>
+            <a:noFill/>
+            <a:ln>
+              <a:noFill/>
+            </a:ln>
+          </p:spPr>
+          <p:txBody>
+            <a:bodyPr wrap="none" lIns="0" tIns="0" rIns="0" bIns="0" anchor="t" anchorCtr="0">
+              <a:spAutoFit/>
+            </a:bodyPr>
+            <a:lstStyle/>
+            <a:p>
+              <a:pPr algn="l"/>
+              <a:r>
+                <a:rPr lang="en-US" sz="1280" b="1" dirty="0">
+                  <a:solidFill>
+                    <a:srgbClr val="1769E0"/>
+                  </a:solidFill>
+                  <a:latin typeface="Consolas"/>
+                  <a:ea typeface="Consolas"/>
+                  <a:cs typeface="Consolas"/>
+                </a:rPr>
+                <a:t>02</a:t>
+              </a:r>
+            </a:p>
+          </p:txBody>
+        </p:sp>
+        <p:sp>
+          <p:nvSpPr>
+            <p:cNvPr id="16" name="TextBox 16"/>
+            <p:cNvSpPr txBox="1"/>
+            <p:nvPr/>
+          </p:nvSpPr>
+          <p:spPr>
+            <a:xfrm>
+              <a:off x="2981706" y="2586990"/>
+              <a:ext cx="1290447" cy="352044"/>
+            </a:xfrm>
+            <a:prstGeom prst="rect">
+              <a:avLst/>
+            </a:prstGeom>
+            <a:noFill/>
+            <a:ln>
+              <a:noFill/>
+            </a:ln>
+          </p:spPr>
+          <p:txBody>
+            <a:bodyPr wrap="none" lIns="0" tIns="0" rIns="0" bIns="0" anchor="t" anchorCtr="0">
+              <a:spAutoFit/>
+            </a:bodyPr>
+            <a:lstStyle/>
+            <a:p>
+              <a:pPr algn="l"/>
+              <a:r>
+                <a:rPr lang="zh-CN" sz="1800" b="1" dirty="0">
+                  <a:solidFill>
+                    <a:srgbClr val="132A3A"/>
+                  </a:solidFill>
+                  <a:latin typeface="Segoe UI Semibold"/>
+                  <a:ea typeface="Microsoft YaHei"/>
+                  <a:cs typeface="Segoe UI Semibold"/>
+                </a:rPr>
+                <a:t>携证成果包</a:t>
+              </a:r>
+            </a:p>
+          </p:txBody>
+        </p:sp>
+        <p:sp>
+          <p:nvSpPr>
+            <p:cNvPr id="17" name="TextBox 17"/>
+            <p:cNvSpPr txBox="1"/>
+            <p:nvPr/>
+          </p:nvSpPr>
+          <p:spPr>
+            <a:xfrm>
+              <a:off x="2984373" y="3005614"/>
+              <a:ext cx="730302" cy="249364"/>
+            </a:xfrm>
+            <a:prstGeom prst="rect">
+              <a:avLst/>
+            </a:prstGeom>
+            <a:noFill/>
+            <a:ln>
+              <a:noFill/>
+            </a:ln>
+          </p:spPr>
+          <p:txBody>
+            <a:bodyPr wrap="none" lIns="0" tIns="0" rIns="0" bIns="0" anchor="t" anchorCtr="0">
+              <a:spAutoFit/>
+            </a:bodyPr>
+            <a:lstStyle/>
+            <a:p>
+              <a:pPr algn="l"/>
+              <a:r>
+                <a:rPr lang="en-US" sz="1280" dirty="0">
+                  <a:solidFill>
+                    <a:srgbClr val="5A6B7C"/>
+                  </a:solidFill>
+                  <a:latin typeface="Segoe UI"/>
+                  <a:ea typeface="Segoe UI"/>
+                  <a:cs typeface="Segoe UI"/>
+                </a:rPr>
+                <a:t>Artifact</a:t>
+              </a:r>
+            </a:p>
+          </p:txBody>
+        </p:sp>
+        <p:sp>
+          <p:nvSpPr>
+            <p:cNvPr id="18" name="TextBox 18"/>
+            <p:cNvSpPr txBox="1"/>
+            <p:nvPr/>
+          </p:nvSpPr>
+          <p:spPr>
+            <a:xfrm>
+              <a:off x="2984373" y="3272314"/>
+              <a:ext cx="1207587" cy="249364"/>
+            </a:xfrm>
+            <a:prstGeom prst="rect">
+              <a:avLst/>
+            </a:prstGeom>
+            <a:noFill/>
+            <a:ln>
+              <a:noFill/>
+            </a:ln>
+          </p:spPr>
+          <p:txBody>
+            <a:bodyPr wrap="none" lIns="0" tIns="0" rIns="0" bIns="0" anchor="t" anchorCtr="0">
+              <a:spAutoFit/>
+            </a:bodyPr>
+            <a:lstStyle/>
+            <a:p>
+              <a:pPr algn="l"/>
+              <a:r>
+                <a:rPr lang="en-US" sz="1280" dirty="0">
+                  <a:solidFill>
+                    <a:srgbClr val="5A6B7C"/>
+                  </a:solidFill>
+                  <a:latin typeface="Segoe UI"/>
+                  <a:ea typeface="Segoe UI"/>
+                  <a:cs typeface="Segoe UI"/>
+                </a:rPr>
+                <a:t>EffectReceipt</a:t>
+              </a:r>
+            </a:p>
+          </p:txBody>
+        </p:sp>
+        <p:sp>
+          <p:nvSpPr>
+            <p:cNvPr id="19" name="TextBox 19"/>
+            <p:cNvSpPr txBox="1"/>
+            <p:nvPr/>
+          </p:nvSpPr>
+          <p:spPr>
+            <a:xfrm>
+              <a:off x="2984373" y="3539014"/>
+              <a:ext cx="1497644" cy="249364"/>
+            </a:xfrm>
+            <a:prstGeom prst="rect">
+              <a:avLst/>
+            </a:prstGeom>
+            <a:noFill/>
+            <a:ln>
+              <a:noFill/>
+            </a:ln>
+          </p:spPr>
+          <p:txBody>
+            <a:bodyPr wrap="none" lIns="0" tIns="0" rIns="0" bIns="0" anchor="t" anchorCtr="0">
+              <a:spAutoFit/>
+            </a:bodyPr>
+            <a:lstStyle/>
+            <a:p>
+              <a:pPr algn="l"/>
+              <a:r>
+                <a:rPr lang="zh-CN" sz="1280" dirty="0">
+                  <a:solidFill>
+                    <a:srgbClr val="5A6B7C"/>
+                  </a:solidFill>
+                  <a:latin typeface="Segoe UI"/>
+                  <a:ea typeface="Microsoft YaHei"/>
+                  <a:cs typeface="Segoe UI"/>
+                </a:rPr>
+                <a:t>provenance + 边界</a:t>
+              </a:r>
+            </a:p>
+          </p:txBody>
+        </p:sp>
+        <p:sp>
+          <p:nvSpPr>
+            <p:cNvPr id="20" name="Freeform 20"/>
+            <p:cNvSpPr/>
+            <p:nvPr/>
+          </p:nvSpPr>
+          <p:spPr>
+            <a:xfrm>
+              <a:off x="4629150" y="1962150"/>
+              <a:ext cx="2019300" cy="2286000"/>
+            </a:xfrm>
+            <a:custGeom>
+              <a:avLst/>
+              <a:gdLst/>
+              <a:ahLst/>
+              <a:cxnLst/>
+              <a:rect l="l" t="t" r="r" b="b"/>
+              <a:pathLst>
+                <a:path w="2019300" h="2286000">
+                  <a:moveTo>
+                    <a:pt x="0" y="0"/>
+                  </a:moveTo>
+                  <a:lnTo>
+                    <a:pt x="1733550" y="0"/>
+                  </a:lnTo>
+                  <a:lnTo>
+                    <a:pt x="2019300" y="1143000"/>
+                  </a:lnTo>
+                  <a:lnTo>
+                    <a:pt x="1733550" y="2286000"/>
+                  </a:lnTo>
+                  <a:lnTo>
+                    <a:pt x="0" y="2286000"/>
+                  </a:lnTo>
+                  <a:lnTo>
+                    <a:pt x="285750" y="1143000"/>
+                  </a:lnTo>
+                  <a:close/>
+                </a:path>
+              </a:pathLst>
+            </a:custGeom>
+            <a:solidFill>
+              <a:srgbClr val="EDF1F4"/>
+            </a:solidFill>
+            <a:ln w="19050">
+              <a:solidFill>
+                <a:srgbClr val="1769E0"/>
+              </a:solidFill>
+            </a:ln>
+          </p:spPr>
+        </p:sp>
+        <p:sp>
+          <p:nvSpPr>
+            <p:cNvPr id="21" name="TextBox 21"/>
+            <p:cNvSpPr txBox="1"/>
+            <p:nvPr/>
+          </p:nvSpPr>
+          <p:spPr>
+            <a:xfrm>
+              <a:off x="5003673" y="2262664"/>
+              <a:ext cx="211199" cy="249364"/>
+            </a:xfrm>
+            <a:prstGeom prst="rect">
+              <a:avLst/>
+            </a:prstGeom>
+            <a:noFill/>
+            <a:ln>
+              <a:noFill/>
+            </a:ln>
+          </p:spPr>
+          <p:txBody>
+            <a:bodyPr wrap="none" lIns="0" tIns="0" rIns="0" bIns="0" anchor="t" anchorCtr="0">
+              <a:spAutoFit/>
+            </a:bodyPr>
+            <a:lstStyle/>
+            <a:p>
+              <a:pPr algn="l"/>
+              <a:r>
+                <a:rPr lang="en-US" sz="1280" b="1" dirty="0">
+                  <a:solidFill>
+                    <a:srgbClr val="1769E0"/>
+                  </a:solidFill>
+                  <a:latin typeface="Consolas"/>
+                  <a:ea typeface="Consolas"/>
+                  <a:cs typeface="Consolas"/>
+                </a:rPr>
+                <a:t>03</a:t>
+              </a:r>
+            </a:p>
+          </p:txBody>
+        </p:sp>
+        <p:sp>
+          <p:nvSpPr>
+            <p:cNvPr id="22" name="TextBox 22"/>
+            <p:cNvSpPr txBox="1"/>
+            <p:nvPr/>
+          </p:nvSpPr>
+          <p:spPr>
+            <a:xfrm>
+              <a:off x="5001006" y="2586990"/>
+              <a:ext cx="1606927" cy="352044"/>
+            </a:xfrm>
+            <a:prstGeom prst="rect">
+              <a:avLst/>
+            </a:prstGeom>
+            <a:noFill/>
+            <a:ln>
+              <a:noFill/>
+            </a:ln>
+          </p:spPr>
+          <p:txBody>
+            <a:bodyPr wrap="none" lIns="0" tIns="0" rIns="0" bIns="0" anchor="t" anchorCtr="0">
+              <a:spAutoFit/>
+            </a:bodyPr>
+            <a:lstStyle/>
+            <a:p>
+              <a:pPr algn="l"/>
+              <a:r>
+                <a:rPr lang="zh-CN" sz="1800" b="1" dirty="0">
+                  <a:solidFill>
+                    <a:srgbClr val="132A3A"/>
+                  </a:solidFill>
+                  <a:latin typeface="Segoe UI Semibold"/>
+                  <a:ea typeface="Microsoft YaHei"/>
+                  <a:cs typeface="Segoe UI Semibold"/>
+                </a:rPr>
+                <a:t>业务 Verifier</a:t>
+              </a:r>
+            </a:p>
+          </p:txBody>
+        </p:sp>
+        <p:sp>
+          <p:nvSpPr>
+            <p:cNvPr id="23" name="TextBox 23"/>
+            <p:cNvSpPr txBox="1"/>
+            <p:nvPr/>
+          </p:nvSpPr>
+          <p:spPr>
+            <a:xfrm>
+              <a:off x="5003673" y="3005614"/>
+              <a:ext cx="1042797" cy="249364"/>
+            </a:xfrm>
+            <a:prstGeom prst="rect">
+              <a:avLst/>
+            </a:prstGeom>
+            <a:noFill/>
+            <a:ln>
+              <a:noFill/>
+            </a:ln>
+          </p:spPr>
+          <p:txBody>
+            <a:bodyPr wrap="none" lIns="0" tIns="0" rIns="0" bIns="0" anchor="t" anchorCtr="0">
+              <a:spAutoFit/>
+            </a:bodyPr>
+            <a:lstStyle/>
+            <a:p>
+              <a:pPr algn="l"/>
+              <a:r>
+                <a:rPr lang="zh-CN" sz="1280" dirty="0">
+                  <a:solidFill>
+                    <a:srgbClr val="5A6B7C"/>
+                  </a:solidFill>
+                  <a:latin typeface="Segoe UI"/>
+                  <a:ea typeface="Microsoft YaHei"/>
+                  <a:cs typeface="Segoe UI"/>
+                </a:rPr>
+                <a:t>从固定适配器</a:t>
+              </a:r>
+            </a:p>
+          </p:txBody>
+        </p:sp>
+        <p:sp>
+          <p:nvSpPr>
+            <p:cNvPr id="24" name="TextBox 24"/>
+            <p:cNvSpPr txBox="1"/>
+            <p:nvPr/>
+          </p:nvSpPr>
+          <p:spPr>
+            <a:xfrm>
+              <a:off x="5003673" y="3272314"/>
+              <a:ext cx="1042797" cy="249364"/>
+            </a:xfrm>
+            <a:prstGeom prst="rect">
+              <a:avLst/>
+            </a:prstGeom>
+            <a:noFill/>
+            <a:ln>
+              <a:noFill/>
+            </a:ln>
+          </p:spPr>
+          <p:txBody>
+            <a:bodyPr wrap="none" lIns="0" tIns="0" rIns="0" bIns="0" anchor="t" anchorCtr="0">
+              <a:spAutoFit/>
+            </a:bodyPr>
+            <a:lstStyle/>
+            <a:p>
+              <a:pPr algn="l"/>
+              <a:r>
+                <a:rPr lang="zh-CN" sz="1280" dirty="0">
+                  <a:solidFill>
+                    <a:srgbClr val="5A6B7C"/>
+                  </a:solidFill>
+                  <a:latin typeface="Segoe UI"/>
+                  <a:ea typeface="Microsoft YaHei"/>
+                  <a:cs typeface="Segoe UI"/>
+                </a:rPr>
+                <a:t>扩展到可配置</a:t>
+              </a:r>
+            </a:p>
+          </p:txBody>
+        </p:sp>
+        <p:sp>
+          <p:nvSpPr>
+            <p:cNvPr id="25" name="TextBox 25"/>
+            <p:cNvSpPr txBox="1"/>
+            <p:nvPr/>
+          </p:nvSpPr>
+          <p:spPr>
+            <a:xfrm>
+              <a:off x="5003673" y="3539014"/>
+              <a:ext cx="1214438" cy="249364"/>
+            </a:xfrm>
+            <a:prstGeom prst="rect">
+              <a:avLst/>
+            </a:prstGeom>
+            <a:noFill/>
+            <a:ln>
+              <a:noFill/>
+            </a:ln>
+          </p:spPr>
+          <p:txBody>
+            <a:bodyPr wrap="none" lIns="0" tIns="0" rIns="0" bIns="0" anchor="t" anchorCtr="0">
+              <a:spAutoFit/>
+            </a:bodyPr>
+            <a:lstStyle/>
+            <a:p>
+              <a:pPr algn="l"/>
+              <a:r>
+                <a:rPr lang="zh-CN" sz="1280" dirty="0">
+                  <a:solidFill>
+                    <a:srgbClr val="5A6B7C"/>
+                  </a:solidFill>
+                  <a:latin typeface="Segoe UI"/>
+                  <a:ea typeface="Microsoft YaHei"/>
+                  <a:cs typeface="Segoe UI"/>
+                </a:rPr>
+                <a:t>数值与语义规则</a:t>
+              </a:r>
+            </a:p>
+          </p:txBody>
+        </p:sp>
+        <p:sp>
+          <p:nvSpPr>
+            <p:cNvPr id="26" name="Freeform 26"/>
+            <p:cNvSpPr/>
+            <p:nvPr/>
+          </p:nvSpPr>
+          <p:spPr>
+            <a:xfrm>
+              <a:off x="6648450" y="1962150"/>
+              <a:ext cx="2019300" cy="2286000"/>
+            </a:xfrm>
+            <a:custGeom>
+              <a:avLst/>
+              <a:gdLst/>
+              <a:ahLst/>
+              <a:cxnLst/>
+              <a:rect l="l" t="t" r="r" b="b"/>
+              <a:pathLst>
+                <a:path w="2019300" h="2286000">
+                  <a:moveTo>
+                    <a:pt x="0" y="0"/>
+                  </a:moveTo>
+                  <a:lnTo>
+                    <a:pt x="1733550" y="0"/>
+                  </a:lnTo>
+                  <a:lnTo>
+                    <a:pt x="2019300" y="1143000"/>
+                  </a:lnTo>
+                  <a:lnTo>
+                    <a:pt x="1733550" y="2286000"/>
+                  </a:lnTo>
+                  <a:lnTo>
+                    <a:pt x="0" y="2286000"/>
+                  </a:lnTo>
+                  <a:lnTo>
+                    <a:pt x="285750" y="1143000"/>
+                  </a:lnTo>
+                  <a:close/>
+                </a:path>
+              </a:pathLst>
+            </a:custGeom>
+            <a:solidFill>
+              <a:srgbClr val="FFFFFF"/>
+            </a:solidFill>
+            <a:ln w="19050">
+              <a:solidFill>
+                <a:srgbClr val="D97706"/>
+              </a:solidFill>
+            </a:ln>
+          </p:spPr>
+        </p:sp>
+        <p:sp>
+          <p:nvSpPr>
+            <p:cNvPr id="27" name="TextBox 27"/>
+            <p:cNvSpPr txBox="1"/>
+            <p:nvPr/>
+          </p:nvSpPr>
+          <p:spPr>
+            <a:xfrm>
+              <a:off x="7022973" y="2262664"/>
+              <a:ext cx="211199" cy="249364"/>
+            </a:xfrm>
+            <a:prstGeom prst="rect">
+              <a:avLst/>
+            </a:prstGeom>
+            <a:noFill/>
+            <a:ln>
+              <a:noFill/>
+            </a:ln>
+          </p:spPr>
+          <p:txBody>
+            <a:bodyPr wrap="none" lIns="0" tIns="0" rIns="0" bIns="0" anchor="t" anchorCtr="0">
+              <a:spAutoFit/>
+            </a:bodyPr>
+            <a:lstStyle/>
+            <a:p>
+              <a:pPr algn="l"/>
+              <a:r>
+                <a:rPr lang="en-US" sz="1280" b="1" dirty="0">
+                  <a:solidFill>
+                    <a:srgbClr val="B54708"/>
+                  </a:solidFill>
+                  <a:latin typeface="Consolas"/>
+                  <a:ea typeface="Consolas"/>
+                  <a:cs typeface="Consolas"/>
+                </a:rPr>
+                <a:t>04</a:t>
+              </a:r>
+            </a:p>
+          </p:txBody>
+        </p:sp>
+        <p:sp>
+          <p:nvSpPr>
+            <p:cNvPr id="28" name="TextBox 28"/>
+            <p:cNvSpPr txBox="1"/>
+            <p:nvPr/>
+          </p:nvSpPr>
+          <p:spPr>
+            <a:xfrm>
+              <a:off x="7020306" y="2586990"/>
+              <a:ext cx="1036015" cy="352044"/>
+            </a:xfrm>
+            <a:prstGeom prst="rect">
+              <a:avLst/>
+            </a:prstGeom>
+            <a:noFill/>
+            <a:ln>
+              <a:noFill/>
+            </a:ln>
+          </p:spPr>
+          <p:txBody>
+            <a:bodyPr wrap="none" lIns="0" tIns="0" rIns="0" bIns="0" anchor="t" anchorCtr="0">
+              <a:spAutoFit/>
+            </a:bodyPr>
+            <a:lstStyle/>
+            <a:p>
+              <a:pPr algn="l"/>
+              <a:r>
+                <a:rPr lang="zh-CN" sz="1800" b="1" dirty="0">
+                  <a:solidFill>
+                    <a:srgbClr val="132A3A"/>
+                  </a:solidFill>
+                  <a:latin typeface="Segoe UI Semibold"/>
+                  <a:ea typeface="Microsoft YaHei"/>
+                  <a:cs typeface="Segoe UI Semibold"/>
+                </a:rPr>
+                <a:t>执行能力</a:t>
+              </a:r>
+            </a:p>
+          </p:txBody>
+        </p:sp>
+        <p:sp>
+          <p:nvSpPr>
+            <p:cNvPr id="29" name="TextBox 29"/>
+            <p:cNvSpPr txBox="1"/>
+            <p:nvPr/>
+          </p:nvSpPr>
+          <p:spPr>
+            <a:xfrm>
+              <a:off x="7022973" y="3005614"/>
+              <a:ext cx="1158606" cy="249364"/>
+            </a:xfrm>
+            <a:prstGeom prst="rect">
+              <a:avLst/>
+            </a:prstGeom>
+            <a:noFill/>
+            <a:ln>
+              <a:noFill/>
+            </a:ln>
+          </p:spPr>
+          <p:txBody>
+            <a:bodyPr wrap="none" lIns="0" tIns="0" rIns="0" bIns="0" anchor="t" anchorCtr="0">
+              <a:spAutoFit/>
+            </a:bodyPr>
+            <a:lstStyle/>
+            <a:p>
+              <a:pPr algn="l"/>
+              <a:r>
+                <a:rPr lang="en-US" sz="1280" dirty="0">
+                  <a:solidFill>
+                    <a:srgbClr val="5A6B7C"/>
+                  </a:solidFill>
+                  <a:latin typeface="Segoe UI"/>
+                  <a:ea typeface="Segoe UI"/>
+                  <a:cs typeface="Segoe UI"/>
+                </a:rPr>
+                <a:t>Worker / Tool</a:t>
+              </a:r>
+            </a:p>
+          </p:txBody>
+        </p:sp>
+        <p:sp>
+          <p:nvSpPr>
+            <p:cNvPr id="30" name="TextBox 30"/>
+            <p:cNvSpPr txBox="1"/>
+            <p:nvPr/>
+          </p:nvSpPr>
+          <p:spPr>
+            <a:xfrm>
+              <a:off x="7022973" y="3272314"/>
+              <a:ext cx="1629905" cy="249364"/>
+            </a:xfrm>
+            <a:prstGeom prst="rect">
+              <a:avLst/>
+            </a:prstGeom>
+            <a:noFill/>
+            <a:ln>
+              <a:noFill/>
+            </a:ln>
+          </p:spPr>
+          <p:txBody>
+            <a:bodyPr wrap="none" lIns="0" tIns="0" rIns="0" bIns="0" anchor="t" anchorCtr="0">
+              <a:spAutoFit/>
+            </a:bodyPr>
+            <a:lstStyle/>
+            <a:p>
+              <a:pPr algn="l"/>
+              <a:r>
+                <a:rPr lang="en-US" sz="1280" dirty="0">
+                  <a:solidFill>
+                    <a:srgbClr val="5A6B7C"/>
+                  </a:solidFill>
+                  <a:latin typeface="Segoe UI"/>
+                  <a:ea typeface="Segoe UI"/>
+                  <a:cs typeface="Segoe UI"/>
+                </a:rPr>
+                <a:t>Connector / Permit</a:t>
+              </a:r>
+            </a:p>
+          </p:txBody>
+        </p:sp>
+        <p:sp>
+          <p:nvSpPr>
+            <p:cNvPr id="31" name="TextBox 31"/>
+            <p:cNvSpPr txBox="1"/>
+            <p:nvPr/>
+          </p:nvSpPr>
+          <p:spPr>
+            <a:xfrm>
+              <a:off x="7022973" y="3539014"/>
+              <a:ext cx="1214438" cy="249364"/>
+            </a:xfrm>
+            <a:prstGeom prst="rect">
+              <a:avLst/>
+            </a:prstGeom>
+            <a:noFill/>
+            <a:ln>
+              <a:noFill/>
+            </a:ln>
+          </p:spPr>
+          <p:txBody>
+            <a:bodyPr wrap="none" lIns="0" tIns="0" rIns="0" bIns="0" anchor="t" anchorCtr="0">
+              <a:spAutoFit/>
+            </a:bodyPr>
+            <a:lstStyle/>
+            <a:p>
+              <a:pPr algn="l"/>
+              <a:r>
+                <a:rPr lang="zh-CN" sz="1280" dirty="0">
+                  <a:solidFill>
+                    <a:srgbClr val="5A6B7C"/>
+                  </a:solidFill>
+                  <a:latin typeface="Segoe UI"/>
+                  <a:ea typeface="Microsoft YaHei"/>
+                  <a:cs typeface="Segoe UI"/>
+                </a:rPr>
+                <a:t>幂等与动作回执</a:t>
+              </a:r>
+            </a:p>
+          </p:txBody>
+        </p:sp>
+        <p:sp>
+          <p:nvSpPr>
+            <p:cNvPr id="32" name="Freeform 32"/>
+            <p:cNvSpPr/>
+            <p:nvPr/>
+          </p:nvSpPr>
+          <p:spPr>
+            <a:xfrm>
+              <a:off x="8667750" y="1962150"/>
+              <a:ext cx="1981200" cy="2286000"/>
+            </a:xfrm>
+            <a:custGeom>
+              <a:avLst/>
+              <a:gdLst/>
+              <a:ahLst/>
+              <a:cxnLst/>
+              <a:rect l="l" t="t" r="r" b="b"/>
+              <a:pathLst>
+                <a:path w="1981200" h="2286000">
+                  <a:moveTo>
+                    <a:pt x="0" y="0"/>
+                  </a:moveTo>
+                  <a:lnTo>
+                    <a:pt x="1695450" y="0"/>
+                  </a:lnTo>
+                  <a:lnTo>
+                    <a:pt x="1981200" y="1143000"/>
+                  </a:lnTo>
+                  <a:lnTo>
+                    <a:pt x="1695450" y="2286000"/>
+                  </a:lnTo>
+                  <a:lnTo>
+                    <a:pt x="0" y="2286000"/>
+                  </a:lnTo>
+                  <a:lnTo>
+                    <a:pt x="285750" y="1143000"/>
+                  </a:lnTo>
+                  <a:close/>
+                </a:path>
+              </a:pathLst>
+            </a:custGeom>
+            <a:solidFill>
+              <a:srgbClr val="EDF1F4"/>
+            </a:solidFill>
+            <a:ln w="19050">
+              <a:solidFill>
+                <a:srgbClr val="D97706"/>
+              </a:solidFill>
+            </a:ln>
+          </p:spPr>
+        </p:sp>
+        <p:sp>
+          <p:nvSpPr>
+            <p:cNvPr id="33" name="TextBox 33"/>
+            <p:cNvSpPr txBox="1"/>
+            <p:nvPr/>
+          </p:nvSpPr>
+          <p:spPr>
+            <a:xfrm>
+              <a:off x="9042273" y="2262664"/>
+              <a:ext cx="211199" cy="249364"/>
+            </a:xfrm>
+            <a:prstGeom prst="rect">
+              <a:avLst/>
+            </a:prstGeom>
+            <a:noFill/>
+            <a:ln>
+              <a:noFill/>
+            </a:ln>
+          </p:spPr>
+          <p:txBody>
+            <a:bodyPr wrap="none" lIns="0" tIns="0" rIns="0" bIns="0" anchor="t" anchorCtr="0">
+              <a:spAutoFit/>
+            </a:bodyPr>
+            <a:lstStyle/>
+            <a:p>
+              <a:pPr algn="l"/>
+              <a:r>
+                <a:rPr lang="en-US" sz="1280" b="1" dirty="0">
+                  <a:solidFill>
+                    <a:srgbClr val="B54708"/>
+                  </a:solidFill>
+                  <a:latin typeface="Consolas"/>
+                  <a:ea typeface="Consolas"/>
+                  <a:cs typeface="Consolas"/>
+                </a:rPr>
+                <a:t>05</a:t>
+              </a:r>
+            </a:p>
+          </p:txBody>
+        </p:sp>
+        <p:sp>
+          <p:nvSpPr>
+            <p:cNvPr id="34" name="TextBox 34"/>
+            <p:cNvSpPr txBox="1"/>
+            <p:nvPr/>
+          </p:nvSpPr>
+          <p:spPr>
+            <a:xfrm>
+              <a:off x="9039606" y="2586990"/>
+              <a:ext cx="1036015" cy="352044"/>
+            </a:xfrm>
+            <a:prstGeom prst="rect">
+              <a:avLst/>
+            </a:prstGeom>
+            <a:noFill/>
+            <a:ln>
+              <a:noFill/>
+            </a:ln>
+          </p:spPr>
+          <p:txBody>
+            <a:bodyPr wrap="none" lIns="0" tIns="0" rIns="0" bIns="0" anchor="t" anchorCtr="0">
+              <a:spAutoFit/>
+            </a:bodyPr>
+            <a:lstStyle/>
+            <a:p>
+              <a:pPr algn="l"/>
+              <a:r>
+                <a:rPr lang="zh-CN" sz="1800" b="1" dirty="0">
+                  <a:solidFill>
+                    <a:srgbClr val="132A3A"/>
+                  </a:solidFill>
+                  <a:latin typeface="Segoe UI Semibold"/>
+                  <a:ea typeface="Microsoft YaHei"/>
+                  <a:cs typeface="Segoe UI Semibold"/>
+                </a:rPr>
+                <a:t>同场挑战</a:t>
+              </a:r>
+            </a:p>
+          </p:txBody>
+        </p:sp>
+        <p:sp>
+          <p:nvSpPr>
+            <p:cNvPr id="35" name="TextBox 35"/>
+            <p:cNvSpPr txBox="1"/>
+            <p:nvPr/>
+          </p:nvSpPr>
+          <p:spPr>
+            <a:xfrm>
+              <a:off x="9042273" y="3005614"/>
+              <a:ext cx="1574883" cy="249364"/>
+            </a:xfrm>
+            <a:prstGeom prst="rect">
+              <a:avLst/>
+            </a:prstGeom>
+            <a:noFill/>
+            <a:ln>
+              <a:noFill/>
+            </a:ln>
+          </p:spPr>
+          <p:txBody>
+            <a:bodyPr wrap="none" lIns="0" tIns="0" rIns="0" bIns="0" anchor="t" anchorCtr="0">
+              <a:spAutoFit/>
+            </a:bodyPr>
+            <a:lstStyle/>
+            <a:p>
+              <a:pPr algn="l"/>
+              <a:r>
+                <a:rPr lang="zh-CN" sz="1280" dirty="0">
+                  <a:solidFill>
+                    <a:srgbClr val="5A6B7C"/>
+                  </a:solidFill>
+                  <a:latin typeface="Segoe UI"/>
+                  <a:ea typeface="Microsoft YaHei"/>
+                  <a:cs typeface="Segoe UI"/>
+                </a:rPr>
+                <a:t>固定任务/模型/来源</a:t>
+              </a:r>
+            </a:p>
+          </p:txBody>
+        </p:sp>
+        <p:sp>
+          <p:nvSpPr>
+            <p:cNvPr id="36" name="TextBox 36"/>
+            <p:cNvSpPr txBox="1"/>
+            <p:nvPr/>
+          </p:nvSpPr>
+          <p:spPr>
+            <a:xfrm>
+              <a:off x="9042273" y="3272314"/>
+              <a:ext cx="699516" cy="249364"/>
+            </a:xfrm>
+            <a:prstGeom prst="rect">
+              <a:avLst/>
+            </a:prstGeom>
+            <a:noFill/>
+            <a:ln>
+              <a:noFill/>
+            </a:ln>
+          </p:spPr>
+          <p:txBody>
+            <a:bodyPr wrap="none" lIns="0" tIns="0" rIns="0" bIns="0" anchor="t" anchorCtr="0">
+              <a:spAutoFit/>
+            </a:bodyPr>
+            <a:lstStyle/>
+            <a:p>
+              <a:pPr algn="l"/>
+              <a:r>
+                <a:rPr lang="zh-CN" sz="1280" dirty="0">
+                  <a:solidFill>
+                    <a:srgbClr val="5A6B7C"/>
+                  </a:solidFill>
+                  <a:latin typeface="Segoe UI"/>
+                  <a:ea typeface="Microsoft YaHei"/>
+                  <a:cs typeface="Segoe UI"/>
+                </a:rPr>
+                <a:t>竞品实测</a:t>
+              </a:r>
+            </a:p>
+          </p:txBody>
+        </p:sp>
+        <p:sp>
+          <p:nvSpPr>
+            <p:cNvPr id="37" name="TextBox 37"/>
+            <p:cNvSpPr txBox="1"/>
+            <p:nvPr/>
+          </p:nvSpPr>
+          <p:spPr>
+            <a:xfrm>
+              <a:off x="9042273" y="3539014"/>
+              <a:ext cx="1042797" cy="249364"/>
+            </a:xfrm>
+            <a:prstGeom prst="rect">
+              <a:avLst/>
+            </a:prstGeom>
+            <a:noFill/>
+            <a:ln>
+              <a:noFill/>
+            </a:ln>
+          </p:spPr>
+          <p:txBody>
+            <a:bodyPr wrap="none" lIns="0" tIns="0" rIns="0" bIns="0" anchor="t" anchorCtr="0">
+              <a:spAutoFit/>
+            </a:bodyPr>
+            <a:lstStyle/>
+            <a:p>
+              <a:pPr algn="l"/>
+              <a:r>
+                <a:rPr lang="zh-CN" sz="1280" dirty="0">
+                  <a:solidFill>
+                    <a:srgbClr val="5A6B7C"/>
+                  </a:solidFill>
+                  <a:latin typeface="Segoe UI"/>
+                  <a:ea typeface="Microsoft YaHei"/>
+                  <a:cs typeface="Segoe UI"/>
+                </a:rPr>
+                <a:t>目标用户研究</a:t>
+              </a:r>
+            </a:p>
+          </p:txBody>
+        </p:sp>
+        <p:sp>
+          <p:nvSpPr>
+            <p:cNvPr id="38" name="Freeform 38"/>
+            <p:cNvSpPr/>
+            <p:nvPr/>
+          </p:nvSpPr>
+          <p:spPr>
+            <a:xfrm>
+              <a:off x="10648950" y="1962150"/>
+              <a:ext cx="1047750" cy="2286000"/>
+            </a:xfrm>
+            <a:custGeom>
+              <a:avLst/>
+              <a:gdLst/>
+              <a:ahLst/>
+              <a:cxnLst/>
+              <a:rect l="l" t="t" r="r" b="b"/>
+              <a:pathLst>
+                <a:path w="1047750" h="2286000">
+                  <a:moveTo>
+                    <a:pt x="0" y="0"/>
+                  </a:moveTo>
+                  <a:lnTo>
+                    <a:pt x="1047750" y="0"/>
+                  </a:lnTo>
+                  <a:lnTo>
+                    <a:pt x="1047750" y="2286000"/>
+                  </a:lnTo>
+                  <a:lnTo>
+                    <a:pt x="0" y="2286000"/>
+                  </a:lnTo>
+                  <a:lnTo>
+                    <a:pt x="285750" y="1143000"/>
+                  </a:lnTo>
+                  <a:close/>
+                </a:path>
+              </a:pathLst>
+            </a:custGeom>
+            <a:solidFill>
+              <a:srgbClr val="132A3A"/>
+            </a:solidFill>
+            <a:ln>
+              <a:noFill/>
+            </a:ln>
+          </p:spPr>
+        </p:sp>
+        <p:sp>
+          <p:nvSpPr>
+            <p:cNvPr id="39" name="TextBox 39"/>
+            <p:cNvSpPr txBox="1"/>
+            <p:nvPr/>
+          </p:nvSpPr>
+          <p:spPr>
+            <a:xfrm>
+              <a:off x="10791558" y="2491740"/>
+              <a:ext cx="781583" cy="352044"/>
+            </a:xfrm>
+            <a:prstGeom prst="rect">
+              <a:avLst/>
+            </a:prstGeom>
+            <a:noFill/>
+            <a:ln>
+              <a:noFill/>
+            </a:ln>
+          </p:spPr>
+          <p:txBody>
+            <a:bodyPr wrap="none" lIns="0" tIns="0" rIns="0" bIns="0" anchor="t" anchorCtr="0">
+              <a:spAutoFit/>
+            </a:bodyPr>
+            <a:lstStyle/>
+            <a:p>
+              <a:pPr algn="ctr"/>
+              <a:r>
+                <a:rPr lang="zh-CN" sz="1800" b="1" dirty="0">
+                  <a:solidFill>
+                    <a:srgbClr val="FFFFFF"/>
+                  </a:solidFill>
+                  <a:latin typeface="Segoe UI Semibold"/>
+                  <a:ea typeface="Microsoft YaHei"/>
+                  <a:cs typeface="Segoe UI Semibold"/>
+                </a:rPr>
+                <a:t>已验证</a:t>
+              </a:r>
+            </a:p>
+          </p:txBody>
+        </p:sp>
+        <p:sp>
+          <p:nvSpPr>
+            <p:cNvPr id="40" name="TextBox 40"/>
+            <p:cNvSpPr txBox="1"/>
+            <p:nvPr/>
+          </p:nvSpPr>
+          <p:spPr>
+            <a:xfrm>
+              <a:off x="10918774" y="2815590"/>
+              <a:ext cx="527152" cy="352044"/>
+            </a:xfrm>
+            <a:prstGeom prst="rect">
+              <a:avLst/>
+            </a:prstGeom>
+            <a:noFill/>
+            <a:ln>
+              <a:noFill/>
+            </a:ln>
+          </p:spPr>
+          <p:txBody>
+            <a:bodyPr wrap="none" lIns="0" tIns="0" rIns="0" bIns="0" anchor="t" anchorCtr="0">
+              <a:spAutoFit/>
+            </a:bodyPr>
+            <a:lstStyle/>
+            <a:p>
+              <a:pPr algn="ctr"/>
+              <a:r>
+                <a:rPr lang="zh-CN" sz="1800" b="1" dirty="0">
+                  <a:solidFill>
+                    <a:srgbClr val="FFFFFF"/>
+                  </a:solidFill>
+                  <a:latin typeface="Segoe UI Semibold"/>
+                  <a:ea typeface="Microsoft YaHei"/>
+                  <a:cs typeface="Segoe UI Semibold"/>
+                </a:rPr>
+                <a:t>差异</a:t>
+              </a:r>
+            </a:p>
+          </p:txBody>
+        </p:sp>
+        <p:sp>
+          <p:nvSpPr>
+            <p:cNvPr id="41" name="TextBox 41"/>
+            <p:cNvSpPr txBox="1"/>
+            <p:nvPr/>
+          </p:nvSpPr>
+          <p:spPr>
+            <a:xfrm>
+              <a:off x="10894314" y="3372802"/>
+              <a:ext cx="576072" cy="205359"/>
+            </a:xfrm>
+            <a:prstGeom prst="rect">
+              <a:avLst/>
+            </a:prstGeom>
+            <a:noFill/>
+            <a:ln>
+              <a:noFill/>
+            </a:ln>
+          </p:spPr>
+          <p:txBody>
+            <a:bodyPr wrap="none" lIns="0" tIns="0" rIns="0" bIns="0" anchor="t" anchorCtr="0">
+              <a:spAutoFit/>
+            </a:bodyPr>
+            <a:lstStyle/>
+            <a:p>
+              <a:pPr algn="ctr"/>
+              <a:r>
+                <a:rPr lang="zh-CN" sz="1050" dirty="0">
+                  <a:solidFill>
+                    <a:srgbClr val="CBD5DF"/>
+                  </a:solidFill>
+                  <a:latin typeface="Segoe UI"/>
+                  <a:ea typeface="Microsoft YaHei"/>
+                  <a:cs typeface="Segoe UI"/>
+                </a:rPr>
+                <a:t>通过门后</a:t>
+              </a:r>
+            </a:p>
+          </p:txBody>
+        </p:sp>
+        <p:sp>
+          <p:nvSpPr>
+            <p:cNvPr id="42" name="TextBox 42"/>
+            <p:cNvSpPr txBox="1"/>
+            <p:nvPr/>
+          </p:nvSpPr>
+          <p:spPr>
+            <a:xfrm>
+              <a:off x="10752963" y="3601402"/>
+              <a:ext cx="858774" cy="205359"/>
+            </a:xfrm>
+            <a:prstGeom prst="rect">
+              <a:avLst/>
+            </a:prstGeom>
+            <a:noFill/>
+            <a:ln>
+              <a:noFill/>
+            </a:ln>
+          </p:spPr>
+          <p:txBody>
+            <a:bodyPr wrap="none" lIns="0" tIns="0" rIns="0" bIns="0" anchor="t" anchorCtr="0">
+              <a:spAutoFit/>
+            </a:bodyPr>
+            <a:lstStyle/>
+            <a:p>
+              <a:pPr algn="ctr"/>
+              <a:r>
+                <a:rPr lang="zh-CN" sz="1050" dirty="0">
+                  <a:solidFill>
+                    <a:srgbClr val="CBD5DF"/>
+                  </a:solidFill>
+                  <a:latin typeface="Segoe UI"/>
+                  <a:ea typeface="Microsoft YaHei"/>
+                  <a:cs typeface="Segoe UI"/>
+                </a:rPr>
+                <a:t>才可升级结论</a:t>
+              </a:r>
+            </a:p>
+          </p:txBody>
+        </p:sp>
+      </p:grpSp>
+      <p:grpSp>
+        <p:nvGrpSpPr>
+          <p:cNvPr id="46" name="Group 46"/>
+          <p:cNvGrpSpPr/>
+          <p:nvPr/>
+        </p:nvGrpSpPr>
+        <p:grpSpPr>
+          <a:xfrm>
+            <a:off x="483108" y="4712970"/>
+            <a:ext cx="7826959" cy="888492"/>
+            <a:chOff x="483108" y="4712970"/>
+            <a:chExt cx="7826959" cy="888492"/>
+          </a:xfrm>
+        </p:grpSpPr>
+        <p:sp>
+          <p:nvSpPr>
+            <p:cNvPr id="44" name="TextBox 44"/>
+            <p:cNvSpPr txBox="1"/>
+            <p:nvPr/>
+          </p:nvSpPr>
+          <p:spPr>
+            <a:xfrm>
+              <a:off x="483108" y="4712970"/>
+              <a:ext cx="6056498" cy="469392"/>
+            </a:xfrm>
+            <a:prstGeom prst="rect">
+              <a:avLst/>
+            </a:prstGeom>
+            <a:noFill/>
+            <a:ln>
+              <a:noFill/>
+            </a:ln>
+          </p:spPr>
+          <p:txBody>
+            <a:bodyPr wrap="none" lIns="0" tIns="0" rIns="0" bIns="0" anchor="t" anchorCtr="0">
+              <a:spAutoFit/>
+            </a:bodyPr>
+            <a:lstStyle/>
+            <a:p>
+              <a:pPr algn="l"/>
+              <a:r>
+                <a:rPr lang="zh-CN" sz="2400" b="1" dirty="0">
+                  <a:solidFill>
+                    <a:srgbClr val="132A3A"/>
+                  </a:solidFill>
+                  <a:latin typeface="Segoe UI Semibold"/>
+                  <a:ea typeface="Microsoft YaHei"/>
+                  <a:cs typeface="Segoe UI Semibold"/>
+                </a:rPr>
+                <a:t>Office Agent 的产品，不是一段回答；</a:t>
+              </a:r>
+            </a:p>
+          </p:txBody>
+        </p:sp>
+        <p:sp>
+          <p:nvSpPr>
+            <p:cNvPr id="45" name="TextBox 45"/>
+            <p:cNvSpPr txBox="1"/>
+            <p:nvPr/>
+          </p:nvSpPr>
+          <p:spPr>
+            <a:xfrm>
+              <a:off x="483108" y="5132070"/>
+              <a:ext cx="7826959" cy="469392"/>
+            </a:xfrm>
+            <a:prstGeom prst="rect">
+              <a:avLst/>
+            </a:prstGeom>
+            <a:noFill/>
+            <a:ln>
+              <a:noFill/>
+            </a:ln>
+          </p:spPr>
+          <p:txBody>
+            <a:bodyPr wrap="none" lIns="0" tIns="0" rIns="0" bIns="0" anchor="t" anchorCtr="0">
+              <a:spAutoFit/>
+            </a:bodyPr>
+            <a:lstStyle/>
+            <a:p>
+              <a:pPr algn="l"/>
+              <a:r>
+                <a:rPr lang="zh-CN" sz="2400" b="1" dirty="0">
+                  <a:solidFill>
+                    <a:srgbClr val="1769E0"/>
+                  </a:solidFill>
+                  <a:latin typeface="Segoe UI Semibold"/>
+                  <a:ea typeface="Microsoft YaHei"/>
+                  <a:cs typeface="Segoe UI Semibold"/>
+                </a:rPr>
+                <a:t>而是一份可复核、可恢复、可追责的当前工作结论。</a:t>
+              </a:r>
+            </a:p>
+          </p:txBody>
+        </p:sp>
+      </p:grpSp>
+      <p:grpSp>
+        <p:nvGrpSpPr>
+          <p:cNvPr id="49" name="Group 49"/>
+          <p:cNvGrpSpPr/>
+          <p:nvPr/>
+        </p:nvGrpSpPr>
+        <p:grpSpPr>
+          <a:xfrm>
+            <a:off x="495300" y="5810250"/>
+            <a:ext cx="11201400" cy="419100"/>
+            <a:chOff x="495300" y="5810250"/>
+            <a:chExt cx="11201400" cy="419100"/>
+          </a:xfrm>
+        </p:grpSpPr>
+        <p:sp>
+          <p:nvSpPr>
+            <p:cNvPr id="47" name="Rectangle 47"/>
+            <p:cNvSpPr/>
+            <p:nvPr/>
+          </p:nvSpPr>
+          <p:spPr>
+            <a:xfrm>
+              <a:off x="495300" y="5810250"/>
+              <a:ext cx="11201400" cy="419100"/>
+            </a:xfrm>
+            <a:prstGeom prst="roundRect">
+              <a:avLst>
+                <a:gd name="adj" fmla="val 13636"/>
+              </a:avLst>
+            </a:prstGeom>
+            <a:solidFill>
+              <a:srgbClr val="EDF1F4"/>
+            </a:solidFill>
+            <a:ln>
+              <a:noFill/>
+            </a:ln>
+          </p:spPr>
+        </p:sp>
+        <p:sp>
+          <p:nvSpPr>
+            <p:cNvPr id="48" name="TextBox 48"/>
+            <p:cNvSpPr txBox="1"/>
+            <p:nvPr/>
+          </p:nvSpPr>
+          <p:spPr>
+            <a:xfrm>
+              <a:off x="717423" y="5939314"/>
+              <a:ext cx="5861685" cy="249364"/>
+            </a:xfrm>
+            <a:prstGeom prst="rect">
+              <a:avLst/>
+            </a:prstGeom>
+            <a:noFill/>
+            <a:ln>
+              <a:noFill/>
+            </a:ln>
+          </p:spPr>
+          <p:txBody>
+            <a:bodyPr wrap="none" lIns="0" tIns="0" rIns="0" bIns="0" anchor="t" anchorCtr="0">
+              <a:spAutoFit/>
+            </a:bodyPr>
+            <a:lstStyle/>
+            <a:p>
+              <a:pPr algn="l"/>
+              <a:r>
+                <a:rPr lang="zh-CN" sz="1280" dirty="0">
+                  <a:solidFill>
+                    <a:srgbClr val="5A6B7C"/>
+                  </a:solidFill>
+                  <a:latin typeface="Segoe UI"/>
+                  <a:ea typeface="Microsoft YaHei"/>
+                  <a:cs typeface="Segoe UI"/>
+                </a:rPr>
+                <a:t>当前不证明全面领先 · 不证明生产 SLA · 不证明用户已经更信任或更高效</a:t>
+              </a:r>
+            </a:p>
+          </p:txBody>
+        </p:sp>
+      </p:grpSp>
+      <p:grpSp>
+        <p:nvGrpSpPr>
+          <p:cNvPr id="52" name="Group 52"/>
+          <p:cNvGrpSpPr/>
+          <p:nvPr/>
+        </p:nvGrpSpPr>
+        <p:grpSpPr>
+          <a:xfrm>
+            <a:off x="489966" y="6458902"/>
+            <a:ext cx="11212068" cy="205359"/>
+            <a:chOff x="489966" y="6458902"/>
+            <a:chExt cx="11212068" cy="205359"/>
+          </a:xfrm>
+        </p:grpSpPr>
+        <p:sp>
+          <p:nvSpPr>
+            <p:cNvPr id="50" name="TextBox 50"/>
+            <p:cNvSpPr txBox="1"/>
+            <p:nvPr/>
+          </p:nvSpPr>
+          <p:spPr>
+            <a:xfrm>
+              <a:off x="489966" y="6458902"/>
+              <a:ext cx="5639211" cy="205359"/>
+            </a:xfrm>
+            <a:prstGeom prst="rect">
+              <a:avLst/>
+            </a:prstGeom>
+            <a:noFill/>
+            <a:ln>
+              <a:noFill/>
+            </a:ln>
+          </p:spPr>
+          <p:txBody>
+            <a:bodyPr wrap="none" lIns="0" tIns="0" rIns="0" bIns="0" anchor="t" anchorCtr="0">
+              <a:spAutoFit/>
+            </a:bodyPr>
+            <a:lstStyle/>
+            <a:p>
+              <a:pPr algn="l"/>
+              <a:r>
+                <a:rPr lang="zh-CN" sz="1050" dirty="0">
+                  <a:solidFill>
+                    <a:srgbClr val="7C8A98"/>
+                  </a:solidFill>
+                  <a:latin typeface="Segoe UI"/>
+                  <a:ea typeface="Microsoft YaHei"/>
+                  <a:cs typeface="Segoe UI"/>
+                </a:rPr>
+                <a:t>研究路线依据：MCP · A2A · W3C PROV-O · Microsoft HAI Guidelines · Google HEART</a:t>
+              </a:r>
+            </a:p>
+          </p:txBody>
+        </p:sp>
+        <p:sp>
+          <p:nvSpPr>
+            <p:cNvPr id="51" name="TextBox 51"/>
+            <p:cNvSpPr txBox="1"/>
+            <p:nvPr/>
+          </p:nvSpPr>
+          <p:spPr>
+            <a:xfrm>
+              <a:off x="11217840" y="6458902"/>
+              <a:ext cx="484194" cy="205359"/>
+            </a:xfrm>
+            <a:prstGeom prst="rect">
+              <a:avLst/>
+            </a:prstGeom>
+            <a:noFill/>
+            <a:ln>
+              <a:noFill/>
+            </a:ln>
+          </p:spPr>
+          <p:txBody>
+            <a:bodyPr wrap="none" lIns="0" tIns="0" rIns="0" bIns="0" anchor="t" anchorCtr="0">
+              <a:spAutoFit/>
+            </a:bodyPr>
+            <a:lstStyle/>
+            <a:p>
+              <a:pPr algn="r"/>
+              <a:r>
+                <a:rPr lang="en-US" sz="1050" dirty="0">
+                  <a:solidFill>
+                    <a:srgbClr val="7C8A98"/>
+                  </a:solidFill>
+                  <a:latin typeface="Consolas"/>
+                  <a:ea typeface="Consolas"/>
+                  <a:cs typeface="Consolas"/>
+                </a:rPr>
+                <a:t>21 / 21</a:t>
               </a:r>
             </a:p>
           </p:txBody>
@@ -24288,7 +29011,7 @@
                   <a:ea typeface="Consolas"/>
                   <a:cs typeface="Consolas"/>
                 </a:rPr>
-                <a:t>03 / 17</a:t>
+                <a:t>03 / 21</a:t>
               </a:r>
             </a:p>
           </p:txBody>
@@ -27727,7 +32450,7 @@
                   <a:ea typeface="Consolas"/>
                   <a:cs typeface="Consolas"/>
                 </a:rPr>
-                <a:t>04 / 17</a:t>
+                <a:t>04 / 21</a:t>
               </a:r>
             </a:p>
           </p:txBody>
@@ -29645,7 +34368,7 @@
                   <a:ea typeface="Consolas"/>
                   <a:cs typeface="Consolas"/>
                 </a:rPr>
-                <a:t>05 / 17</a:t>
+                <a:t>05 / 21</a:t>
               </a:r>
             </a:p>
           </p:txBody>
@@ -32036,7 +36759,7 @@
                   <a:ea typeface="Consolas"/>
                   <a:cs typeface="Consolas"/>
                 </a:rPr>
-                <a:t>06 / 17</a:t>
+                <a:t>06 / 21</a:t>
               </a:r>
             </a:p>
           </p:txBody>
@@ -34313,7 +39036,7 @@
                   <a:ea typeface="Consolas"/>
                   <a:cs typeface="Consolas"/>
                 </a:rPr>
-                <a:t>07 / 17</a:t>
+                <a:t>07 / 21</a:t>
               </a:r>
             </a:p>
           </p:txBody>
@@ -37608,7 +42331,7 @@
                   <a:ea typeface="Consolas"/>
                   <a:cs typeface="Consolas"/>
                 </a:rPr>
-                <a:t>08 / 17</a:t>
+                <a:t>08 / 21</a:t>
               </a:r>
             </a:p>
           </p:txBody>
@@ -40087,7 +44810,7 @@
                   <a:ea typeface="Consolas"/>
                   <a:cs typeface="Consolas"/>
                 </a:rPr>
-                <a:t>09 / 17</a:t>
+                <a:t>09 / 21</a:t>
               </a:r>
             </a:p>
           </p:txBody>
